--- a/docs/TEAM_DEMO_SLIDES.pptx
+++ b/docs/TEAM_DEMO_SLIDES.pptx
@@ -11,9 +11,11 @@
     <p:sldId id="259" r:id="rId5"/>
     <p:sldId id="260" r:id="rId6"/>
     <p:sldId id="261" r:id="rId7"/>
+    <p:sldId id="262" r:id="rId8"/>
+    <p:sldId id="263" r:id="rId9"/>
   </p:sldIdLst>
   <p:notesMasterIdLst>
-    <p:notesMasterId r:id="rId8"/>
+    <p:notesMasterId r:id="rId10"/>
   </p:notesMasterIdLst>
   <p:sldSz cx="12192000" cy="6858000"/>
   <p:notesSz cx="6858000" cy="12192000"/>
@@ -507,7 +509,7 @@
           <a:p>
             <a:r>
               <a:rPr lang="en-US" dirty="0"/>
-              <a:t>Framing: this is about agents improving with use. Ten minutes: three of slides, five live, then questions.</a:t>
+              <a:t>Framing: this is about agents improving with use. Today's version has more architecture depth for the team — system design, the turn flow, the data model — plus the live demo. About 15 minutes total.</a:t>
             </a:r>
             <a:endParaRPr lang="en-US" dirty="0"/>
           </a:p>
@@ -595,7 +597,7 @@
           <a:p>
             <a:r>
               <a:rPr lang="en-US" dirty="0"/>
-              <a:t>Left: the problem — stateless agents, users repeat themselves. Right: what it is in one breath — durable per-user facts in the harness, scoped in the database, off by default, zero new infrastructure.</a:t>
+              <a:t>Left: the problem — stateless agents, users repeat themselves. Right: what it is in one breath. Next three slides go deep on architecture before we touch the console.</a:t>
             </a:r>
             <a:endParaRPr lang="en-US" dirty="0"/>
           </a:p>
@@ -683,7 +685,7 @@
           <a:p>
             <a:r>
               <a:rPr lang="en-US" dirty="0"/>
-              <a:t>Top: the turn lifecycle — recall with the brain-emoji receipt, explicit tool saves, background extraction, and every write through the gate; contradictions supersede with full history. Bottom: the five safety properties — off by default with a guard test, fail-closed identity, denylist, content-free logs, deletable and auditable.</a:t>
+              <a:t>Walk top to bottom: a caller sends profile/user/tenant on the turn request. The harness API — FastAPI, with TurnService and the SDK runner — is where our three insertion points live. The memory package is five files: recall, store, semantic, extraction, tool. It shares the harness's own Postgres — same database, no new service — and it side-calls Azure OpenAI for embeddings and small-model decisions. Two callouts worth saying out loud: memory now shares the harness's DB connection pool instead of running its own engine, and the schema is versioned with Alembic with a reviewed baseline — both were review feedback we implemented and verified. This reflects the architecture in the merge request now under review; the live demo in a few minutes runs on our stable pre-review build for reliability.</a:t>
             </a:r>
             <a:endParaRPr lang="en-US" dirty="0"/>
           </a:p>
@@ -771,7 +773,7 @@
           <a:p>
             <a:r>
               <a:rPr lang="en-US" dirty="0"/>
-              <a:t>Ten seconds on this slide so the room knows the beats, then switch to the console and run them. Beat 2 is the money shot — pause after the recital lands.</a:t>
+              <a:t>This is the lifecycle of one turn. Recall runs first and ranks by relevance and recency. The recalled facts get fenced as data today in the instructions — moving to a dedicated input-list item is the next planned step, since instructions are supposed to be the authority channel, not user data. The model responds with the recall indicator. Two independent paths can write: an explicit save_memory tool call, or a background extraction pass after the turn that never blocks it. Either path goes through one write gate — exact-duplicate check, then embedding similarity, then a small model adjudicates real contradictions. The result is either a new row or a supersede — the old fact is retired with a pointer to its replacement, never deleted.</a:t>
             </a:r>
             <a:endParaRPr lang="en-US" dirty="0"/>
           </a:p>
@@ -859,7 +861,7 @@
           <a:p>
             <a:r>
               <a:rPr lang="en-US" dirty="0"/>
-              <a:t>Since the last demo this went through Subomi's formal review. Left: the foundation items, done. Right: the merge request is in review right now, and the second wave is designed — governance APIs, durable extraction, the injection channel, console tenants.</a:t>
+              <a:t>Left: one append-only table, scoped by agent/user/tenant, with a pgvector column for semantic recall and the fields that make supersede possible. The three-box chain is the point — a contradiction never overwrites, it retires the old row and points to the new one, so the full history is always there for audit. Right: this is a bank, so safety is the design. Off by default with a guard test, fail-closed identity, a denylist at write time, logs that never carry content, and everything soft-deletable with one call.</a:t>
             </a:r>
             <a:endParaRPr lang="en-US" dirty="0"/>
           </a:p>
@@ -947,7 +949,7 @@
           <a:p>
             <a:r>
               <a:rPr lang="en-US" dirty="0"/>
-              <a:t>Open the floor. Predicted Q&amp;A is in the walkthrough doc: isn't this chat history; deletion and privacy; cost per turn; can my agent use it.</a:t>
+              <a:t>Ten seconds on this slide so the room knows the beats, then switch to the console and run them. Beat 2 is the money shot — pause after the recital lands.</a:t>
             </a:r>
             <a:endParaRPr lang="en-US" dirty="0"/>
           </a:p>
@@ -971,6 +973,182 @@
             <a:fld id="{F7021451-1387-4CA6-816F-3879F97B5CBC}" type="slidenum">
               <a:rPr lang="en-US"/>
               <a:t>6</a:t>
+            </a:fld>
+            <a:endParaRPr lang="en-US"/>
+          </a:p>
+        </p:txBody>
+      </p:sp>
+    </p:spTree>
+    <p:extLst>
+      <p:ext uri="{BB962C8B-B14F-4D97-AF65-F5344CB8AC3E}">
+        <p14:creationId xmlns:p14="http://schemas.microsoft.com/office/powerpoint/2010/main" val="1024086991"/>
+      </p:ext>
+    </p:extLst>
+  </p:cSld>
+  <p:clrMapOvr>
+    <a:masterClrMapping/>
+  </p:clrMapOvr>
+</p:notes>
+</file>
+
+<file path=ppt/notesSlides/notesSlide7.xml><?xml version="1.0" encoding="utf-8"?>
+<p:notes xmlns:a="http://schemas.openxmlformats.org/drawingml/2006/main" xmlns:r="http://schemas.openxmlformats.org/officeDocument/2006/relationships" xmlns:p="http://schemas.openxmlformats.org/presentationml/2006/main">
+  <p:cSld>
+    <p:spTree>
+      <p:nvGrpSpPr>
+        <p:cNvPr id="1" name=""/>
+        <p:cNvGrpSpPr/>
+        <p:nvPr/>
+      </p:nvGrpSpPr>
+      <p:grpSpPr>
+        <a:xfrm>
+          <a:off x="0" y="0"/>
+          <a:ext cx="0" cy="0"/>
+          <a:chOff x="0" y="0"/>
+          <a:chExt cx="0" cy="0"/>
+        </a:xfrm>
+      </p:grpSpPr>
+      <p:sp>
+        <p:nvSpPr>
+          <p:cNvPr id="2" name="Slide Image Placeholder 1"/>
+          <p:cNvSpPr>
+            <a:spLocks noGrp="1" noRot="1" noChangeAspect="1"/>
+          </p:cNvSpPr>
+          <p:nvPr>
+            <p:ph type="sldImg"/>
+          </p:nvPr>
+        </p:nvSpPr>
+        <p:spPr/>
+      </p:sp>
+      <p:sp>
+        <p:nvSpPr>
+          <p:cNvPr id="3" name="Notes Placeholder 2"/>
+          <p:cNvSpPr>
+            <a:spLocks noGrp="1"/>
+          </p:cNvSpPr>
+          <p:nvPr>
+            <p:ph type="body" idx="1"/>
+          </p:nvPr>
+        </p:nvSpPr>
+        <p:spPr/>
+        <p:txBody>
+          <a:bodyPr/>
+          <a:lstStyle/>
+          <a:p>
+            <a:r>
+              <a:rPr lang="en-US" dirty="0"/>
+              <a:t>Since the last demo this went through Subomi's formal review. Left: the foundation items, done, with receipts on every one. Right: the merge request is in review right now, and the second wave is designed — the injection channel change from slide 4, durable extraction, governance APIs, console tenants.</a:t>
+            </a:r>
+            <a:endParaRPr lang="en-US" dirty="0"/>
+          </a:p>
+        </p:txBody>
+      </p:sp>
+      <p:sp>
+        <p:nvSpPr>
+          <p:cNvPr id="4" name="Slide Number Placeholder 3"/>
+          <p:cNvSpPr>
+            <a:spLocks noGrp="1"/>
+          </p:cNvSpPr>
+          <p:nvPr>
+            <p:ph type="sldNum" sz="quarter" idx="10"/>
+          </p:nvPr>
+        </p:nvSpPr>
+        <p:spPr/>
+        <p:txBody>
+          <a:bodyPr/>
+          <a:lstStyle/>
+          <a:p>
+            <a:fld id="{F7021451-1387-4CA6-816F-3879F97B5CBC}" type="slidenum">
+              <a:rPr lang="en-US"/>
+              <a:t>7</a:t>
+            </a:fld>
+            <a:endParaRPr lang="en-US"/>
+          </a:p>
+        </p:txBody>
+      </p:sp>
+    </p:spTree>
+    <p:extLst>
+      <p:ext uri="{BB962C8B-B14F-4D97-AF65-F5344CB8AC3E}">
+        <p14:creationId xmlns:p14="http://schemas.microsoft.com/office/powerpoint/2010/main" val="1024086991"/>
+      </p:ext>
+    </p:extLst>
+  </p:cSld>
+  <p:clrMapOvr>
+    <a:masterClrMapping/>
+  </p:clrMapOvr>
+</p:notes>
+</file>
+
+<file path=ppt/notesSlides/notesSlide8.xml><?xml version="1.0" encoding="utf-8"?>
+<p:notes xmlns:a="http://schemas.openxmlformats.org/drawingml/2006/main" xmlns:r="http://schemas.openxmlformats.org/officeDocument/2006/relationships" xmlns:p="http://schemas.openxmlformats.org/presentationml/2006/main">
+  <p:cSld>
+    <p:spTree>
+      <p:nvGrpSpPr>
+        <p:cNvPr id="1" name=""/>
+        <p:cNvGrpSpPr/>
+        <p:nvPr/>
+      </p:nvGrpSpPr>
+      <p:grpSpPr>
+        <a:xfrm>
+          <a:off x="0" y="0"/>
+          <a:ext cx="0" cy="0"/>
+          <a:chOff x="0" y="0"/>
+          <a:chExt cx="0" cy="0"/>
+        </a:xfrm>
+      </p:grpSpPr>
+      <p:sp>
+        <p:nvSpPr>
+          <p:cNvPr id="2" name="Slide Image Placeholder 1"/>
+          <p:cNvSpPr>
+            <a:spLocks noGrp="1" noRot="1" noChangeAspect="1"/>
+          </p:cNvSpPr>
+          <p:nvPr>
+            <p:ph type="sldImg"/>
+          </p:nvPr>
+        </p:nvSpPr>
+        <p:spPr/>
+      </p:sp>
+      <p:sp>
+        <p:nvSpPr>
+          <p:cNvPr id="3" name="Notes Placeholder 2"/>
+          <p:cNvSpPr>
+            <a:spLocks noGrp="1"/>
+          </p:cNvSpPr>
+          <p:nvPr>
+            <p:ph type="body" idx="1"/>
+          </p:nvPr>
+        </p:nvSpPr>
+        <p:spPr/>
+        <p:txBody>
+          <a:bodyPr/>
+          <a:lstStyle/>
+          <a:p>
+            <a:r>
+              <a:rPr lang="en-US" dirty="0"/>
+              <a:t>Open the floor. Predicted Q&amp;A is in the walkthrough doc: isn't this chat history; deletion and privacy; cost per turn; can my agent use it.</a:t>
+            </a:r>
+            <a:endParaRPr lang="en-US" dirty="0"/>
+          </a:p>
+        </p:txBody>
+      </p:sp>
+      <p:sp>
+        <p:nvSpPr>
+          <p:cNvPr id="4" name="Slide Number Placeholder 3"/>
+          <p:cNvSpPr>
+            <a:spLocks noGrp="1"/>
+          </p:cNvSpPr>
+          <p:nvPr>
+            <p:ph type="sldNum" sz="quarter" idx="10"/>
+          </p:nvPr>
+        </p:nvSpPr>
+        <p:spPr/>
+        <p:txBody>
+          <a:bodyPr/>
+          <a:lstStyle/>
+          <a:p>
+            <a:fld id="{F7021451-1387-4CA6-816F-3879F97B5CBC}" type="slidenum">
+              <a:rPr lang="en-US"/>
+              <a:t>8</a:t>
             </a:fld>
             <a:endParaRPr lang="en-US"/>
           </a:p>
@@ -1407,7 +1585,7 @@
         <p:spPr>
           <a:xfrm>
             <a:off x="548640" y="3291840"/>
-            <a:ext cx="7132320" cy="822960"/>
+            <a:ext cx="7223760" cy="822960"/>
           </a:xfrm>
           <a:prstGeom prst="rect">
             <a:avLst/>
@@ -1434,7 +1612,7 @@
                 <a:ea typeface="Arial" pitchFamily="34" charset="-122"/>
                 <a:cs typeface="Arial" pitchFamily="34" charset="-120"/>
               </a:rPr>
-              <a:t>Persistent, per-user memory for DIGIT agents — they get better the more people use them.</a:t>
+              <a:t>Persistent, per-user memory for DIGIT agents — architecture, safety, and a live demo.</a:t>
             </a:r>
             <a:endParaRPr lang="en-US" sz="1700" dirty="0"/>
           </a:p>
@@ -1564,7 +1742,7 @@
         <p:spPr>
           <a:xfrm>
             <a:off x="548640" y="457200"/>
-            <a:ext cx="11064240" cy="640080"/>
+            <a:ext cx="11064240" cy="594360"/>
           </a:xfrm>
           <a:prstGeom prst="rect">
             <a:avLst/>
@@ -1602,8 +1780,8 @@
         </p:nvSpPr>
         <p:spPr>
           <a:xfrm>
-            <a:off x="548640" y="1371600"/>
-            <a:ext cx="2743200" cy="320040"/>
+            <a:off x="548640" y="1325880"/>
+            <a:ext cx="2743200" cy="292608"/>
           </a:xfrm>
           <a:prstGeom prst="rect">
             <a:avLst/>
@@ -1641,8 +1819,8 @@
         </p:nvSpPr>
         <p:spPr>
           <a:xfrm>
-            <a:off x="548640" y="1828800"/>
-            <a:ext cx="475488" cy="475488"/>
+            <a:off x="548640" y="1737360"/>
+            <a:ext cx="457200" cy="457200"/>
           </a:xfrm>
           <a:prstGeom prst="ellipse">
             <a:avLst/>
@@ -1669,8 +1847,8 @@
         </p:blipFill>
         <p:spPr>
           <a:xfrm>
-            <a:off x="677022" y="1957182"/>
-            <a:ext cx="218724" cy="218724"/>
+            <a:off x="672084" y="1860804"/>
+            <a:ext cx="210312" cy="210312"/>
           </a:xfrm>
           <a:prstGeom prst="rect">
             <a:avLst/>
@@ -1685,8 +1863,8 @@
         </p:nvSpPr>
         <p:spPr>
           <a:xfrm>
-            <a:off x="1234440" y="1847088"/>
-            <a:ext cx="4572000" cy="822960"/>
+            <a:off x="1207008" y="1737360"/>
+            <a:ext cx="4663440" cy="777240"/>
           </a:xfrm>
           <a:prstGeom prst="rect">
             <a:avLst/>
@@ -1727,8 +1905,8 @@
         </p:nvSpPr>
         <p:spPr>
           <a:xfrm>
-            <a:off x="548640" y="2788920"/>
-            <a:ext cx="475488" cy="475488"/>
+            <a:off x="548640" y="2651760"/>
+            <a:ext cx="457200" cy="457200"/>
           </a:xfrm>
           <a:prstGeom prst="ellipse">
             <a:avLst/>
@@ -1755,8 +1933,8 @@
         </p:blipFill>
         <p:spPr>
           <a:xfrm>
-            <a:off x="677022" y="2917302"/>
-            <a:ext cx="218724" cy="218724"/>
+            <a:off x="672084" y="2775204"/>
+            <a:ext cx="210312" cy="210312"/>
           </a:xfrm>
           <a:prstGeom prst="rect">
             <a:avLst/>
@@ -1771,8 +1949,8 @@
         </p:nvSpPr>
         <p:spPr>
           <a:xfrm>
-            <a:off x="1234440" y="2807208"/>
-            <a:ext cx="4572000" cy="822960"/>
+            <a:off x="1207008" y="2651760"/>
+            <a:ext cx="4663440" cy="777240"/>
           </a:xfrm>
           <a:prstGeom prst="rect">
             <a:avLst/>
@@ -1813,8 +1991,8 @@
         </p:nvSpPr>
         <p:spPr>
           <a:xfrm>
-            <a:off x="548640" y="3749040"/>
-            <a:ext cx="475488" cy="475488"/>
+            <a:off x="548640" y="3566160"/>
+            <a:ext cx="457200" cy="457200"/>
           </a:xfrm>
           <a:prstGeom prst="ellipse">
             <a:avLst/>
@@ -1841,8 +2019,8 @@
         </p:blipFill>
         <p:spPr>
           <a:xfrm>
-            <a:off x="677022" y="3877422"/>
-            <a:ext cx="218724" cy="218724"/>
+            <a:off x="672084" y="3689604"/>
+            <a:ext cx="210312" cy="210312"/>
           </a:xfrm>
           <a:prstGeom prst="rect">
             <a:avLst/>
@@ -1857,8 +2035,8 @@
         </p:nvSpPr>
         <p:spPr>
           <a:xfrm>
-            <a:off x="1234440" y="3767328"/>
-            <a:ext cx="4572000" cy="822960"/>
+            <a:off x="1207008" y="3566160"/>
+            <a:ext cx="4663440" cy="777240"/>
           </a:xfrm>
           <a:prstGeom prst="rect">
             <a:avLst/>
@@ -1899,7 +2077,7 @@
         </p:nvSpPr>
         <p:spPr>
           <a:xfrm>
-            <a:off x="548640" y="4892040"/>
+            <a:off x="548640" y="4617720"/>
             <a:ext cx="5212080" cy="914400"/>
           </a:xfrm>
           <a:prstGeom prst="rect">
@@ -1958,12 +2136,12 @@
         </p:nvSpPr>
         <p:spPr>
           <a:xfrm>
-            <a:off x="6309360" y="1371600"/>
-            <a:ext cx="5330952" cy="4846320"/>
+            <a:off x="6309360" y="1325880"/>
+            <a:ext cx="5330952" cy="4892040"/>
           </a:xfrm>
           <a:prstGeom prst="roundRect">
             <a:avLst>
-              <a:gd name="adj" fmla="val 1887"/>
+              <a:gd name="adj" fmla="val 1869"/>
             </a:avLst>
           </a:prstGeom>
           <a:solidFill>
@@ -1980,8 +2158,8 @@
         </p:nvSpPr>
         <p:spPr>
           <a:xfrm>
-            <a:off x="6675120" y="1691640"/>
-            <a:ext cx="4572000" cy="320040"/>
+            <a:off x="6675120" y="1627632"/>
+            <a:ext cx="4572000" cy="292608"/>
           </a:xfrm>
           <a:prstGeom prst="rect">
             <a:avLst/>
@@ -2019,7 +2197,7 @@
         </p:nvSpPr>
         <p:spPr>
           <a:xfrm>
-            <a:off x="6675120" y="2103120"/>
+            <a:off x="6675120" y="2011680"/>
             <a:ext cx="4617720" cy="1051560"/>
           </a:xfrm>
           <a:prstGeom prst="rect">
@@ -2061,7 +2239,7 @@
         </p:nvSpPr>
         <p:spPr>
           <a:xfrm>
-            <a:off x="6675120" y="3429000"/>
+            <a:off x="6675120" y="3337560"/>
             <a:ext cx="365760" cy="365760"/>
           </a:xfrm>
           <a:prstGeom prst="ellipse">
@@ -2089,7 +2267,7 @@
         </p:blipFill>
         <p:spPr>
           <a:xfrm>
-            <a:off x="6773875" y="3527755"/>
+            <a:off x="6773875" y="3436315"/>
             <a:ext cx="168250" cy="168250"/>
           </a:xfrm>
           <a:prstGeom prst="rect">
@@ -2105,7 +2283,7 @@
         </p:nvSpPr>
         <p:spPr>
           <a:xfrm>
-            <a:off x="7178040" y="3429000"/>
+            <a:off x="7178040" y="3337560"/>
             <a:ext cx="4160520" cy="548640"/>
           </a:xfrm>
           <a:prstGeom prst="rect">
@@ -2147,7 +2325,7 @@
         </p:nvSpPr>
         <p:spPr>
           <a:xfrm>
-            <a:off x="6675120" y="4087368"/>
+            <a:off x="6675120" y="3995928"/>
             <a:ext cx="365760" cy="365760"/>
           </a:xfrm>
           <a:prstGeom prst="ellipse">
@@ -2175,7 +2353,7 @@
         </p:blipFill>
         <p:spPr>
           <a:xfrm>
-            <a:off x="6773875" y="4186123"/>
+            <a:off x="6773875" y="4094683"/>
             <a:ext cx="168250" cy="168250"/>
           </a:xfrm>
           <a:prstGeom prst="rect">
@@ -2191,7 +2369,7 @@
         </p:nvSpPr>
         <p:spPr>
           <a:xfrm>
-            <a:off x="7178040" y="4087368"/>
+            <a:off x="7178040" y="3995928"/>
             <a:ext cx="4160520" cy="548640"/>
           </a:xfrm>
           <a:prstGeom prst="rect">
@@ -2233,7 +2411,7 @@
         </p:nvSpPr>
         <p:spPr>
           <a:xfrm>
-            <a:off x="6675120" y="4745736"/>
+            <a:off x="6675120" y="4654296"/>
             <a:ext cx="365760" cy="365760"/>
           </a:xfrm>
           <a:prstGeom prst="ellipse">
@@ -2261,7 +2439,7 @@
         </p:blipFill>
         <p:spPr>
           <a:xfrm>
-            <a:off x="6773875" y="4844491"/>
+            <a:off x="6773875" y="4753051"/>
             <a:ext cx="168250" cy="168250"/>
           </a:xfrm>
           <a:prstGeom prst="rect">
@@ -2277,7 +2455,7 @@
         </p:nvSpPr>
         <p:spPr>
           <a:xfrm>
-            <a:off x="7178040" y="4745736"/>
+            <a:off x="7178040" y="4654296"/>
             <a:ext cx="4160520" cy="548640"/>
           </a:xfrm>
           <a:prstGeom prst="rect">
@@ -2319,7 +2497,7 @@
         </p:nvSpPr>
         <p:spPr>
           <a:xfrm>
-            <a:off x="6675120" y="5404104"/>
+            <a:off x="6675120" y="5312664"/>
             <a:ext cx="365760" cy="365760"/>
           </a:xfrm>
           <a:prstGeom prst="ellipse">
@@ -2347,7 +2525,7 @@
         </p:blipFill>
         <p:spPr>
           <a:xfrm>
-            <a:off x="6773875" y="5502859"/>
+            <a:off x="6773875" y="5411419"/>
             <a:ext cx="168250" cy="168250"/>
           </a:xfrm>
           <a:prstGeom prst="rect">
@@ -2363,7 +2541,7 @@
         </p:nvSpPr>
         <p:spPr>
           <a:xfrm>
-            <a:off x="7178040" y="5404104"/>
+            <a:off x="7178040" y="5312664"/>
             <a:ext cx="4160520" cy="548640"/>
           </a:xfrm>
           <a:prstGeom prst="rect">
@@ -2438,7 +2616,7 @@
         <p:spPr>
           <a:xfrm>
             <a:off x="548640" y="457200"/>
-            <a:ext cx="11064240" cy="640080"/>
+            <a:ext cx="11064240" cy="502920"/>
           </a:xfrm>
           <a:prstGeom prst="rect">
             <a:avLst/>
@@ -2462,7 +2640,7 @@
                 <a:ea typeface="Arial" pitchFamily="34" charset="-122"/>
                 <a:cs typeface="Arial" pitchFamily="34" charset="-120"/>
               </a:rPr>
-              <a:t>How it works — and why it's safe</a:t>
+              <a:t>System architecture — where memory lives</a:t>
             </a:r>
             <a:endParaRPr lang="en-US" sz="3000" dirty="0"/>
           </a:p>
@@ -2470,18 +2648,57 @@
       </p:sp>
       <p:sp>
         <p:nvSpPr>
-          <p:cNvPr id="3" name="Shape 1"/>
-          <p:cNvSpPr/>
-          <p:nvPr/>
-        </p:nvSpPr>
-        <p:spPr>
-          <a:xfrm>
-            <a:off x="548640" y="1325880"/>
-            <a:ext cx="2670048" cy="2514600"/>
+          <p:cNvPr id="3" name="Text 1"/>
+          <p:cNvSpPr/>
+          <p:nvPr/>
+        </p:nvSpPr>
+        <p:spPr>
+          <a:xfrm>
+            <a:off x="548640" y="987552"/>
+            <a:ext cx="11064240" cy="292608"/>
+          </a:xfrm>
+          <a:prstGeom prst="rect">
+            <a:avLst/>
+          </a:prstGeom>
+          <a:noFill/>
+          <a:ln/>
+        </p:spPr>
+        <p:txBody>
+          <a:bodyPr wrap="square" rtlCol="0" anchor="ctr"/>
+          <a:lstStyle/>
+          <a:p>
+            <a:pPr indent="0" marL="0">
+              <a:buNone/>
+            </a:pPr>
+            <a:r>
+              <a:rPr lang="en-US" sz="1300" i="1" dirty="0">
+                <a:solidFill>
+                  <a:srgbClr val="5F5F5F"/>
+                </a:solidFill>
+                <a:latin typeface="Arial" pitchFamily="34" charset="0"/>
+                <a:ea typeface="Arial" pitchFamily="34" charset="-122"/>
+                <a:cs typeface="Arial" pitchFamily="34" charset="-120"/>
+              </a:rPr>
+              <a:t>One flag turns memory on; everything below runs on infrastructure the harness already has.</a:t>
+            </a:r>
+            <a:endParaRPr lang="en-US" sz="1300" dirty="0"/>
+          </a:p>
+        </p:txBody>
+      </p:sp>
+      <p:sp>
+        <p:nvSpPr>
+          <p:cNvPr id="4" name="Shape 2"/>
+          <p:cNvSpPr/>
+          <p:nvPr/>
+        </p:nvSpPr>
+        <p:spPr>
+          <a:xfrm>
+            <a:off x="1613916" y="1417320"/>
+            <a:ext cx="5943600" cy="594360"/>
           </a:xfrm>
           <a:prstGeom prst="roundRect">
             <a:avLst>
-              <a:gd name="adj" fmla="val 2909"/>
+              <a:gd name="adj" fmla="val 12308"/>
             </a:avLst>
           </a:prstGeom>
           <a:solidFill>
@@ -2492,27 +2709,27 @@
       </p:sp>
       <p:sp>
         <p:nvSpPr>
-          <p:cNvPr id="4" name="Shape 2"/>
-          <p:cNvSpPr/>
-          <p:nvPr/>
-        </p:nvSpPr>
-        <p:spPr>
-          <a:xfrm>
-            <a:off x="749808" y="1545336"/>
-            <a:ext cx="457200" cy="457200"/>
+          <p:cNvPr id="5" name="Shape 3"/>
+          <p:cNvSpPr/>
+          <p:nvPr/>
+        </p:nvSpPr>
+        <p:spPr>
+          <a:xfrm>
+            <a:off x="1760220" y="1490472"/>
+            <a:ext cx="448056" cy="448056"/>
           </a:xfrm>
           <a:prstGeom prst="ellipse">
             <a:avLst/>
           </a:prstGeom>
           <a:solidFill>
-            <a:srgbClr val="1A1A1A"/>
+            <a:srgbClr val="FFFFFF"/>
           </a:solidFill>
           <a:ln/>
         </p:spPr>
       </p:sp>
       <p:pic>
         <p:nvPicPr>
-          <p:cNvPr id="5" name="Image 0" descr="preencoded.png">    </p:cNvPr>
+          <p:cNvPr id="6" name="Image 0" descr="preencoded.png">    </p:cNvPr>
           <p:cNvPicPr>
             <a:picLocks noChangeAspect="1"/>
           </p:cNvPicPr>
@@ -2526,8 +2743,8 @@
         </p:blipFill>
         <p:spPr>
           <a:xfrm>
-            <a:off x="873252" y="1668780"/>
-            <a:ext cx="210312" cy="210312"/>
+            <a:off x="1881195" y="1611447"/>
+            <a:ext cx="206106" cy="206106"/>
           </a:xfrm>
           <a:prstGeom prst="rect">
             <a:avLst/>
@@ -2536,30 +2753,30 @@
       </p:pic>
       <p:sp>
         <p:nvSpPr>
-          <p:cNvPr id="6" name="Text 3"/>
-          <p:cNvSpPr/>
-          <p:nvPr/>
-        </p:nvSpPr>
-        <p:spPr>
-          <a:xfrm>
-            <a:off x="749808" y="2148840"/>
-            <a:ext cx="2267712" cy="365760"/>
-          </a:xfrm>
-          <a:prstGeom prst="rect">
-            <a:avLst/>
-          </a:prstGeom>
-          <a:noFill/>
-          <a:ln/>
-        </p:spPr>
-        <p:txBody>
-          <a:bodyPr wrap="square" lIns="0" tIns="0" rIns="0" bIns="0" rtlCol="0" anchor="ctr"/>
-          <a:lstStyle/>
-          <a:p>
-            <a:pPr indent="0" marL="0">
-              <a:buNone/>
-            </a:pPr>
-            <a:r>
-              <a:rPr lang="en-US" sz="1450" b="1" dirty="0">
+          <p:cNvPr id="7" name="Text 4"/>
+          <p:cNvSpPr/>
+          <p:nvPr/>
+        </p:nvSpPr>
+        <p:spPr>
+          <a:xfrm>
+            <a:off x="2354580" y="1490472"/>
+            <a:ext cx="5056632" cy="273406"/>
+          </a:xfrm>
+          <a:prstGeom prst="rect">
+            <a:avLst/>
+          </a:prstGeom>
+          <a:noFill/>
+          <a:ln/>
+        </p:spPr>
+        <p:txBody>
+          <a:bodyPr wrap="square" lIns="0" tIns="0" rIns="0" bIns="0" rtlCol="0" anchor="t"/>
+          <a:lstStyle/>
+          <a:p>
+            <a:pPr indent="0" marL="0">
+              <a:buNone/>
+            </a:pPr>
+            <a:r>
+              <a:rPr lang="en-US" sz="1350" b="1" dirty="0">
                 <a:solidFill>
                   <a:srgbClr val="1A1A1A"/>
                 </a:solidFill>
@@ -2567,41 +2784,41 @@
                 <a:ea typeface="Arial" pitchFamily="34" charset="-122"/>
                 <a:cs typeface="Arial" pitchFamily="34" charset="-120"/>
               </a:rPr>
-              <a:t>Recall at turn start</a:t>
-            </a:r>
-            <a:endParaRPr lang="en-US" sz="1450" dirty="0"/>
-          </a:p>
-        </p:txBody>
-      </p:sp>
-      <p:sp>
-        <p:nvSpPr>
-          <p:cNvPr id="7" name="Text 4"/>
-          <p:cNvSpPr/>
-          <p:nvPr/>
-        </p:nvSpPr>
-        <p:spPr>
-          <a:xfrm>
-            <a:off x="749808" y="2514600"/>
-            <a:ext cx="2267712" cy="1234440"/>
-          </a:xfrm>
-          <a:prstGeom prst="rect">
-            <a:avLst/>
-          </a:prstGeom>
-          <a:noFill/>
-          <a:ln/>
-        </p:spPr>
-        <p:txBody>
-          <a:bodyPr wrap="square" lIns="0" tIns="0" rIns="0" bIns="0" rtlCol="0" anchor="ctr"/>
+              <a:t>Agent Console / API callers</a:t>
+            </a:r>
+            <a:endParaRPr lang="en-US" sz="1350" dirty="0"/>
+          </a:p>
+        </p:txBody>
+      </p:sp>
+      <p:sp>
+        <p:nvSpPr>
+          <p:cNvPr id="8" name="Text 5"/>
+          <p:cNvSpPr/>
+          <p:nvPr/>
+        </p:nvSpPr>
+        <p:spPr>
+          <a:xfrm>
+            <a:off x="2354580" y="1740103"/>
+            <a:ext cx="5056632" cy="297180"/>
+          </a:xfrm>
+          <a:prstGeom prst="rect">
+            <a:avLst/>
+          </a:prstGeom>
+          <a:noFill/>
+          <a:ln/>
+        </p:spPr>
+        <p:txBody>
+          <a:bodyPr wrap="square" lIns="0" tIns="0" rIns="0" bIns="0" rtlCol="0" anchor="t"/>
           <a:lstStyle/>
           <a:p>
             <a:pPr indent="0" marL="0">
               <a:lnSpc>
-                <a:spcPct val="110000"/>
+                <a:spcPct val="105000"/>
               </a:lnSpc>
               <a:buNone/>
             </a:pPr>
             <a:r>
-              <a:rPr lang="en-US" sz="1150" dirty="0">
+              <a:rPr lang="en-US" sz="1050" dirty="0">
                 <a:solidFill>
                   <a:srgbClr val="5F5F5F"/>
                 </a:solidFill>
@@ -2609,57 +2826,77 @@
                 <a:ea typeface="Arial" pitchFamily="34" charset="-122"/>
                 <a:cs typeface="Arial" pitchFamily="34" charset="-120"/>
               </a:rPr>
-              <a:t>Facts ranked by relevance + recency, injected as fenced data. Receipt: “🧠 Recalled N memories”.</a:t>
-            </a:r>
-            <a:endParaRPr lang="en-US" sz="1150" dirty="0"/>
-          </a:p>
-        </p:txBody>
-      </p:sp>
-      <p:sp>
-        <p:nvSpPr>
-          <p:cNvPr id="8" name="Shape 5"/>
-          <p:cNvSpPr/>
-          <p:nvPr/>
-        </p:nvSpPr>
-        <p:spPr>
-          <a:xfrm>
-            <a:off x="3419856" y="1325880"/>
-            <a:ext cx="2670048" cy="2514600"/>
+              <a:t>profile_id · user · tenant_id in the turn request</a:t>
+            </a:r>
+            <a:endParaRPr lang="en-US" sz="1050" dirty="0"/>
+          </a:p>
+        </p:txBody>
+      </p:sp>
+      <p:sp>
+        <p:nvSpPr>
+          <p:cNvPr id="9" name="Shape 6"/>
+          <p:cNvSpPr/>
+          <p:nvPr/>
+        </p:nvSpPr>
+        <p:spPr>
+          <a:xfrm>
+            <a:off x="4439412" y="2011680"/>
+            <a:ext cx="292608" cy="228600"/>
+          </a:xfrm>
+          <a:prstGeom prst="downArrow">
+            <a:avLst/>
+          </a:prstGeom>
+          <a:solidFill>
+            <a:srgbClr val="EC0016"/>
+          </a:solidFill>
+          <a:ln/>
+        </p:spPr>
+      </p:sp>
+      <p:sp>
+        <p:nvSpPr>
+          <p:cNvPr id="10" name="Shape 7"/>
+          <p:cNvSpPr/>
+          <p:nvPr/>
+        </p:nvSpPr>
+        <p:spPr>
+          <a:xfrm>
+            <a:off x="1613916" y="2240280"/>
+            <a:ext cx="5943600" cy="914400"/>
           </a:xfrm>
           <a:prstGeom prst="roundRect">
             <a:avLst>
-              <a:gd name="adj" fmla="val 2909"/>
+              <a:gd name="adj" fmla="val 8000"/>
             </a:avLst>
           </a:prstGeom>
           <a:solidFill>
-            <a:srgbClr val="F4F4F4"/>
-          </a:solidFill>
-          <a:ln/>
-        </p:spPr>
-      </p:sp>
-      <p:sp>
-        <p:nvSpPr>
-          <p:cNvPr id="9" name="Shape 6"/>
-          <p:cNvSpPr/>
-          <p:nvPr/>
-        </p:nvSpPr>
-        <p:spPr>
-          <a:xfrm>
-            <a:off x="3621024" y="1545336"/>
+            <a:srgbClr val="0F0F0F"/>
+          </a:solidFill>
+          <a:ln/>
+        </p:spPr>
+      </p:sp>
+      <p:sp>
+        <p:nvSpPr>
+          <p:cNvPr id="11" name="Shape 8"/>
+          <p:cNvSpPr/>
+          <p:nvPr/>
+        </p:nvSpPr>
+        <p:spPr>
+          <a:xfrm>
+            <a:off x="1760220" y="2468880"/>
             <a:ext cx="457200" cy="457200"/>
           </a:xfrm>
           <a:prstGeom prst="ellipse">
             <a:avLst/>
           </a:prstGeom>
           <a:solidFill>
-            <a:srgbClr val="1A1A1A"/>
+            <a:srgbClr val="1E1E1E"/>
           </a:solidFill>
           <a:ln/>
         </p:spPr>
       </p:sp>
       <p:pic>
         <p:nvPicPr>
-          <p:cNvPr id="10" name="Image 1" descr="preencoded.png">    </p:cNvPr>
+          <p:cNvPr id="12" name="Image 1" descr="preencoded.png">    </p:cNvPr>
           <p:cNvPicPr>
             <a:picLocks noChangeAspect="1"/>
           </p:cNvPicPr>
@@ -2673,7 +2910,7 @@
         </p:blipFill>
         <p:spPr>
           <a:xfrm>
-            <a:off x="3744468" y="1668780"/>
+            <a:off x="1883664" y="2592324"/>
             <a:ext cx="210312" cy="210312"/>
           </a:xfrm>
           <a:prstGeom prst="rect">
@@ -2683,99 +2920,119 @@
       </p:pic>
       <p:sp>
         <p:nvSpPr>
-          <p:cNvPr id="11" name="Text 7"/>
-          <p:cNvSpPr/>
-          <p:nvPr/>
-        </p:nvSpPr>
-        <p:spPr>
-          <a:xfrm>
-            <a:off x="3621024" y="2148840"/>
-            <a:ext cx="2267712" cy="365760"/>
-          </a:xfrm>
-          <a:prstGeom prst="rect">
-            <a:avLst/>
-          </a:prstGeom>
-          <a:noFill/>
-          <a:ln/>
-        </p:spPr>
-        <p:txBody>
-          <a:bodyPr wrap="square" lIns="0" tIns="0" rIns="0" bIns="0" rtlCol="0" anchor="ctr"/>
-          <a:lstStyle/>
-          <a:p>
-            <a:pPr indent="0" marL="0">
-              <a:buNone/>
-            </a:pPr>
-            <a:r>
-              <a:rPr lang="en-US" sz="1450" b="1" dirty="0">
-                <a:solidFill>
-                  <a:srgbClr val="1A1A1A"/>
-                </a:solidFill>
-                <a:latin typeface="Arial" pitchFamily="34" charset="0"/>
-                <a:ea typeface="Arial" pitchFamily="34" charset="-122"/>
-                <a:cs typeface="Arial" pitchFamily="34" charset="-120"/>
-              </a:rPr>
-              <a:t>Explicit saves</a:t>
-            </a:r>
-            <a:endParaRPr lang="en-US" sz="1450" dirty="0"/>
-          </a:p>
-        </p:txBody>
-      </p:sp>
-      <p:sp>
-        <p:nvSpPr>
-          <p:cNvPr id="12" name="Text 8"/>
-          <p:cNvSpPr/>
-          <p:nvPr/>
-        </p:nvSpPr>
-        <p:spPr>
-          <a:xfrm>
-            <a:off x="3621024" y="2514600"/>
-            <a:ext cx="2267712" cy="1234440"/>
-          </a:xfrm>
-          <a:prstGeom prst="rect">
-            <a:avLst/>
-          </a:prstGeom>
-          <a:noFill/>
-          <a:ln/>
-        </p:spPr>
-        <p:txBody>
-          <a:bodyPr wrap="square" lIns="0" tIns="0" rIns="0" bIns="0" rtlCol="0" anchor="ctr"/>
+          <p:cNvPr id="13" name="Text 9"/>
+          <p:cNvSpPr/>
+          <p:nvPr/>
+        </p:nvSpPr>
+        <p:spPr>
+          <a:xfrm>
+            <a:off x="2363724" y="2313432"/>
+            <a:ext cx="5047488" cy="420624"/>
+          </a:xfrm>
+          <a:prstGeom prst="rect">
+            <a:avLst/>
+          </a:prstGeom>
+          <a:noFill/>
+          <a:ln/>
+        </p:spPr>
+        <p:txBody>
+          <a:bodyPr wrap="square" lIns="0" tIns="0" rIns="0" bIns="0" rtlCol="0" anchor="t"/>
+          <a:lstStyle/>
+          <a:p>
+            <a:pPr indent="0" marL="0">
+              <a:buNone/>
+            </a:pPr>
+            <a:r>
+              <a:rPr lang="en-US" sz="1350" b="1" dirty="0">
+                <a:solidFill>
+                  <a:srgbClr val="FFFFFF"/>
+                </a:solidFill>
+                <a:latin typeface="Arial" pitchFamily="34" charset="0"/>
+                <a:ea typeface="Arial" pitchFamily="34" charset="-122"/>
+                <a:cs typeface="Arial" pitchFamily="34" charset="-120"/>
+              </a:rPr>
+              <a:t>DIGIT Harness API — FastAPI</a:t>
+            </a:r>
+            <a:endParaRPr lang="en-US" sz="1350" dirty="0"/>
+          </a:p>
+        </p:txBody>
+      </p:sp>
+      <p:sp>
+        <p:nvSpPr>
+          <p:cNvPr id="14" name="Text 10"/>
+          <p:cNvSpPr/>
+          <p:nvPr/>
+        </p:nvSpPr>
+        <p:spPr>
+          <a:xfrm>
+            <a:off x="2363724" y="2697480"/>
+            <a:ext cx="5047488" cy="457200"/>
+          </a:xfrm>
+          <a:prstGeom prst="rect">
+            <a:avLst/>
+          </a:prstGeom>
+          <a:noFill/>
+          <a:ln/>
+        </p:spPr>
+        <p:txBody>
+          <a:bodyPr wrap="square" lIns="0" tIns="0" rIns="0" bIns="0" rtlCol="0" anchor="t"/>
           <a:lstStyle/>
           <a:p>
             <a:pPr indent="0" marL="0">
               <a:lnSpc>
-                <a:spcPct val="110000"/>
+                <a:spcPct val="105000"/>
               </a:lnSpc>
               <a:buNone/>
             </a:pPr>
             <a:r>
-              <a:rPr lang="en-US" sz="1150" dirty="0">
-                <a:solidFill>
-                  <a:srgbClr val="5F5F5F"/>
-                </a:solidFill>
-                <a:latin typeface="Arial" pitchFamily="34" charset="0"/>
-                <a:ea typeface="Arial" pitchFamily="34" charset="-122"/>
-                <a:cs typeface="Arial" pitchFamily="34" charset="-120"/>
-              </a:rPr>
-              <a:t>The agent calls save_memory for durable statements — visible as a tool call.</a:t>
-            </a:r>
-            <a:endParaRPr lang="en-US" sz="1150" dirty="0"/>
-          </a:p>
-        </p:txBody>
-      </p:sp>
-      <p:sp>
-        <p:nvSpPr>
-          <p:cNvPr id="13" name="Shape 9"/>
-          <p:cNvSpPr/>
-          <p:nvPr/>
-        </p:nvSpPr>
-        <p:spPr>
-          <a:xfrm>
-            <a:off x="6291072" y="1325880"/>
-            <a:ext cx="2670048" cy="2514600"/>
+              <a:rPr lang="en-US" sz="1050" dirty="0">
+                <a:solidFill>
+                  <a:srgbClr val="D9D9D9"/>
+                </a:solidFill>
+                <a:latin typeface="Arial" pitchFamily="34" charset="0"/>
+                <a:ea typeface="Arial" pitchFamily="34" charset="-122"/>
+                <a:cs typeface="Arial" pitchFamily="34" charset="-120"/>
+              </a:rPr>
+              <a:t>ToolRegistry · TurnService · SDK Runner (sdk_runner.py)</a:t>
+            </a:r>
+            <a:endParaRPr lang="en-US" sz="1050" dirty="0"/>
+          </a:p>
+        </p:txBody>
+      </p:sp>
+      <p:sp>
+        <p:nvSpPr>
+          <p:cNvPr id="15" name="Shape 11"/>
+          <p:cNvSpPr/>
+          <p:nvPr/>
+        </p:nvSpPr>
+        <p:spPr>
+          <a:xfrm>
+            <a:off x="4439412" y="3154680"/>
+            <a:ext cx="292608" cy="228600"/>
+          </a:xfrm>
+          <a:prstGeom prst="downArrow">
+            <a:avLst/>
+          </a:prstGeom>
+          <a:solidFill>
+            <a:srgbClr val="EC0016"/>
+          </a:solidFill>
+          <a:ln/>
+        </p:spPr>
+      </p:sp>
+      <p:sp>
+        <p:nvSpPr>
+          <p:cNvPr id="16" name="Shape 12"/>
+          <p:cNvSpPr/>
+          <p:nvPr/>
+        </p:nvSpPr>
+        <p:spPr>
+          <a:xfrm>
+            <a:off x="1613916" y="3383280"/>
+            <a:ext cx="5943600" cy="914400"/>
           </a:xfrm>
           <a:prstGeom prst="roundRect">
             <a:avLst>
-              <a:gd name="adj" fmla="val 2909"/>
+              <a:gd name="adj" fmla="val 8000"/>
             </a:avLst>
           </a:prstGeom>
           <a:solidFill>
@@ -2786,27 +3043,27 @@
       </p:sp>
       <p:sp>
         <p:nvSpPr>
-          <p:cNvPr id="14" name="Shape 10"/>
-          <p:cNvSpPr/>
-          <p:nvPr/>
-        </p:nvSpPr>
-        <p:spPr>
-          <a:xfrm>
-            <a:off x="6492240" y="1545336"/>
+          <p:cNvPr id="17" name="Shape 13"/>
+          <p:cNvSpPr/>
+          <p:nvPr/>
+        </p:nvSpPr>
+        <p:spPr>
+          <a:xfrm>
+            <a:off x="1760220" y="3611880"/>
             <a:ext cx="457200" cy="457200"/>
           </a:xfrm>
           <a:prstGeom prst="ellipse">
             <a:avLst/>
           </a:prstGeom>
           <a:solidFill>
-            <a:srgbClr val="1A1A1A"/>
+            <a:srgbClr val="FFFFFF"/>
           </a:solidFill>
           <a:ln/>
         </p:spPr>
       </p:sp>
       <p:pic>
         <p:nvPicPr>
-          <p:cNvPr id="15" name="Image 2" descr="preencoded.png">    </p:cNvPr>
+          <p:cNvPr id="18" name="Image 2" descr="preencoded.png">    </p:cNvPr>
           <p:cNvPicPr>
             <a:picLocks noChangeAspect="1"/>
           </p:cNvPicPr>
@@ -2820,7 +3077,7 @@
         </p:blipFill>
         <p:spPr>
           <a:xfrm>
-            <a:off x="6615684" y="1668780"/>
+            <a:off x="1883664" y="3735324"/>
             <a:ext cx="210312" cy="210312"/>
           </a:xfrm>
           <a:prstGeom prst="rect">
@@ -2830,30 +3087,30 @@
       </p:pic>
       <p:sp>
         <p:nvSpPr>
-          <p:cNvPr id="16" name="Text 11"/>
-          <p:cNvSpPr/>
-          <p:nvPr/>
-        </p:nvSpPr>
-        <p:spPr>
-          <a:xfrm>
-            <a:off x="6492240" y="2148840"/>
-            <a:ext cx="2267712" cy="365760"/>
-          </a:xfrm>
-          <a:prstGeom prst="rect">
-            <a:avLst/>
-          </a:prstGeom>
-          <a:noFill/>
-          <a:ln/>
-        </p:spPr>
-        <p:txBody>
-          <a:bodyPr wrap="square" lIns="0" tIns="0" rIns="0" bIns="0" rtlCol="0" anchor="ctr"/>
-          <a:lstStyle/>
-          <a:p>
-            <a:pPr indent="0" marL="0">
-              <a:buNone/>
-            </a:pPr>
-            <a:r>
-              <a:rPr lang="en-US" sz="1450" b="1" dirty="0">
+          <p:cNvPr id="19" name="Text 14"/>
+          <p:cNvSpPr/>
+          <p:nvPr/>
+        </p:nvSpPr>
+        <p:spPr>
+          <a:xfrm>
+            <a:off x="2363724" y="3456432"/>
+            <a:ext cx="5047488" cy="420624"/>
+          </a:xfrm>
+          <a:prstGeom prst="rect">
+            <a:avLst/>
+          </a:prstGeom>
+          <a:noFill/>
+          <a:ln/>
+        </p:spPr>
+        <p:txBody>
+          <a:bodyPr wrap="square" lIns="0" tIns="0" rIns="0" bIns="0" rtlCol="0" anchor="t"/>
+          <a:lstStyle/>
+          <a:p>
+            <a:pPr indent="0" marL="0">
+              <a:buNone/>
+            </a:pPr>
+            <a:r>
+              <a:rPr lang="en-US" sz="1350" b="1" dirty="0">
                 <a:solidFill>
                   <a:srgbClr val="1A1A1A"/>
                 </a:solidFill>
@@ -2861,41 +3118,41 @@
                 <a:ea typeface="Arial" pitchFamily="34" charset="-122"/>
                 <a:cs typeface="Arial" pitchFamily="34" charset="-120"/>
               </a:rPr>
-              <a:t>Background extraction</a:t>
-            </a:r>
-            <a:endParaRPr lang="en-US" sz="1450" dirty="0"/>
-          </a:p>
-        </p:txBody>
-      </p:sp>
-      <p:sp>
-        <p:nvSpPr>
-          <p:cNvPr id="17" name="Text 12"/>
-          <p:cNvSpPr/>
-          <p:nvPr/>
-        </p:nvSpPr>
-        <p:spPr>
-          <a:xfrm>
-            <a:off x="6492240" y="2514600"/>
-            <a:ext cx="2267712" cy="1234440"/>
-          </a:xfrm>
-          <a:prstGeom prst="rect">
-            <a:avLst/>
-          </a:prstGeom>
-          <a:noFill/>
-          <a:ln/>
-        </p:spPr>
-        <p:txBody>
-          <a:bodyPr wrap="square" lIns="0" tIns="0" rIns="0" bIns="0" rtlCol="0" anchor="ctr"/>
+              <a:t>Agent Memory Package</a:t>
+            </a:r>
+            <a:endParaRPr lang="en-US" sz="1350" dirty="0"/>
+          </a:p>
+        </p:txBody>
+      </p:sp>
+      <p:sp>
+        <p:nvSpPr>
+          <p:cNvPr id="20" name="Text 15"/>
+          <p:cNvSpPr/>
+          <p:nvPr/>
+        </p:nvSpPr>
+        <p:spPr>
+          <a:xfrm>
+            <a:off x="2363724" y="3840480"/>
+            <a:ext cx="5047488" cy="457200"/>
+          </a:xfrm>
+          <a:prstGeom prst="rect">
+            <a:avLst/>
+          </a:prstGeom>
+          <a:noFill/>
+          <a:ln/>
+        </p:spPr>
+        <p:txBody>
+          <a:bodyPr wrap="square" lIns="0" tIns="0" rIns="0" bIns="0" rtlCol="0" anchor="t"/>
           <a:lstStyle/>
           <a:p>
             <a:pPr indent="0" marL="0">
               <a:lnSpc>
-                <a:spcPct val="110000"/>
+                <a:spcPct val="105000"/>
               </a:lnSpc>
               <a:buNone/>
             </a:pPr>
             <a:r>
-              <a:rPr lang="en-US" sz="1150" dirty="0">
+              <a:rPr lang="en-US" sz="1050" dirty="0">
                 <a:solidFill>
                   <a:srgbClr val="5F5F5F"/>
                 </a:solidFill>
@@ -2903,26 +3160,46 @@
                 <a:ea typeface="Arial" pitchFamily="34" charset="-122"/>
                 <a:cs typeface="Arial" pitchFamily="34" charset="-120"/>
               </a:rPr>
-              <a:t>After the turn, quietly captures durable facts. Never blocks or breaks a turn.</a:t>
-            </a:r>
-            <a:endParaRPr lang="en-US" sz="1150" dirty="0"/>
-          </a:p>
-        </p:txBody>
-      </p:sp>
-      <p:sp>
-        <p:nvSpPr>
-          <p:cNvPr id="18" name="Shape 13"/>
-          <p:cNvSpPr/>
-          <p:nvPr/>
-        </p:nvSpPr>
-        <p:spPr>
-          <a:xfrm>
-            <a:off x="9162288" y="1325880"/>
-            <a:ext cx="2670048" cy="2514600"/>
+              <a:t>recall · store · semantic · extraction · tool  (src/agent_factory/memory)</a:t>
+            </a:r>
+            <a:endParaRPr lang="en-US" sz="1050" dirty="0"/>
+          </a:p>
+        </p:txBody>
+      </p:sp>
+      <p:sp>
+        <p:nvSpPr>
+          <p:cNvPr id="21" name="Shape 16"/>
+          <p:cNvSpPr/>
+          <p:nvPr/>
+        </p:nvSpPr>
+        <p:spPr>
+          <a:xfrm>
+            <a:off x="4439412" y="4297680"/>
+            <a:ext cx="292608" cy="228600"/>
+          </a:xfrm>
+          <a:prstGeom prst="downArrow">
+            <a:avLst/>
+          </a:prstGeom>
+          <a:solidFill>
+            <a:srgbClr val="EC0016"/>
+          </a:solidFill>
+          <a:ln/>
+        </p:spPr>
+      </p:sp>
+      <p:sp>
+        <p:nvSpPr>
+          <p:cNvPr id="22" name="Shape 17"/>
+          <p:cNvSpPr/>
+          <p:nvPr/>
+        </p:nvSpPr>
+        <p:spPr>
+          <a:xfrm>
+            <a:off x="1613916" y="4526280"/>
+            <a:ext cx="5943600" cy="685800"/>
           </a:xfrm>
           <a:prstGeom prst="roundRect">
             <a:avLst>
-              <a:gd name="adj" fmla="val 2909"/>
+              <a:gd name="adj" fmla="val 10667"/>
             </a:avLst>
           </a:prstGeom>
           <a:solidFill>
@@ -2933,27 +3210,27 @@
       </p:sp>
       <p:sp>
         <p:nvSpPr>
-          <p:cNvPr id="19" name="Shape 14"/>
-          <p:cNvSpPr/>
-          <p:nvPr/>
-        </p:nvSpPr>
-        <p:spPr>
-          <a:xfrm>
-            <a:off x="9363456" y="1545336"/>
+          <p:cNvPr id="23" name="Shape 18"/>
+          <p:cNvSpPr/>
+          <p:nvPr/>
+        </p:nvSpPr>
+        <p:spPr>
+          <a:xfrm>
+            <a:off x="1760220" y="4640580"/>
             <a:ext cx="457200" cy="457200"/>
           </a:xfrm>
           <a:prstGeom prst="ellipse">
             <a:avLst/>
           </a:prstGeom>
           <a:solidFill>
-            <a:srgbClr val="EC0016"/>
+            <a:srgbClr val="1E1E1E"/>
           </a:solidFill>
           <a:ln/>
         </p:spPr>
       </p:sp>
       <p:pic>
         <p:nvPicPr>
-          <p:cNvPr id="20" name="Image 3" descr="preencoded.png">    </p:cNvPr>
+          <p:cNvPr id="24" name="Image 3" descr="preencoded.png">    </p:cNvPr>
           <p:cNvPicPr>
             <a:picLocks noChangeAspect="1"/>
           </p:cNvPicPr>
@@ -2967,7 +3244,7 @@
         </p:blipFill>
         <p:spPr>
           <a:xfrm>
-            <a:off x="9486900" y="1668780"/>
+            <a:off x="1883664" y="4764024"/>
             <a:ext cx="210312" cy="210312"/>
           </a:xfrm>
           <a:prstGeom prst="rect">
@@ -2977,30 +3254,30 @@
       </p:pic>
       <p:sp>
         <p:nvSpPr>
-          <p:cNvPr id="21" name="Text 15"/>
-          <p:cNvSpPr/>
-          <p:nvPr/>
-        </p:nvSpPr>
-        <p:spPr>
-          <a:xfrm>
-            <a:off x="9363456" y="2148840"/>
-            <a:ext cx="2267712" cy="365760"/>
-          </a:xfrm>
-          <a:prstGeom prst="rect">
-            <a:avLst/>
-          </a:prstGeom>
-          <a:noFill/>
-          <a:ln/>
-        </p:spPr>
-        <p:txBody>
-          <a:bodyPr wrap="square" lIns="0" tIns="0" rIns="0" bIns="0" rtlCol="0" anchor="ctr"/>
-          <a:lstStyle/>
-          <a:p>
-            <a:pPr indent="0" marL="0">
-              <a:buNone/>
-            </a:pPr>
-            <a:r>
-              <a:rPr lang="en-US" sz="1450" b="1" dirty="0">
+          <p:cNvPr id="25" name="Text 19"/>
+          <p:cNvSpPr/>
+          <p:nvPr/>
+        </p:nvSpPr>
+        <p:spPr>
+          <a:xfrm>
+            <a:off x="2363724" y="4599432"/>
+            <a:ext cx="5047488" cy="315468"/>
+          </a:xfrm>
+          <a:prstGeom prst="rect">
+            <a:avLst/>
+          </a:prstGeom>
+          <a:noFill/>
+          <a:ln/>
+        </p:spPr>
+        <p:txBody>
+          <a:bodyPr wrap="square" lIns="0" tIns="0" rIns="0" bIns="0" rtlCol="0" anchor="t"/>
+          <a:lstStyle/>
+          <a:p>
+            <a:pPr indent="0" marL="0">
+              <a:buNone/>
+            </a:pPr>
+            <a:r>
+              <a:rPr lang="en-US" sz="1350" b="1" dirty="0">
                 <a:solidFill>
                   <a:srgbClr val="FFFFFF"/>
                 </a:solidFill>
@@ -3008,116 +3285,119 @@
                 <a:ea typeface="Arial" pitchFamily="34" charset="-122"/>
                 <a:cs typeface="Arial" pitchFamily="34" charset="-120"/>
               </a:rPr>
-              <a:t>The write gate</a:t>
-            </a:r>
-            <a:endParaRPr lang="en-US" sz="1450" dirty="0"/>
-          </a:p>
-        </p:txBody>
-      </p:sp>
-      <p:sp>
-        <p:nvSpPr>
-          <p:cNvPr id="22" name="Text 16"/>
-          <p:cNvSpPr/>
-          <p:nvPr/>
-        </p:nvSpPr>
-        <p:spPr>
-          <a:xfrm>
-            <a:off x="9363456" y="2514600"/>
-            <a:ext cx="2267712" cy="1234440"/>
-          </a:xfrm>
-          <a:prstGeom prst="rect">
-            <a:avLst/>
-          </a:prstGeom>
-          <a:noFill/>
-          <a:ln/>
-        </p:spPr>
-        <p:txBody>
-          <a:bodyPr wrap="square" lIns="0" tIns="0" rIns="0" bIns="0" rtlCol="0" anchor="ctr"/>
+              <a:t>Azure Postgres — existing database</a:t>
+            </a:r>
+            <a:endParaRPr lang="en-US" sz="1350" dirty="0"/>
+          </a:p>
+        </p:txBody>
+      </p:sp>
+      <p:sp>
+        <p:nvSpPr>
+          <p:cNvPr id="26" name="Text 20"/>
+          <p:cNvSpPr/>
+          <p:nvPr/>
+        </p:nvSpPr>
+        <p:spPr>
+          <a:xfrm>
+            <a:off x="2363724" y="4887468"/>
+            <a:ext cx="5047488" cy="342900"/>
+          </a:xfrm>
+          <a:prstGeom prst="rect">
+            <a:avLst/>
+          </a:prstGeom>
+          <a:noFill/>
+          <a:ln/>
+        </p:spPr>
+        <p:txBody>
+          <a:bodyPr wrap="square" lIns="0" tIns="0" rIns="0" bIns="0" rtlCol="0" anchor="t"/>
           <a:lstStyle/>
           <a:p>
             <a:pPr indent="0" marL="0">
               <a:lnSpc>
-                <a:spcPct val="110000"/>
+                <a:spcPct val="105000"/>
               </a:lnSpc>
               <a:buNone/>
             </a:pPr>
             <a:r>
-              <a:rPr lang="en-US" sz="1150" dirty="0">
-                <a:solidFill>
-                  <a:srgbClr val="CFCFCF"/>
-                </a:solidFill>
-                <a:latin typeface="Arial" pitchFamily="34" charset="0"/>
-                <a:ea typeface="Arial" pitchFamily="34" charset="-122"/>
-                <a:cs typeface="Arial" pitchFamily="34" charset="-120"/>
-              </a:rPr>
-              <a:t>Dedup → similarity → small-model check. Contradictions supersede — never overwrite.</a:t>
-            </a:r>
-            <a:endParaRPr lang="en-US" sz="1150" dirty="0"/>
-          </a:p>
-        </p:txBody>
-      </p:sp>
-      <p:sp>
-        <p:nvSpPr>
-          <p:cNvPr id="23" name="Text 17"/>
-          <p:cNvSpPr/>
-          <p:nvPr/>
-        </p:nvSpPr>
-        <p:spPr>
-          <a:xfrm>
-            <a:off x="548640" y="4160520"/>
-            <a:ext cx="3657600" cy="320040"/>
-          </a:xfrm>
-          <a:prstGeom prst="rect">
-            <a:avLst/>
-          </a:prstGeom>
-          <a:noFill/>
-          <a:ln/>
-        </p:spPr>
-        <p:txBody>
-          <a:bodyPr wrap="square" rtlCol="0" anchor="ctr"/>
-          <a:lstStyle/>
-          <a:p>
-            <a:pPr indent="0" marL="0">
-              <a:buNone/>
-            </a:pPr>
-            <a:r>
-              <a:rPr lang="en-US" sz="1200" b="1" spc="300" kern="0" dirty="0">
-                <a:solidFill>
-                  <a:srgbClr val="EC0016"/>
-                </a:solidFill>
-                <a:latin typeface="Arial" pitchFamily="34" charset="0"/>
-                <a:ea typeface="Arial" pitchFamily="34" charset="-122"/>
-                <a:cs typeface="Arial" pitchFamily="34" charset="-120"/>
-              </a:rPr>
-              <a:t>SAFE BY DESIGN</a:t>
-            </a:r>
-            <a:endParaRPr lang="en-US" sz="1200" dirty="0"/>
-          </a:p>
-        </p:txBody>
-      </p:sp>
-      <p:sp>
-        <p:nvSpPr>
-          <p:cNvPr id="24" name="Shape 18"/>
-          <p:cNvSpPr/>
-          <p:nvPr/>
-        </p:nvSpPr>
-        <p:spPr>
-          <a:xfrm>
-            <a:off x="548640" y="4617720"/>
-            <a:ext cx="402336" cy="402336"/>
+              <a:rPr lang="en-US" sz="1050" dirty="0">
+                <a:solidFill>
+                  <a:srgbClr val="D9D9D9"/>
+                </a:solidFill>
+                <a:latin typeface="Arial" pitchFamily="34" charset="0"/>
+                <a:ea typeface="Arial" pitchFamily="34" charset="-122"/>
+                <a:cs typeface="Arial" pitchFamily="34" charset="-120"/>
+              </a:rPr>
+              <a:t>agent_memory_entries (pgvector) · agent_memory_user_models</a:t>
+            </a:r>
+            <a:endParaRPr lang="en-US" sz="1050" dirty="0"/>
+          </a:p>
+        </p:txBody>
+      </p:sp>
+      <p:sp>
+        <p:nvSpPr>
+          <p:cNvPr id="27" name="Shape 21"/>
+          <p:cNvSpPr/>
+          <p:nvPr/>
+        </p:nvSpPr>
+        <p:spPr>
+          <a:xfrm>
+            <a:off x="7575804" y="3712464"/>
+            <a:ext cx="256032" cy="256032"/>
+          </a:xfrm>
+          <a:prstGeom prst="rightArrow">
+            <a:avLst/>
+          </a:prstGeom>
+          <a:solidFill>
+            <a:srgbClr val="EC0016"/>
+          </a:solidFill>
+          <a:ln/>
+        </p:spPr>
+      </p:sp>
+      <p:sp>
+        <p:nvSpPr>
+          <p:cNvPr id="28" name="Shape 22"/>
+          <p:cNvSpPr/>
+          <p:nvPr/>
+        </p:nvSpPr>
+        <p:spPr>
+          <a:xfrm>
+            <a:off x="7831836" y="3383280"/>
+            <a:ext cx="3808476" cy="914400"/>
+          </a:xfrm>
+          <a:prstGeom prst="roundRect">
+            <a:avLst>
+              <a:gd name="adj" fmla="val 8000"/>
+            </a:avLst>
+          </a:prstGeom>
+          <a:solidFill>
+            <a:srgbClr val="F4F4F4"/>
+          </a:solidFill>
+          <a:ln/>
+        </p:spPr>
+      </p:sp>
+      <p:sp>
+        <p:nvSpPr>
+          <p:cNvPr id="29" name="Shape 23"/>
+          <p:cNvSpPr/>
+          <p:nvPr/>
+        </p:nvSpPr>
+        <p:spPr>
+          <a:xfrm>
+            <a:off x="7978140" y="3611880"/>
+            <a:ext cx="457200" cy="457200"/>
           </a:xfrm>
           <a:prstGeom prst="ellipse">
             <a:avLst/>
           </a:prstGeom>
           <a:solidFill>
-            <a:srgbClr val="F4F4F4"/>
+            <a:srgbClr val="FFFFFF"/>
           </a:solidFill>
           <a:ln/>
         </p:spPr>
       </p:sp>
       <p:pic>
         <p:nvPicPr>
-          <p:cNvPr id="25" name="Image 4" descr="preencoded.png">    </p:cNvPr>
+          <p:cNvPr id="30" name="Image 4" descr="preencoded.png">    </p:cNvPr>
           <p:cNvPicPr>
             <a:picLocks noChangeAspect="1"/>
           </p:cNvPicPr>
@@ -3131,8 +3411,8 @@
         </p:blipFill>
         <p:spPr>
           <a:xfrm>
-            <a:off x="657271" y="4726351"/>
-            <a:ext cx="185075" cy="185075"/>
+            <a:off x="8101584" y="3735324"/>
+            <a:ext cx="210312" cy="210312"/>
           </a:xfrm>
           <a:prstGeom prst="rect">
             <a:avLst/>
@@ -3141,30 +3421,30 @@
       </p:pic>
       <p:sp>
         <p:nvSpPr>
-          <p:cNvPr id="26" name="Text 19"/>
-          <p:cNvSpPr/>
-          <p:nvPr/>
-        </p:nvSpPr>
-        <p:spPr>
-          <a:xfrm>
-            <a:off x="548640" y="5120640"/>
-            <a:ext cx="2066544" cy="320040"/>
-          </a:xfrm>
-          <a:prstGeom prst="rect">
-            <a:avLst/>
-          </a:prstGeom>
-          <a:noFill/>
-          <a:ln/>
-        </p:spPr>
-        <p:txBody>
-          <a:bodyPr wrap="square" lIns="0" tIns="0" rIns="0" bIns="0" rtlCol="0" anchor="ctr"/>
-          <a:lstStyle/>
-          <a:p>
-            <a:pPr indent="0" marL="0">
-              <a:buNone/>
-            </a:pPr>
-            <a:r>
-              <a:rPr lang="en-US" sz="1250" b="1" dirty="0">
+          <p:cNvPr id="31" name="Text 24"/>
+          <p:cNvSpPr/>
+          <p:nvPr/>
+        </p:nvSpPr>
+        <p:spPr>
+          <a:xfrm>
+            <a:off x="8581644" y="3456432"/>
+            <a:ext cx="2912364" cy="420624"/>
+          </a:xfrm>
+          <a:prstGeom prst="rect">
+            <a:avLst/>
+          </a:prstGeom>
+          <a:noFill/>
+          <a:ln/>
+        </p:spPr>
+        <p:txBody>
+          <a:bodyPr wrap="square" lIns="0" tIns="0" rIns="0" bIns="0" rtlCol="0" anchor="t"/>
+          <a:lstStyle/>
+          <a:p>
+            <a:pPr indent="0" marL="0">
+              <a:buNone/>
+            </a:pPr>
+            <a:r>
+              <a:rPr lang="en-US" sz="1350" b="1" dirty="0">
                 <a:solidFill>
                   <a:srgbClr val="1A1A1A"/>
                 </a:solidFill>
@@ -3172,31 +3452,31 @@
                 <a:ea typeface="Arial" pitchFamily="34" charset="-122"/>
                 <a:cs typeface="Arial" pitchFamily="34" charset="-120"/>
               </a:rPr>
-              <a:t>Off by default</a:t>
-            </a:r>
-            <a:endParaRPr lang="en-US" sz="1250" dirty="0"/>
-          </a:p>
-        </p:txBody>
-      </p:sp>
-      <p:sp>
-        <p:nvSpPr>
-          <p:cNvPr id="27" name="Text 20"/>
-          <p:cNvSpPr/>
-          <p:nvPr/>
-        </p:nvSpPr>
-        <p:spPr>
-          <a:xfrm>
-            <a:off x="548640" y="5440680"/>
-            <a:ext cx="2066544" cy="548640"/>
-          </a:xfrm>
-          <a:prstGeom prst="rect">
-            <a:avLst/>
-          </a:prstGeom>
-          <a:noFill/>
-          <a:ln/>
-        </p:spPr>
-        <p:txBody>
-          <a:bodyPr wrap="square" lIns="0" tIns="0" rIns="0" bIns="0" rtlCol="0" anchor="ctr"/>
+              <a:t>Azure OpenAI</a:t>
+            </a:r>
+            <a:endParaRPr lang="en-US" sz="1350" dirty="0"/>
+          </a:p>
+        </p:txBody>
+      </p:sp>
+      <p:sp>
+        <p:nvSpPr>
+          <p:cNvPr id="32" name="Text 25"/>
+          <p:cNvSpPr/>
+          <p:nvPr/>
+        </p:nvSpPr>
+        <p:spPr>
+          <a:xfrm>
+            <a:off x="8581644" y="3840480"/>
+            <a:ext cx="2912364" cy="457200"/>
+          </a:xfrm>
+          <a:prstGeom prst="rect">
+            <a:avLst/>
+          </a:prstGeom>
+          <a:noFill/>
+          <a:ln/>
+        </p:spPr>
+        <p:txBody>
+          <a:bodyPr wrap="square" lIns="0" tIns="0" rIns="0" bIns="0" rtlCol="0" anchor="t"/>
           <a:lstStyle/>
           <a:p>
             <a:pPr indent="0" marL="0">
@@ -3206,7 +3486,7 @@
               <a:buNone/>
             </a:pPr>
             <a:r>
-              <a:rPr lang="en-US" sz="1100" dirty="0">
+              <a:rPr lang="en-US" sz="1050" dirty="0">
                 <a:solidFill>
                   <a:srgbClr val="5F5F5F"/>
                 </a:solidFill>
@@ -3214,548 +3494,48 @@
                 <a:ea typeface="Arial" pitchFamily="34" charset="-122"/>
                 <a:cs typeface="Arial" pitchFamily="34" charset="-120"/>
               </a:rPr>
-              <a:t>a test enforces it</a:t>
-            </a:r>
-            <a:endParaRPr lang="en-US" sz="1100" dirty="0"/>
-          </a:p>
-        </p:txBody>
-      </p:sp>
-      <p:sp>
-        <p:nvSpPr>
-          <p:cNvPr id="28" name="Shape 21"/>
-          <p:cNvSpPr/>
-          <p:nvPr/>
-        </p:nvSpPr>
-        <p:spPr>
-          <a:xfrm>
-            <a:off x="2779776" y="4617720"/>
-            <a:ext cx="402336" cy="402336"/>
-          </a:xfrm>
-          <a:prstGeom prst="ellipse">
-            <a:avLst/>
-          </a:prstGeom>
-          <a:solidFill>
-            <a:srgbClr val="F4F4F4"/>
-          </a:solidFill>
-          <a:ln/>
-        </p:spPr>
-      </p:sp>
-      <p:pic>
-        <p:nvPicPr>
-          <p:cNvPr id="29" name="Image 5" descr="preencoded.png">    </p:cNvPr>
-          <p:cNvPicPr>
-            <a:picLocks noChangeAspect="1"/>
-          </p:cNvPicPr>
-          <p:nvPr/>
-        </p:nvPicPr>
-        <p:blipFill>
-          <a:blip r:embed="rId6"/>
-          <a:stretch>
-            <a:fillRect/>
-          </a:stretch>
-        </p:blipFill>
-        <p:spPr>
-          <a:xfrm>
-            <a:off x="2888407" y="4726351"/>
-            <a:ext cx="185075" cy="185075"/>
-          </a:xfrm>
-          <a:prstGeom prst="rect">
-            <a:avLst/>
-          </a:prstGeom>
-        </p:spPr>
-      </p:pic>
-      <p:sp>
-        <p:nvSpPr>
-          <p:cNvPr id="30" name="Text 22"/>
-          <p:cNvSpPr/>
-          <p:nvPr/>
-        </p:nvSpPr>
-        <p:spPr>
-          <a:xfrm>
-            <a:off x="2779776" y="5120640"/>
-            <a:ext cx="2066544" cy="320040"/>
-          </a:xfrm>
-          <a:prstGeom prst="rect">
-            <a:avLst/>
-          </a:prstGeom>
-          <a:noFill/>
-          <a:ln/>
-        </p:spPr>
-        <p:txBody>
-          <a:bodyPr wrap="square" lIns="0" tIns="0" rIns="0" bIns="0" rtlCol="0" anchor="ctr"/>
-          <a:lstStyle/>
-          <a:p>
-            <a:pPr indent="0" marL="0">
-              <a:buNone/>
-            </a:pPr>
-            <a:r>
-              <a:rPr lang="en-US" sz="1250" b="1" dirty="0">
-                <a:solidFill>
-                  <a:srgbClr val="1A1A1A"/>
-                </a:solidFill>
-                <a:latin typeface="Arial" pitchFamily="34" charset="0"/>
-                <a:ea typeface="Arial" pitchFamily="34" charset="-122"/>
-                <a:cs typeface="Arial" pitchFamily="34" charset="-120"/>
-              </a:rPr>
-              <a:t>Identity or nothing</a:t>
+              <a:t>text-embedding-3-large (recall) · gpt-5.4-mini (write-gate decisions)</a:t>
+            </a:r>
+            <a:endParaRPr lang="en-US" sz="1050" dirty="0"/>
+          </a:p>
+        </p:txBody>
+      </p:sp>
+      <p:sp>
+        <p:nvSpPr>
+          <p:cNvPr id="33" name="Text 26"/>
+          <p:cNvSpPr/>
+          <p:nvPr/>
+        </p:nvSpPr>
+        <p:spPr>
+          <a:xfrm>
+            <a:off x="548640" y="5440680"/>
+            <a:ext cx="11064240" cy="365760"/>
+          </a:xfrm>
+          <a:prstGeom prst="rect">
+            <a:avLst/>
+          </a:prstGeom>
+          <a:noFill/>
+          <a:ln/>
+        </p:spPr>
+        <p:txBody>
+          <a:bodyPr wrap="square" rtlCol="0" anchor="ctr"/>
+          <a:lstStyle/>
+          <a:p>
+            <a:pPr indent="0" marL="0">
+              <a:buNone/>
+            </a:pPr>
+            <a:r>
+              <a:rPr lang="en-US" sz="1250" i="1" dirty="0">
+                <a:solidFill>
+                  <a:srgbClr val="5F5F5F"/>
+                </a:solidFill>
+                <a:latin typeface="Arial" pitchFamily="34" charset="0"/>
+                <a:ea typeface="Arial" pitchFamily="34" charset="-122"/>
+                <a:cs typeface="Arial" pitchFamily="34" charset="-120"/>
+              </a:rPr>
+              <a:t>Shared DB connection pool — no private engine  ·  schema versioned with Alembic — reviewed baseline</a:t>
             </a:r>
             <a:endParaRPr lang="en-US" sz="1250" dirty="0"/>
-          </a:p>
-        </p:txBody>
-      </p:sp>
-      <p:sp>
-        <p:nvSpPr>
-          <p:cNvPr id="31" name="Text 23"/>
-          <p:cNvSpPr/>
-          <p:nvPr/>
-        </p:nvSpPr>
-        <p:spPr>
-          <a:xfrm>
-            <a:off x="2779776" y="5440680"/>
-            <a:ext cx="2066544" cy="548640"/>
-          </a:xfrm>
-          <a:prstGeom prst="rect">
-            <a:avLst/>
-          </a:prstGeom>
-          <a:noFill/>
-          <a:ln/>
-        </p:spPr>
-        <p:txBody>
-          <a:bodyPr wrap="square" lIns="0" tIns="0" rIns="0" bIns="0" rtlCol="0" anchor="ctr"/>
-          <a:lstStyle/>
-          <a:p>
-            <a:pPr indent="0" marL="0">
-              <a:lnSpc>
-                <a:spcPct val="105000"/>
-              </a:lnSpc>
-              <a:buNone/>
-            </a:pPr>
-            <a:r>
-              <a:rPr lang="en-US" sz="1100" dirty="0">
-                <a:solidFill>
-                  <a:srgbClr val="5F5F5F"/>
-                </a:solidFill>
-                <a:latin typeface="Arial" pitchFamily="34" charset="0"/>
-                <a:ea typeface="Arial" pitchFamily="34" charset="-122"/>
-                <a:cs typeface="Arial" pitchFamily="34" charset="-120"/>
-              </a:rPr>
-              <a:t>no user + tenant → silent off</a:t>
-            </a:r>
-            <a:endParaRPr lang="en-US" sz="1100" dirty="0"/>
-          </a:p>
-        </p:txBody>
-      </p:sp>
-      <p:sp>
-        <p:nvSpPr>
-          <p:cNvPr id="32" name="Shape 24"/>
-          <p:cNvSpPr/>
-          <p:nvPr/>
-        </p:nvSpPr>
-        <p:spPr>
-          <a:xfrm>
-            <a:off x="5010912" y="4617720"/>
-            <a:ext cx="402336" cy="402336"/>
-          </a:xfrm>
-          <a:prstGeom prst="ellipse">
-            <a:avLst/>
-          </a:prstGeom>
-          <a:solidFill>
-            <a:srgbClr val="F4F4F4"/>
-          </a:solidFill>
-          <a:ln/>
-        </p:spPr>
-      </p:sp>
-      <p:pic>
-        <p:nvPicPr>
-          <p:cNvPr id="33" name="Image 6" descr="preencoded.png">    </p:cNvPr>
-          <p:cNvPicPr>
-            <a:picLocks noChangeAspect="1"/>
-          </p:cNvPicPr>
-          <p:nvPr/>
-        </p:nvPicPr>
-        <p:blipFill>
-          <a:blip r:embed="rId7"/>
-          <a:stretch>
-            <a:fillRect/>
-          </a:stretch>
-        </p:blipFill>
-        <p:spPr>
-          <a:xfrm>
-            <a:off x="5119543" y="4726351"/>
-            <a:ext cx="185075" cy="185075"/>
-          </a:xfrm>
-          <a:prstGeom prst="rect">
-            <a:avLst/>
-          </a:prstGeom>
-        </p:spPr>
-      </p:pic>
-      <p:sp>
-        <p:nvSpPr>
-          <p:cNvPr id="34" name="Text 25"/>
-          <p:cNvSpPr/>
-          <p:nvPr/>
-        </p:nvSpPr>
-        <p:spPr>
-          <a:xfrm>
-            <a:off x="5010912" y="5120640"/>
-            <a:ext cx="2066544" cy="320040"/>
-          </a:xfrm>
-          <a:prstGeom prst="rect">
-            <a:avLst/>
-          </a:prstGeom>
-          <a:noFill/>
-          <a:ln/>
-        </p:spPr>
-        <p:txBody>
-          <a:bodyPr wrap="square" lIns="0" tIns="0" rIns="0" bIns="0" rtlCol="0" anchor="ctr"/>
-          <a:lstStyle/>
-          <a:p>
-            <a:pPr indent="0" marL="0">
-              <a:buNone/>
-            </a:pPr>
-            <a:r>
-              <a:rPr lang="en-US" sz="1250" b="1" dirty="0">
-                <a:solidFill>
-                  <a:srgbClr val="1A1A1A"/>
-                </a:solidFill>
-                <a:latin typeface="Arial" pitchFamily="34" charset="0"/>
-                <a:ea typeface="Arial" pitchFamily="34" charset="-122"/>
-                <a:cs typeface="Arial" pitchFamily="34" charset="-120"/>
-              </a:rPr>
-              <a:t>Denylist</a:t>
-            </a:r>
-            <a:endParaRPr lang="en-US" sz="1250" dirty="0"/>
-          </a:p>
-        </p:txBody>
-      </p:sp>
-      <p:sp>
-        <p:nvSpPr>
-          <p:cNvPr id="35" name="Text 26"/>
-          <p:cNvSpPr/>
-          <p:nvPr/>
-        </p:nvSpPr>
-        <p:spPr>
-          <a:xfrm>
-            <a:off x="5010912" y="5440680"/>
-            <a:ext cx="2066544" cy="548640"/>
-          </a:xfrm>
-          <a:prstGeom prst="rect">
-            <a:avLst/>
-          </a:prstGeom>
-          <a:noFill/>
-          <a:ln/>
-        </p:spPr>
-        <p:txBody>
-          <a:bodyPr wrap="square" lIns="0" tIns="0" rIns="0" bIns="0" rtlCol="0" anchor="ctr"/>
-          <a:lstStyle/>
-          <a:p>
-            <a:pPr indent="0" marL="0">
-              <a:lnSpc>
-                <a:spcPct val="105000"/>
-              </a:lnSpc>
-              <a:buNone/>
-            </a:pPr>
-            <a:r>
-              <a:rPr lang="en-US" sz="1100" dirty="0">
-                <a:solidFill>
-                  <a:srgbClr val="5F5F5F"/>
-                </a:solidFill>
-                <a:latin typeface="Arial" pitchFamily="34" charset="0"/>
-                <a:ea typeface="Arial" pitchFamily="34" charset="-122"/>
-                <a:cs typeface="Arial" pitchFamily="34" charset="-120"/>
-              </a:rPr>
-              <a:t>credentials never stored</a:t>
-            </a:r>
-            <a:endParaRPr lang="en-US" sz="1100" dirty="0"/>
-          </a:p>
-        </p:txBody>
-      </p:sp>
-      <p:sp>
-        <p:nvSpPr>
-          <p:cNvPr id="36" name="Shape 27"/>
-          <p:cNvSpPr/>
-          <p:nvPr/>
-        </p:nvSpPr>
-        <p:spPr>
-          <a:xfrm>
-            <a:off x="7242048" y="4617720"/>
-            <a:ext cx="402336" cy="402336"/>
-          </a:xfrm>
-          <a:prstGeom prst="ellipse">
-            <a:avLst/>
-          </a:prstGeom>
-          <a:solidFill>
-            <a:srgbClr val="F4F4F4"/>
-          </a:solidFill>
-          <a:ln/>
-        </p:spPr>
-      </p:sp>
-      <p:pic>
-        <p:nvPicPr>
-          <p:cNvPr id="37" name="Image 7" descr="preencoded.png">    </p:cNvPr>
-          <p:cNvPicPr>
-            <a:picLocks noChangeAspect="1"/>
-          </p:cNvPicPr>
-          <p:nvPr/>
-        </p:nvPicPr>
-        <p:blipFill>
-          <a:blip r:embed="rId8"/>
-          <a:stretch>
-            <a:fillRect/>
-          </a:stretch>
-        </p:blipFill>
-        <p:spPr>
-          <a:xfrm>
-            <a:off x="7350679" y="4726351"/>
-            <a:ext cx="185075" cy="185075"/>
-          </a:xfrm>
-          <a:prstGeom prst="rect">
-            <a:avLst/>
-          </a:prstGeom>
-        </p:spPr>
-      </p:pic>
-      <p:sp>
-        <p:nvSpPr>
-          <p:cNvPr id="38" name="Text 28"/>
-          <p:cNvSpPr/>
-          <p:nvPr/>
-        </p:nvSpPr>
-        <p:spPr>
-          <a:xfrm>
-            <a:off x="7242048" y="5120640"/>
-            <a:ext cx="2066544" cy="320040"/>
-          </a:xfrm>
-          <a:prstGeom prst="rect">
-            <a:avLst/>
-          </a:prstGeom>
-          <a:noFill/>
-          <a:ln/>
-        </p:spPr>
-        <p:txBody>
-          <a:bodyPr wrap="square" lIns="0" tIns="0" rIns="0" bIns="0" rtlCol="0" anchor="ctr"/>
-          <a:lstStyle/>
-          <a:p>
-            <a:pPr indent="0" marL="0">
-              <a:buNone/>
-            </a:pPr>
-            <a:r>
-              <a:rPr lang="en-US" sz="1250" b="1" dirty="0">
-                <a:solidFill>
-                  <a:srgbClr val="1A1A1A"/>
-                </a:solidFill>
-                <a:latin typeface="Arial" pitchFamily="34" charset="0"/>
-                <a:ea typeface="Arial" pitchFamily="34" charset="-122"/>
-                <a:cs typeface="Arial" pitchFamily="34" charset="-120"/>
-              </a:rPr>
-              <a:t>Content-free logs</a:t>
-            </a:r>
-            <a:endParaRPr lang="en-US" sz="1250" dirty="0"/>
-          </a:p>
-        </p:txBody>
-      </p:sp>
-      <p:sp>
-        <p:nvSpPr>
-          <p:cNvPr id="39" name="Text 29"/>
-          <p:cNvSpPr/>
-          <p:nvPr/>
-        </p:nvSpPr>
-        <p:spPr>
-          <a:xfrm>
-            <a:off x="7242048" y="5440680"/>
-            <a:ext cx="2066544" cy="548640"/>
-          </a:xfrm>
-          <a:prstGeom prst="rect">
-            <a:avLst/>
-          </a:prstGeom>
-          <a:noFill/>
-          <a:ln/>
-        </p:spPr>
-        <p:txBody>
-          <a:bodyPr wrap="square" lIns="0" tIns="0" rIns="0" bIns="0" rtlCol="0" anchor="ctr"/>
-          <a:lstStyle/>
-          <a:p>
-            <a:pPr indent="0" marL="0">
-              <a:lnSpc>
-                <a:spcPct val="105000"/>
-              </a:lnSpc>
-              <a:buNone/>
-            </a:pPr>
-            <a:r>
-              <a:rPr lang="en-US" sz="1100" dirty="0">
-                <a:solidFill>
-                  <a:srgbClr val="5F5F5F"/>
-                </a:solidFill>
-                <a:latin typeface="Arial" pitchFamily="34" charset="0"/>
-                <a:ea typeface="Arial" pitchFamily="34" charset="-122"/>
-                <a:cs typeface="Arial" pitchFamily="34" charset="-120"/>
-              </a:rPr>
-              <a:t>ids and counts only</a:t>
-            </a:r>
-            <a:endParaRPr lang="en-US" sz="1100" dirty="0"/>
-          </a:p>
-        </p:txBody>
-      </p:sp>
-      <p:sp>
-        <p:nvSpPr>
-          <p:cNvPr id="40" name="Shape 30"/>
-          <p:cNvSpPr/>
-          <p:nvPr/>
-        </p:nvSpPr>
-        <p:spPr>
-          <a:xfrm>
-            <a:off x="9473184" y="4617720"/>
-            <a:ext cx="402336" cy="402336"/>
-          </a:xfrm>
-          <a:prstGeom prst="ellipse">
-            <a:avLst/>
-          </a:prstGeom>
-          <a:solidFill>
-            <a:srgbClr val="F4F4F4"/>
-          </a:solidFill>
-          <a:ln/>
-        </p:spPr>
-      </p:sp>
-      <p:pic>
-        <p:nvPicPr>
-          <p:cNvPr id="41" name="Image 8" descr="preencoded.png">    </p:cNvPr>
-          <p:cNvPicPr>
-            <a:picLocks noChangeAspect="1"/>
-          </p:cNvPicPr>
-          <p:nvPr/>
-        </p:nvPicPr>
-        <p:blipFill>
-          <a:blip r:embed="rId9"/>
-          <a:stretch>
-            <a:fillRect/>
-          </a:stretch>
-        </p:blipFill>
-        <p:spPr>
-          <a:xfrm>
-            <a:off x="9581815" y="4726351"/>
-            <a:ext cx="185075" cy="185075"/>
-          </a:xfrm>
-          <a:prstGeom prst="rect">
-            <a:avLst/>
-          </a:prstGeom>
-        </p:spPr>
-      </p:pic>
-      <p:sp>
-        <p:nvSpPr>
-          <p:cNvPr id="42" name="Text 31"/>
-          <p:cNvSpPr/>
-          <p:nvPr/>
-        </p:nvSpPr>
-        <p:spPr>
-          <a:xfrm>
-            <a:off x="9473184" y="5120640"/>
-            <a:ext cx="2066544" cy="320040"/>
-          </a:xfrm>
-          <a:prstGeom prst="rect">
-            <a:avLst/>
-          </a:prstGeom>
-          <a:noFill/>
-          <a:ln/>
-        </p:spPr>
-        <p:txBody>
-          <a:bodyPr wrap="square" lIns="0" tIns="0" rIns="0" bIns="0" rtlCol="0" anchor="ctr"/>
-          <a:lstStyle/>
-          <a:p>
-            <a:pPr indent="0" marL="0">
-              <a:buNone/>
-            </a:pPr>
-            <a:r>
-              <a:rPr lang="en-US" sz="1250" b="1" dirty="0">
-                <a:solidFill>
-                  <a:srgbClr val="1A1A1A"/>
-                </a:solidFill>
-                <a:latin typeface="Arial" pitchFamily="34" charset="0"/>
-                <a:ea typeface="Arial" pitchFamily="34" charset="-122"/>
-                <a:cs typeface="Arial" pitchFamily="34" charset="-120"/>
-              </a:rPr>
-              <a:t>Deletable + audited</a:t>
-            </a:r>
-            <a:endParaRPr lang="en-US" sz="1250" dirty="0"/>
-          </a:p>
-        </p:txBody>
-      </p:sp>
-      <p:sp>
-        <p:nvSpPr>
-          <p:cNvPr id="43" name="Text 32"/>
-          <p:cNvSpPr/>
-          <p:nvPr/>
-        </p:nvSpPr>
-        <p:spPr>
-          <a:xfrm>
-            <a:off x="9473184" y="5440680"/>
-            <a:ext cx="2066544" cy="548640"/>
-          </a:xfrm>
-          <a:prstGeom prst="rect">
-            <a:avLst/>
-          </a:prstGeom>
-          <a:noFill/>
-          <a:ln/>
-        </p:spPr>
-        <p:txBody>
-          <a:bodyPr wrap="square" lIns="0" tIns="0" rIns="0" bIns="0" rtlCol="0" anchor="ctr"/>
-          <a:lstStyle/>
-          <a:p>
-            <a:pPr indent="0" marL="0">
-              <a:lnSpc>
-                <a:spcPct val="105000"/>
-              </a:lnSpc>
-              <a:buNone/>
-            </a:pPr>
-            <a:r>
-              <a:rPr lang="en-US" sz="1100" dirty="0">
-                <a:solidFill>
-                  <a:srgbClr val="5F5F5F"/>
-                </a:solidFill>
-                <a:latin typeface="Arial" pitchFamily="34" charset="0"/>
-                <a:ea typeface="Arial" pitchFamily="34" charset="-122"/>
-                <a:cs typeface="Arial" pitchFamily="34" charset="-120"/>
-              </a:rPr>
-              <a:t>soft-delete, one-call forget</a:t>
-            </a:r>
-            <a:endParaRPr lang="en-US" sz="1100" dirty="0"/>
-          </a:p>
-        </p:txBody>
-      </p:sp>
-      <p:sp>
-        <p:nvSpPr>
-          <p:cNvPr id="44" name="Text 33"/>
-          <p:cNvSpPr/>
-          <p:nvPr/>
-        </p:nvSpPr>
-        <p:spPr>
-          <a:xfrm>
-            <a:off x="548640" y="6263640"/>
-            <a:ext cx="11064240" cy="365760"/>
-          </a:xfrm>
-          <a:prstGeom prst="rect">
-            <a:avLst/>
-          </a:prstGeom>
-          <a:noFill/>
-          <a:ln/>
-        </p:spPr>
-        <p:txBody>
-          <a:bodyPr wrap="square" rtlCol="0" anchor="ctr"/>
-          <a:lstStyle/>
-          <a:p>
-            <a:pPr indent="0" marL="0">
-              <a:buNone/>
-            </a:pPr>
-            <a:r>
-              <a:rPr lang="en-US" sz="1200" i="1" dirty="0">
-                <a:solidFill>
-                  <a:srgbClr val="5F5F5F"/>
-                </a:solidFill>
-                <a:latin typeface="Arial" pitchFamily="34" charset="0"/>
-                <a:ea typeface="Arial" pitchFamily="34" charset="-122"/>
-                <a:cs typeface="Arial" pitchFamily="34" charset="-120"/>
-              </a:rPr>
-              <a:t>Append-only store: nothing silently overwritten; “forget this user” is one call.</a:t>
-            </a:r>
-            <a:endParaRPr lang="en-US" sz="1200" dirty="0"/>
           </a:p>
         </p:txBody>
       </p:sp>
@@ -3800,7 +3580,7 @@
         <p:spPr>
           <a:xfrm>
             <a:off x="548640" y="457200"/>
-            <a:ext cx="11064240" cy="640080"/>
+            <a:ext cx="11064240" cy="502920"/>
           </a:xfrm>
           <a:prstGeom prst="rect">
             <a:avLst/>
@@ -3824,7 +3604,7 @@
                 <a:ea typeface="Arial" pitchFamily="34" charset="-122"/>
                 <a:cs typeface="Arial" pitchFamily="34" charset="-120"/>
               </a:rPr>
-              <a:t>Live demo — five things to watch</a:t>
+              <a:t>Anatomy of one turn</a:t>
             </a:r>
             <a:endParaRPr lang="en-US" sz="3000" dirty="0"/>
           </a:p>
@@ -3838,34 +3618,34 @@
         </p:nvSpPr>
         <p:spPr>
           <a:xfrm>
-            <a:off x="548640" y="1527048"/>
-            <a:ext cx="411480" cy="457200"/>
-          </a:xfrm>
-          <a:prstGeom prst="rect">
-            <a:avLst/>
-          </a:prstGeom>
-          <a:noFill/>
-          <a:ln/>
-        </p:spPr>
-        <p:txBody>
-          <a:bodyPr wrap="square" lIns="0" tIns="0" rIns="0" bIns="0" rtlCol="0" anchor="ctr"/>
-          <a:lstStyle/>
-          <a:p>
-            <a:pPr indent="0" marL="0">
-              <a:buNone/>
-            </a:pPr>
-            <a:r>
-              <a:rPr lang="en-US" sz="2200" b="1" dirty="0">
-                <a:solidFill>
-                  <a:srgbClr val="EC0016"/>
-                </a:solidFill>
-                <a:latin typeface="Arial" pitchFamily="34" charset="0"/>
-                <a:ea typeface="Arial" pitchFamily="34" charset="-122"/>
-                <a:cs typeface="Arial" pitchFamily="34" charset="-120"/>
-              </a:rPr>
-              <a:t>1</a:t>
-            </a:r>
-            <a:endParaRPr lang="en-US" sz="2200" dirty="0"/>
+            <a:off x="548640" y="960120"/>
+            <a:ext cx="11064240" cy="292608"/>
+          </a:xfrm>
+          <a:prstGeom prst="rect">
+            <a:avLst/>
+          </a:prstGeom>
+          <a:noFill/>
+          <a:ln/>
+        </p:spPr>
+        <p:txBody>
+          <a:bodyPr wrap="square" rtlCol="0" anchor="ctr"/>
+          <a:lstStyle/>
+          <a:p>
+            <a:pPr indent="0" marL="0">
+              <a:buNone/>
+            </a:pPr>
+            <a:r>
+              <a:rPr lang="en-US" sz="1300" i="1" dirty="0">
+                <a:solidFill>
+                  <a:srgbClr val="5F5F5F"/>
+                </a:solidFill>
+                <a:latin typeface="Arial" pitchFamily="34" charset="0"/>
+                <a:ea typeface="Arial" pitchFamily="34" charset="-122"/>
+                <a:cs typeface="Arial" pitchFamily="34" charset="-120"/>
+              </a:rPr>
+              <a:t>Every step is logged; nothing here can block or break a turn.</a:t>
+            </a:r>
+            <a:endParaRPr lang="en-US" sz="1300" dirty="0"/>
           </a:p>
         </p:txBody>
       </p:sp>
@@ -3877,21 +3657,43 @@
         </p:nvSpPr>
         <p:spPr>
           <a:xfrm>
-            <a:off x="1005840" y="1508760"/>
-            <a:ext cx="457200" cy="457200"/>
+            <a:off x="2436876" y="1325880"/>
+            <a:ext cx="7315200" cy="594360"/>
+          </a:xfrm>
+          <a:prstGeom prst="roundRect">
+            <a:avLst>
+              <a:gd name="adj" fmla="val 12308"/>
+            </a:avLst>
+          </a:prstGeom>
+          <a:solidFill>
+            <a:srgbClr val="F4F4F4"/>
+          </a:solidFill>
+          <a:ln/>
+        </p:spPr>
+      </p:sp>
+      <p:sp>
+        <p:nvSpPr>
+          <p:cNvPr id="5" name="Shape 3"/>
+          <p:cNvSpPr/>
+          <p:nvPr/>
+        </p:nvSpPr>
+        <p:spPr>
+          <a:xfrm>
+            <a:off x="2583180" y="1399032"/>
+            <a:ext cx="448056" cy="448056"/>
           </a:xfrm>
           <a:prstGeom prst="ellipse">
             <a:avLst/>
           </a:prstGeom>
           <a:solidFill>
-            <a:srgbClr val="F4F4F4"/>
+            <a:srgbClr val="FFFFFF"/>
           </a:solidFill>
           <a:ln/>
         </p:spPr>
       </p:sp>
       <p:pic>
         <p:nvPicPr>
-          <p:cNvPr id="5" name="Image 0" descr="preencoded.png">    </p:cNvPr>
+          <p:cNvPr id="6" name="Image 0" descr="preencoded.png">    </p:cNvPr>
           <p:cNvPicPr>
             <a:picLocks noChangeAspect="1"/>
           </p:cNvPicPr>
@@ -3905,8 +3707,8 @@
         </p:blipFill>
         <p:spPr>
           <a:xfrm>
-            <a:off x="1129284" y="1632204"/>
-            <a:ext cx="210312" cy="210312"/>
+            <a:off x="2704155" y="1520007"/>
+            <a:ext cx="206106" cy="206106"/>
           </a:xfrm>
           <a:prstGeom prst="rect">
             <a:avLst/>
@@ -3915,30 +3717,30 @@
       </p:pic>
       <p:sp>
         <p:nvSpPr>
-          <p:cNvPr id="6" name="Text 3"/>
-          <p:cNvSpPr/>
-          <p:nvPr/>
-        </p:nvSpPr>
-        <p:spPr>
-          <a:xfrm>
-            <a:off x="1691640" y="1536192"/>
-            <a:ext cx="2286000" cy="365760"/>
-          </a:xfrm>
-          <a:prstGeom prst="rect">
-            <a:avLst/>
-          </a:prstGeom>
-          <a:noFill/>
-          <a:ln/>
-        </p:spPr>
-        <p:txBody>
-          <a:bodyPr wrap="square" lIns="0" tIns="0" rIns="0" bIns="0" rtlCol="0" anchor="ctr"/>
-          <a:lstStyle/>
-          <a:p>
-            <a:pPr indent="0" marL="0">
-              <a:buNone/>
-            </a:pPr>
-            <a:r>
-              <a:rPr lang="en-US" sz="1550" b="1" dirty="0">
+          <p:cNvPr id="7" name="Text 4"/>
+          <p:cNvSpPr/>
+          <p:nvPr/>
+        </p:nvSpPr>
+        <p:spPr>
+          <a:xfrm>
+            <a:off x="3177540" y="1399032"/>
+            <a:ext cx="6428232" cy="273406"/>
+          </a:xfrm>
+          <a:prstGeom prst="rect">
+            <a:avLst/>
+          </a:prstGeom>
+          <a:noFill/>
+          <a:ln/>
+        </p:spPr>
+        <p:txBody>
+          <a:bodyPr wrap="square" lIns="0" tIns="0" rIns="0" bIns="0" rtlCol="0" anchor="t"/>
+          <a:lstStyle/>
+          <a:p>
+            <a:pPr indent="0" marL="0">
+              <a:buNone/>
+            </a:pPr>
+            <a:r>
+              <a:rPr lang="en-US" sz="1350" b="1" dirty="0">
                 <a:solidFill>
                   <a:srgbClr val="1A1A1A"/>
                 </a:solidFill>
@@ -3946,38 +3748,41 @@
                 <a:ea typeface="Arial" pitchFamily="34" charset="-122"/>
                 <a:cs typeface="Arial" pitchFamily="34" charset="-120"/>
               </a:rPr>
-              <a:t>Teach it</a:t>
-            </a:r>
-            <a:endParaRPr lang="en-US" sz="1550" dirty="0"/>
-          </a:p>
-        </p:txBody>
-      </p:sp>
-      <p:sp>
-        <p:nvSpPr>
-          <p:cNvPr id="7" name="Text 4"/>
-          <p:cNvSpPr/>
-          <p:nvPr/>
-        </p:nvSpPr>
-        <p:spPr>
-          <a:xfrm>
-            <a:off x="4114800" y="1554480"/>
-            <a:ext cx="7498080" cy="457200"/>
-          </a:xfrm>
-          <a:prstGeom prst="rect">
-            <a:avLst/>
-          </a:prstGeom>
-          <a:noFill/>
-          <a:ln/>
-        </p:spPr>
-        <p:txBody>
-          <a:bodyPr wrap="square" lIns="0" tIns="0" rIns="0" bIns="0" rtlCol="0" anchor="ctr"/>
-          <a:lstStyle/>
-          <a:p>
-            <a:pPr indent="0" marL="0">
-              <a:buNone/>
-            </a:pPr>
-            <a:r>
-              <a:rPr lang="en-US" sz="1350" dirty="0">
+              <a:t>① Turn starts → recall runs</a:t>
+            </a:r>
+            <a:endParaRPr lang="en-US" sz="1350" dirty="0"/>
+          </a:p>
+        </p:txBody>
+      </p:sp>
+      <p:sp>
+        <p:nvSpPr>
+          <p:cNvPr id="8" name="Text 5"/>
+          <p:cNvSpPr/>
+          <p:nvPr/>
+        </p:nvSpPr>
+        <p:spPr>
+          <a:xfrm>
+            <a:off x="3177540" y="1648663"/>
+            <a:ext cx="6428232" cy="297180"/>
+          </a:xfrm>
+          <a:prstGeom prst="rect">
+            <a:avLst/>
+          </a:prstGeom>
+          <a:noFill/>
+          <a:ln/>
+        </p:spPr>
+        <p:txBody>
+          <a:bodyPr wrap="square" lIns="0" tIns="0" rIns="0" bIns="0" rtlCol="0" anchor="t"/>
+          <a:lstStyle/>
+          <a:p>
+            <a:pPr indent="0" marL="0">
+              <a:lnSpc>
+                <a:spcPct val="105000"/>
+              </a:lnSpc>
+              <a:buNone/>
+            </a:pPr>
+            <a:r>
+              <a:rPr lang="en-US" sz="1050" dirty="0">
                 <a:solidFill>
                   <a:srgbClr val="5F5F5F"/>
                 </a:solidFill>
@@ -3985,48 +3790,9 @@
                 <a:ea typeface="Arial" pitchFamily="34" charset="-122"/>
                 <a:cs typeface="Arial" pitchFamily="34" charset="-120"/>
               </a:rPr>
-              <a:t>I state durable facts — watch the save_memory tool call render.</a:t>
-            </a:r>
-            <a:endParaRPr lang="en-US" sz="1350" dirty="0"/>
-          </a:p>
-        </p:txBody>
-      </p:sp>
-      <p:sp>
-        <p:nvSpPr>
-          <p:cNvPr id="8" name="Text 5"/>
-          <p:cNvSpPr/>
-          <p:nvPr/>
-        </p:nvSpPr>
-        <p:spPr>
-          <a:xfrm>
-            <a:off x="548640" y="2395728"/>
-            <a:ext cx="411480" cy="457200"/>
-          </a:xfrm>
-          <a:prstGeom prst="rect">
-            <a:avLst/>
-          </a:prstGeom>
-          <a:noFill/>
-          <a:ln/>
-        </p:spPr>
-        <p:txBody>
-          <a:bodyPr wrap="square" lIns="0" tIns="0" rIns="0" bIns="0" rtlCol="0" anchor="ctr"/>
-          <a:lstStyle/>
-          <a:p>
-            <a:pPr indent="0" marL="0">
-              <a:buNone/>
-            </a:pPr>
-            <a:r>
-              <a:rPr lang="en-US" sz="2200" b="1" dirty="0">
-                <a:solidFill>
-                  <a:srgbClr val="EC0016"/>
-                </a:solidFill>
-                <a:latin typeface="Arial" pitchFamily="34" charset="0"/>
-                <a:ea typeface="Arial" pitchFamily="34" charset="-122"/>
-                <a:cs typeface="Arial" pitchFamily="34" charset="-120"/>
-              </a:rPr>
-              <a:t>2</a:t>
-            </a:r>
-            <a:endParaRPr lang="en-US" sz="2200" dirty="0"/>
+              <a:t>Flag on → fetch this scope's memories, rank by relevance + recency</a:t>
+            </a:r>
+            <a:endParaRPr lang="en-US" sz="1050" dirty="0"/>
           </a:p>
         </p:txBody>
       </p:sp>
@@ -4038,21 +3804,63 @@
         </p:nvSpPr>
         <p:spPr>
           <a:xfrm>
-            <a:off x="1005840" y="2377440"/>
-            <a:ext cx="457200" cy="457200"/>
+            <a:off x="5948172" y="1920240"/>
+            <a:ext cx="292608" cy="201168"/>
+          </a:xfrm>
+          <a:prstGeom prst="downArrow">
+            <a:avLst/>
+          </a:prstGeom>
+          <a:solidFill>
+            <a:srgbClr val="EC0016"/>
+          </a:solidFill>
+          <a:ln/>
+        </p:spPr>
+      </p:sp>
+      <p:sp>
+        <p:nvSpPr>
+          <p:cNvPr id="10" name="Shape 7"/>
+          <p:cNvSpPr/>
+          <p:nvPr/>
+        </p:nvSpPr>
+        <p:spPr>
+          <a:xfrm>
+            <a:off x="2436876" y="2121408"/>
+            <a:ext cx="7315200" cy="594360"/>
+          </a:xfrm>
+          <a:prstGeom prst="roundRect">
+            <a:avLst>
+              <a:gd name="adj" fmla="val 12308"/>
+            </a:avLst>
+          </a:prstGeom>
+          <a:solidFill>
+            <a:srgbClr val="F4F4F4"/>
+          </a:solidFill>
+          <a:ln/>
+        </p:spPr>
+      </p:sp>
+      <p:sp>
+        <p:nvSpPr>
+          <p:cNvPr id="11" name="Shape 8"/>
+          <p:cNvSpPr/>
+          <p:nvPr/>
+        </p:nvSpPr>
+        <p:spPr>
+          <a:xfrm>
+            <a:off x="2583180" y="2194560"/>
+            <a:ext cx="448056" cy="448056"/>
           </a:xfrm>
           <a:prstGeom prst="ellipse">
             <a:avLst/>
           </a:prstGeom>
           <a:solidFill>
-            <a:srgbClr val="F4F4F4"/>
+            <a:srgbClr val="FFFFFF"/>
           </a:solidFill>
           <a:ln/>
         </p:spPr>
       </p:sp>
       <p:pic>
         <p:nvPicPr>
-          <p:cNvPr id="10" name="Image 1" descr="preencoded.png">    </p:cNvPr>
+          <p:cNvPr id="12" name="Image 1" descr="preencoded.png">    </p:cNvPr>
           <p:cNvPicPr>
             <a:picLocks noChangeAspect="1"/>
           </p:cNvPicPr>
@@ -4066,8 +3874,8 @@
         </p:blipFill>
         <p:spPr>
           <a:xfrm>
-            <a:off x="1129284" y="2500884"/>
-            <a:ext cx="210312" cy="210312"/>
+            <a:off x="2704155" y="2315535"/>
+            <a:ext cx="206106" cy="206106"/>
           </a:xfrm>
           <a:prstGeom prst="rect">
             <a:avLst/>
@@ -4076,30 +3884,30 @@
       </p:pic>
       <p:sp>
         <p:nvSpPr>
-          <p:cNvPr id="11" name="Text 7"/>
-          <p:cNvSpPr/>
-          <p:nvPr/>
-        </p:nvSpPr>
-        <p:spPr>
-          <a:xfrm>
-            <a:off x="1691640" y="2404872"/>
-            <a:ext cx="2286000" cy="365760"/>
-          </a:xfrm>
-          <a:prstGeom prst="rect">
-            <a:avLst/>
-          </a:prstGeom>
-          <a:noFill/>
-          <a:ln/>
-        </p:spPr>
-        <p:txBody>
-          <a:bodyPr wrap="square" lIns="0" tIns="0" rIns="0" bIns="0" rtlCol="0" anchor="ctr"/>
-          <a:lstStyle/>
-          <a:p>
-            <a:pPr indent="0" marL="0">
-              <a:buNone/>
-            </a:pPr>
-            <a:r>
-              <a:rPr lang="en-US" sz="1550" b="1" dirty="0">
+          <p:cNvPr id="13" name="Text 9"/>
+          <p:cNvSpPr/>
+          <p:nvPr/>
+        </p:nvSpPr>
+        <p:spPr>
+          <a:xfrm>
+            <a:off x="3177540" y="2194560"/>
+            <a:ext cx="6428232" cy="273406"/>
+          </a:xfrm>
+          <a:prstGeom prst="rect">
+            <a:avLst/>
+          </a:prstGeom>
+          <a:noFill/>
+          <a:ln/>
+        </p:spPr>
+        <p:txBody>
+          <a:bodyPr wrap="square" lIns="0" tIns="0" rIns="0" bIns="0" rtlCol="0" anchor="t"/>
+          <a:lstStyle/>
+          <a:p>
+            <a:pPr indent="0" marL="0">
+              <a:buNone/>
+            </a:pPr>
+            <a:r>
+              <a:rPr lang="en-US" sz="1350" b="1" dirty="0">
                 <a:solidFill>
                   <a:srgbClr val="1A1A1A"/>
                 </a:solidFill>
@@ -4107,38 +3915,41 @@
                 <a:ea typeface="Arial" pitchFamily="34" charset="-122"/>
                 <a:cs typeface="Arial" pitchFamily="34" charset="-120"/>
               </a:rPr>
-              <a:t>New thread</a:t>
-            </a:r>
-            <a:endParaRPr lang="en-US" sz="1550" dirty="0"/>
-          </a:p>
-        </p:txBody>
-      </p:sp>
-      <p:sp>
-        <p:nvSpPr>
-          <p:cNvPr id="12" name="Text 8"/>
-          <p:cNvSpPr/>
-          <p:nvPr/>
-        </p:nvSpPr>
-        <p:spPr>
-          <a:xfrm>
-            <a:off x="4114800" y="2423160"/>
-            <a:ext cx="7498080" cy="457200"/>
-          </a:xfrm>
-          <a:prstGeom prst="rect">
-            <a:avLst/>
-          </a:prstGeom>
-          <a:noFill/>
-          <a:ln/>
-        </p:spPr>
-        <p:txBody>
-          <a:bodyPr wrap="square" lIns="0" tIns="0" rIns="0" bIns="0" rtlCol="0" anchor="ctr"/>
-          <a:lstStyle/>
-          <a:p>
-            <a:pPr indent="0" marL="0">
-              <a:buNone/>
-            </a:pPr>
-            <a:r>
-              <a:rPr lang="en-US" sz="1350" dirty="0">
+              <a:t>② Added to context — fenced as data</a:t>
+            </a:r>
+            <a:endParaRPr lang="en-US" sz="1350" dirty="0"/>
+          </a:p>
+        </p:txBody>
+      </p:sp>
+      <p:sp>
+        <p:nvSpPr>
+          <p:cNvPr id="14" name="Text 10"/>
+          <p:cNvSpPr/>
+          <p:nvPr/>
+        </p:nvSpPr>
+        <p:spPr>
+          <a:xfrm>
+            <a:off x="3177540" y="2444191"/>
+            <a:ext cx="6428232" cy="297180"/>
+          </a:xfrm>
+          <a:prstGeom prst="rect">
+            <a:avLst/>
+          </a:prstGeom>
+          <a:noFill/>
+          <a:ln/>
+        </p:spPr>
+        <p:txBody>
+          <a:bodyPr wrap="square" lIns="0" tIns="0" rIns="0" bIns="0" rtlCol="0" anchor="t"/>
+          <a:lstStyle/>
+          <a:p>
+            <a:pPr indent="0" marL="0">
+              <a:lnSpc>
+                <a:spcPct val="105000"/>
+              </a:lnSpc>
+              <a:buNone/>
+            </a:pPr>
+            <a:r>
+              <a:rPr lang="en-US" sz="1050" dirty="0">
                 <a:solidFill>
                   <a:srgbClr val="5F5F5F"/>
                 </a:solidFill>
@@ -4146,74 +3957,77 @@
                 <a:ea typeface="Arial" pitchFamily="34" charset="-122"/>
                 <a:cs typeface="Arial" pitchFamily="34" charset="-120"/>
               </a:rPr>
-              <a:t>“What do you remember about me?” — 🧠 receipt + recital from an empty transcript.</a:t>
-            </a:r>
-            <a:endParaRPr lang="en-US" sz="1350" dirty="0"/>
-          </a:p>
-        </p:txBody>
-      </p:sp>
-      <p:sp>
-        <p:nvSpPr>
-          <p:cNvPr id="13" name="Text 9"/>
-          <p:cNvSpPr/>
-          <p:nvPr/>
-        </p:nvSpPr>
-        <p:spPr>
-          <a:xfrm>
-            <a:off x="548640" y="3264408"/>
-            <a:ext cx="411480" cy="457200"/>
-          </a:xfrm>
-          <a:prstGeom prst="rect">
-            <a:avLst/>
-          </a:prstGeom>
-          <a:noFill/>
-          <a:ln/>
-        </p:spPr>
-        <p:txBody>
-          <a:bodyPr wrap="square" lIns="0" tIns="0" rIns="0" bIns="0" rtlCol="0" anchor="ctr"/>
-          <a:lstStyle/>
-          <a:p>
-            <a:pPr indent="0" marL="0">
-              <a:buNone/>
-            </a:pPr>
-            <a:r>
-              <a:rPr lang="en-US" sz="2200" b="1" dirty="0">
-                <a:solidFill>
-                  <a:srgbClr val="EC0016"/>
-                </a:solidFill>
-                <a:latin typeface="Arial" pitchFamily="34" charset="0"/>
-                <a:ea typeface="Arial" pitchFamily="34" charset="-122"/>
-                <a:cs typeface="Arial" pitchFamily="34" charset="-120"/>
-              </a:rPr>
-              <a:t>3</a:t>
-            </a:r>
-            <a:endParaRPr lang="en-US" sz="2200" dirty="0"/>
-          </a:p>
-        </p:txBody>
-      </p:sp>
-      <p:sp>
-        <p:nvSpPr>
-          <p:cNvPr id="14" name="Shape 10"/>
-          <p:cNvSpPr/>
-          <p:nvPr/>
-        </p:nvSpPr>
-        <p:spPr>
-          <a:xfrm>
-            <a:off x="1005840" y="3246120"/>
-            <a:ext cx="457200" cy="457200"/>
+              <a:t>Today: appended to instructions. Next: a dedicated input item (see What's next).</a:t>
+            </a:r>
+            <a:endParaRPr lang="en-US" sz="1050" dirty="0"/>
+          </a:p>
+        </p:txBody>
+      </p:sp>
+      <p:sp>
+        <p:nvSpPr>
+          <p:cNvPr id="15" name="Shape 11"/>
+          <p:cNvSpPr/>
+          <p:nvPr/>
+        </p:nvSpPr>
+        <p:spPr>
+          <a:xfrm>
+            <a:off x="5948172" y="2715768"/>
+            <a:ext cx="292608" cy="201168"/>
+          </a:xfrm>
+          <a:prstGeom prst="downArrow">
+            <a:avLst/>
+          </a:prstGeom>
+          <a:solidFill>
+            <a:srgbClr val="EC0016"/>
+          </a:solidFill>
+          <a:ln/>
+        </p:spPr>
+      </p:sp>
+      <p:sp>
+        <p:nvSpPr>
+          <p:cNvPr id="16" name="Shape 12"/>
+          <p:cNvSpPr/>
+          <p:nvPr/>
+        </p:nvSpPr>
+        <p:spPr>
+          <a:xfrm>
+            <a:off x="2436876" y="2916936"/>
+            <a:ext cx="7315200" cy="502920"/>
+          </a:xfrm>
+          <a:prstGeom prst="roundRect">
+            <a:avLst>
+              <a:gd name="adj" fmla="val 14545"/>
+            </a:avLst>
+          </a:prstGeom>
+          <a:solidFill>
+            <a:srgbClr val="F4F4F4"/>
+          </a:solidFill>
+          <a:ln/>
+        </p:spPr>
+      </p:sp>
+      <p:sp>
+        <p:nvSpPr>
+          <p:cNvPr id="17" name="Shape 13"/>
+          <p:cNvSpPr/>
+          <p:nvPr/>
+        </p:nvSpPr>
+        <p:spPr>
+          <a:xfrm>
+            <a:off x="2583180" y="2990088"/>
+            <a:ext cx="356616" cy="356616"/>
           </a:xfrm>
           <a:prstGeom prst="ellipse">
             <a:avLst/>
           </a:prstGeom>
           <a:solidFill>
-            <a:srgbClr val="F4F4F4"/>
+            <a:srgbClr val="FFFFFF"/>
           </a:solidFill>
           <a:ln/>
         </p:spPr>
       </p:sp>
       <p:pic>
         <p:nvPicPr>
-          <p:cNvPr id="15" name="Image 2" descr="preencoded.png">    </p:cNvPr>
+          <p:cNvPr id="18" name="Image 2" descr="preencoded.png">    </p:cNvPr>
           <p:cNvPicPr>
             <a:picLocks noChangeAspect="1"/>
           </p:cNvPicPr>
@@ -4227,8 +4041,8 @@
         </p:blipFill>
         <p:spPr>
           <a:xfrm>
-            <a:off x="1129284" y="3369564"/>
-            <a:ext cx="210312" cy="210312"/>
+            <a:off x="2679466" y="3086374"/>
+            <a:ext cx="164043" cy="164043"/>
           </a:xfrm>
           <a:prstGeom prst="rect">
             <a:avLst/>
@@ -4237,30 +4051,30 @@
       </p:pic>
       <p:sp>
         <p:nvSpPr>
-          <p:cNvPr id="16" name="Text 11"/>
-          <p:cNvSpPr/>
-          <p:nvPr/>
-        </p:nvSpPr>
-        <p:spPr>
-          <a:xfrm>
-            <a:off x="1691640" y="3273552"/>
-            <a:ext cx="2286000" cy="365760"/>
-          </a:xfrm>
-          <a:prstGeom prst="rect">
-            <a:avLst/>
-          </a:prstGeom>
-          <a:noFill/>
-          <a:ln/>
-        </p:spPr>
-        <p:txBody>
-          <a:bodyPr wrap="square" lIns="0" tIns="0" rIns="0" bIns="0" rtlCol="0" anchor="ctr"/>
-          <a:lstStyle/>
-          <a:p>
-            <a:pPr indent="0" marL="0">
-              <a:buNone/>
-            </a:pPr>
-            <a:r>
-              <a:rPr lang="en-US" sz="1550" b="1" dirty="0">
+          <p:cNvPr id="19" name="Text 14"/>
+          <p:cNvSpPr/>
+          <p:nvPr/>
+        </p:nvSpPr>
+        <p:spPr>
+          <a:xfrm>
+            <a:off x="3086100" y="2990088"/>
+            <a:ext cx="6519672" cy="231343"/>
+          </a:xfrm>
+          <a:prstGeom prst="rect">
+            <a:avLst/>
+          </a:prstGeom>
+          <a:noFill/>
+          <a:ln/>
+        </p:spPr>
+        <p:txBody>
+          <a:bodyPr wrap="square" lIns="0" tIns="0" rIns="0" bIns="0" rtlCol="0" anchor="t"/>
+          <a:lstStyle/>
+          <a:p>
+            <a:pPr indent="0" marL="0">
+              <a:buNone/>
+            </a:pPr>
+            <a:r>
+              <a:rPr lang="en-US" sz="1350" b="1" dirty="0">
                 <a:solidFill>
                   <a:srgbClr val="1A1A1A"/>
                 </a:solidFill>
@@ -4268,38 +4082,41 @@
                 <a:ea typeface="Arial" pitchFamily="34" charset="-122"/>
                 <a:cs typeface="Arial" pitchFamily="34" charset="-120"/>
               </a:rPr>
-              <a:t>Kill the backend</a:t>
-            </a:r>
-            <a:endParaRPr lang="en-US" sz="1550" dirty="0"/>
-          </a:p>
-        </p:txBody>
-      </p:sp>
-      <p:sp>
-        <p:nvSpPr>
-          <p:cNvPr id="17" name="Text 12"/>
-          <p:cNvSpPr/>
-          <p:nvPr/>
-        </p:nvSpPr>
-        <p:spPr>
-          <a:xfrm>
-            <a:off x="4114800" y="3291840"/>
-            <a:ext cx="7498080" cy="457200"/>
-          </a:xfrm>
-          <a:prstGeom prst="rect">
-            <a:avLst/>
-          </a:prstGeom>
-          <a:noFill/>
-          <a:ln/>
-        </p:spPr>
-        <p:txBody>
-          <a:bodyPr wrap="square" lIns="0" tIns="0" rIns="0" bIns="0" rtlCol="0" anchor="ctr"/>
-          <a:lstStyle/>
-          <a:p>
-            <a:pPr indent="0" marL="0">
-              <a:buNone/>
-            </a:pPr>
-            <a:r>
-              <a:rPr lang="en-US" sz="1350" dirty="0">
+              <a:t>③ Model responds</a:t>
+            </a:r>
+            <a:endParaRPr lang="en-US" sz="1350" dirty="0"/>
+          </a:p>
+        </p:txBody>
+      </p:sp>
+      <p:sp>
+        <p:nvSpPr>
+          <p:cNvPr id="20" name="Text 15"/>
+          <p:cNvSpPr/>
+          <p:nvPr/>
+        </p:nvSpPr>
+        <p:spPr>
+          <a:xfrm>
+            <a:off x="3086100" y="3201314"/>
+            <a:ext cx="6519672" cy="251460"/>
+          </a:xfrm>
+          <a:prstGeom prst="rect">
+            <a:avLst/>
+          </a:prstGeom>
+          <a:noFill/>
+          <a:ln/>
+        </p:spPr>
+        <p:txBody>
+          <a:bodyPr wrap="square" lIns="0" tIns="0" rIns="0" bIns="0" rtlCol="0" anchor="t"/>
+          <a:lstStyle/>
+          <a:p>
+            <a:pPr indent="0" marL="0">
+              <a:lnSpc>
+                <a:spcPct val="105000"/>
+              </a:lnSpc>
+              <a:buNone/>
+            </a:pPr>
+            <a:r>
+              <a:rPr lang="en-US" sz="1050" dirty="0">
                 <a:solidFill>
                   <a:srgbClr val="5F5F5F"/>
                 </a:solidFill>
@@ -4307,74 +4124,77 @@
                 <a:ea typeface="Arial" pitchFamily="34" charset="-122"/>
                 <a:cs typeface="Arial" pitchFamily="34" charset="-120"/>
               </a:rPr>
-              <a:t>Restart, ask again. Postgres rows, not process state.</a:t>
-            </a:r>
-            <a:endParaRPr lang="en-US" sz="1350" dirty="0"/>
-          </a:p>
-        </p:txBody>
-      </p:sp>
-      <p:sp>
-        <p:nvSpPr>
-          <p:cNvPr id="18" name="Text 13"/>
-          <p:cNvSpPr/>
-          <p:nvPr/>
-        </p:nvSpPr>
-        <p:spPr>
-          <a:xfrm>
-            <a:off x="548640" y="4133088"/>
-            <a:ext cx="411480" cy="457200"/>
-          </a:xfrm>
-          <a:prstGeom prst="rect">
-            <a:avLst/>
-          </a:prstGeom>
-          <a:noFill/>
-          <a:ln/>
-        </p:spPr>
-        <p:txBody>
-          <a:bodyPr wrap="square" lIns="0" tIns="0" rIns="0" bIns="0" rtlCol="0" anchor="ctr"/>
-          <a:lstStyle/>
-          <a:p>
-            <a:pPr indent="0" marL="0">
-              <a:buNone/>
-            </a:pPr>
-            <a:r>
-              <a:rPr lang="en-US" sz="2200" b="1" dirty="0">
-                <a:solidFill>
-                  <a:srgbClr val="EC0016"/>
-                </a:solidFill>
-                <a:latin typeface="Arial" pitchFamily="34" charset="0"/>
-                <a:ea typeface="Arial" pitchFamily="34" charset="-122"/>
-                <a:cs typeface="Arial" pitchFamily="34" charset="-120"/>
-              </a:rPr>
-              <a:t>4</a:t>
-            </a:r>
-            <a:endParaRPr lang="en-US" sz="2200" dirty="0"/>
-          </a:p>
-        </p:txBody>
-      </p:sp>
-      <p:sp>
-        <p:nvSpPr>
-          <p:cNvPr id="19" name="Shape 14"/>
-          <p:cNvSpPr/>
-          <p:nvPr/>
-        </p:nvSpPr>
-        <p:spPr>
-          <a:xfrm>
-            <a:off x="1005840" y="4114800"/>
+              <a:t>🧠 “Recalled N memories” indicator</a:t>
+            </a:r>
+            <a:endParaRPr lang="en-US" sz="1050" dirty="0"/>
+          </a:p>
+        </p:txBody>
+      </p:sp>
+      <p:sp>
+        <p:nvSpPr>
+          <p:cNvPr id="21" name="Shape 16"/>
+          <p:cNvSpPr/>
+          <p:nvPr/>
+        </p:nvSpPr>
+        <p:spPr>
+          <a:xfrm>
+            <a:off x="5948172" y="3419856"/>
+            <a:ext cx="292608" cy="201168"/>
+          </a:xfrm>
+          <a:prstGeom prst="downArrow">
+            <a:avLst/>
+          </a:prstGeom>
+          <a:solidFill>
+            <a:srgbClr val="EC0016"/>
+          </a:solidFill>
+          <a:ln/>
+        </p:spPr>
+      </p:sp>
+      <p:sp>
+        <p:nvSpPr>
+          <p:cNvPr id="22" name="Shape 17"/>
+          <p:cNvSpPr/>
+          <p:nvPr/>
+        </p:nvSpPr>
+        <p:spPr>
+          <a:xfrm>
+            <a:off x="2436876" y="3621024"/>
+            <a:ext cx="3474720" cy="685800"/>
+          </a:xfrm>
+          <a:prstGeom prst="roundRect">
+            <a:avLst>
+              <a:gd name="adj" fmla="val 10667"/>
+            </a:avLst>
+          </a:prstGeom>
+          <a:solidFill>
+            <a:srgbClr val="F4F4F4"/>
+          </a:solidFill>
+          <a:ln/>
+        </p:spPr>
+      </p:sp>
+      <p:sp>
+        <p:nvSpPr>
+          <p:cNvPr id="23" name="Shape 18"/>
+          <p:cNvSpPr/>
+          <p:nvPr/>
+        </p:nvSpPr>
+        <p:spPr>
+          <a:xfrm>
+            <a:off x="2583180" y="3735324"/>
             <a:ext cx="457200" cy="457200"/>
           </a:xfrm>
           <a:prstGeom prst="ellipse">
             <a:avLst/>
           </a:prstGeom>
           <a:solidFill>
-            <a:srgbClr val="F4F4F4"/>
+            <a:srgbClr val="FFFFFF"/>
           </a:solidFill>
           <a:ln/>
         </p:spPr>
       </p:sp>
       <p:pic>
         <p:nvPicPr>
-          <p:cNvPr id="20" name="Image 3" descr="preencoded.png">    </p:cNvPr>
+          <p:cNvPr id="24" name="Image 3" descr="preencoded.png">    </p:cNvPr>
           <p:cNvPicPr>
             <a:picLocks noChangeAspect="1"/>
           </p:cNvPicPr>
@@ -4388,7 +4208,7 @@
         </p:blipFill>
         <p:spPr>
           <a:xfrm>
-            <a:off x="1129284" y="4238244"/>
+            <a:off x="2706624" y="3858768"/>
             <a:ext cx="210312" cy="210312"/>
           </a:xfrm>
           <a:prstGeom prst="rect">
@@ -4398,30 +4218,30 @@
       </p:pic>
       <p:sp>
         <p:nvSpPr>
-          <p:cNvPr id="21" name="Text 15"/>
-          <p:cNvSpPr/>
-          <p:nvPr/>
-        </p:nvSpPr>
-        <p:spPr>
-          <a:xfrm>
-            <a:off x="1691640" y="4142232"/>
-            <a:ext cx="2286000" cy="365760"/>
-          </a:xfrm>
-          <a:prstGeom prst="rect">
-            <a:avLst/>
-          </a:prstGeom>
-          <a:noFill/>
-          <a:ln/>
-        </p:spPr>
-        <p:txBody>
-          <a:bodyPr wrap="square" lIns="0" tIns="0" rIns="0" bIns="0" rtlCol="0" anchor="ctr"/>
-          <a:lstStyle/>
-          <a:p>
-            <a:pPr indent="0" marL="0">
-              <a:buNone/>
-            </a:pPr>
-            <a:r>
-              <a:rPr lang="en-US" sz="1550" b="1" dirty="0">
+          <p:cNvPr id="25" name="Text 19"/>
+          <p:cNvSpPr/>
+          <p:nvPr/>
+        </p:nvSpPr>
+        <p:spPr>
+          <a:xfrm>
+            <a:off x="3186684" y="3694176"/>
+            <a:ext cx="2578608" cy="315468"/>
+          </a:xfrm>
+          <a:prstGeom prst="rect">
+            <a:avLst/>
+          </a:prstGeom>
+          <a:noFill/>
+          <a:ln/>
+        </p:spPr>
+        <p:txBody>
+          <a:bodyPr wrap="square" lIns="0" tIns="0" rIns="0" bIns="0" rtlCol="0" anchor="t"/>
+          <a:lstStyle/>
+          <a:p>
+            <a:pPr indent="0" marL="0">
+              <a:buNone/>
+            </a:pPr>
+            <a:r>
+              <a:rPr lang="en-US" sz="1350" b="1" dirty="0">
                 <a:solidFill>
                   <a:srgbClr val="1A1A1A"/>
                 </a:solidFill>
@@ -4429,38 +4249,41 @@
                 <a:ea typeface="Arial" pitchFamily="34" charset="-122"/>
                 <a:cs typeface="Arial" pitchFamily="34" charset="-120"/>
               </a:rPr>
-              <a:t>Switch user</a:t>
-            </a:r>
-            <a:endParaRPr lang="en-US" sz="1550" dirty="0"/>
-          </a:p>
-        </p:txBody>
-      </p:sp>
-      <p:sp>
-        <p:nvSpPr>
-          <p:cNvPr id="22" name="Text 16"/>
-          <p:cNvSpPr/>
-          <p:nvPr/>
-        </p:nvSpPr>
-        <p:spPr>
-          <a:xfrm>
-            <a:off x="4114800" y="4160520"/>
-            <a:ext cx="7498080" cy="457200"/>
-          </a:xfrm>
-          <a:prstGeom prst="rect">
-            <a:avLst/>
-          </a:prstGeom>
-          <a:noFill/>
-          <a:ln/>
-        </p:spPr>
-        <p:txBody>
-          <a:bodyPr wrap="square" lIns="0" tIns="0" rIns="0" bIns="0" rtlCol="0" anchor="ctr"/>
-          <a:lstStyle/>
-          <a:p>
-            <a:pPr indent="0" marL="0">
-              <a:buNone/>
-            </a:pPr>
-            <a:r>
-              <a:rPr lang="en-US" sz="1350" dirty="0">
+              <a:t>④a Explicit save</a:t>
+            </a:r>
+            <a:endParaRPr lang="en-US" sz="1350" dirty="0"/>
+          </a:p>
+        </p:txBody>
+      </p:sp>
+      <p:sp>
+        <p:nvSpPr>
+          <p:cNvPr id="26" name="Text 20"/>
+          <p:cNvSpPr/>
+          <p:nvPr/>
+        </p:nvSpPr>
+        <p:spPr>
+          <a:xfrm>
+            <a:off x="3186684" y="3982212"/>
+            <a:ext cx="2578608" cy="342900"/>
+          </a:xfrm>
+          <a:prstGeom prst="rect">
+            <a:avLst/>
+          </a:prstGeom>
+          <a:noFill/>
+          <a:ln/>
+        </p:spPr>
+        <p:txBody>
+          <a:bodyPr wrap="square" lIns="0" tIns="0" rIns="0" bIns="0" rtlCol="0" anchor="t"/>
+          <a:lstStyle/>
+          <a:p>
+            <a:pPr indent="0" marL="0">
+              <a:lnSpc>
+                <a:spcPct val="105000"/>
+              </a:lnSpc>
+              <a:buNone/>
+            </a:pPr>
+            <a:r>
+              <a:rPr lang="en-US" sz="1050" dirty="0">
                 <a:solidFill>
                   <a:srgbClr val="5F5F5F"/>
                 </a:solidFill>
@@ -4468,74 +4291,57 @@
                 <a:ea typeface="Arial" pitchFamily="34" charset="-122"/>
                 <a:cs typeface="Arial" pitchFamily="34" charset="-120"/>
               </a:rPr>
-              <a:t>Same agent, different user — finds nothing. Isolation at the database.</a:t>
-            </a:r>
-            <a:endParaRPr lang="en-US" sz="1350" dirty="0"/>
-          </a:p>
-        </p:txBody>
-      </p:sp>
-      <p:sp>
-        <p:nvSpPr>
-          <p:cNvPr id="23" name="Text 17"/>
-          <p:cNvSpPr/>
-          <p:nvPr/>
-        </p:nvSpPr>
-        <p:spPr>
-          <a:xfrm>
-            <a:off x="548640" y="5001768"/>
-            <a:ext cx="411480" cy="457200"/>
-          </a:xfrm>
-          <a:prstGeom prst="rect">
-            <a:avLst/>
-          </a:prstGeom>
-          <a:noFill/>
-          <a:ln/>
-        </p:spPr>
-        <p:txBody>
-          <a:bodyPr wrap="square" lIns="0" tIns="0" rIns="0" bIns="0" rtlCol="0" anchor="ctr"/>
-          <a:lstStyle/>
-          <a:p>
-            <a:pPr indent="0" marL="0">
-              <a:buNone/>
-            </a:pPr>
-            <a:r>
-              <a:rPr lang="en-US" sz="2200" b="1" dirty="0">
-                <a:solidFill>
-                  <a:srgbClr val="EC0016"/>
-                </a:solidFill>
-                <a:latin typeface="Arial" pitchFamily="34" charset="0"/>
-                <a:ea typeface="Arial" pitchFamily="34" charset="-122"/>
-                <a:cs typeface="Arial" pitchFamily="34" charset="-120"/>
-              </a:rPr>
-              <a:t>5</a:t>
-            </a:r>
-            <a:endParaRPr lang="en-US" sz="2200" dirty="0"/>
-          </a:p>
-        </p:txBody>
-      </p:sp>
-      <p:sp>
-        <p:nvSpPr>
-          <p:cNvPr id="24" name="Shape 18"/>
-          <p:cNvSpPr/>
-          <p:nvPr/>
-        </p:nvSpPr>
-        <p:spPr>
-          <a:xfrm>
-            <a:off x="1005840" y="4983480"/>
+              <a:t>save_memory tool call</a:t>
+            </a:r>
+            <a:endParaRPr lang="en-US" sz="1050" dirty="0"/>
+          </a:p>
+        </p:txBody>
+      </p:sp>
+      <p:sp>
+        <p:nvSpPr>
+          <p:cNvPr id="27" name="Shape 21"/>
+          <p:cNvSpPr/>
+          <p:nvPr/>
+        </p:nvSpPr>
+        <p:spPr>
+          <a:xfrm>
+            <a:off x="6277356" y="3621024"/>
+            <a:ext cx="3474720" cy="685800"/>
+          </a:xfrm>
+          <a:prstGeom prst="roundRect">
+            <a:avLst>
+              <a:gd name="adj" fmla="val 10667"/>
+            </a:avLst>
+          </a:prstGeom>
+          <a:solidFill>
+            <a:srgbClr val="F4F4F4"/>
+          </a:solidFill>
+          <a:ln/>
+        </p:spPr>
+      </p:sp>
+      <p:sp>
+        <p:nvSpPr>
+          <p:cNvPr id="28" name="Shape 22"/>
+          <p:cNvSpPr/>
+          <p:nvPr/>
+        </p:nvSpPr>
+        <p:spPr>
+          <a:xfrm>
+            <a:off x="6423660" y="3735324"/>
             <a:ext cx="457200" cy="457200"/>
           </a:xfrm>
           <a:prstGeom prst="ellipse">
             <a:avLst/>
           </a:prstGeom>
           <a:solidFill>
-            <a:srgbClr val="F4F4F4"/>
+            <a:srgbClr val="FFFFFF"/>
           </a:solidFill>
           <a:ln/>
         </p:spPr>
       </p:sp>
       <p:pic>
         <p:nvPicPr>
-          <p:cNvPr id="25" name="Image 4" descr="preencoded.png">    </p:cNvPr>
+          <p:cNvPr id="29" name="Image 4" descr="preencoded.png">    </p:cNvPr>
           <p:cNvPicPr>
             <a:picLocks noChangeAspect="1"/>
           </p:cNvPicPr>
@@ -4549,7 +4355,7 @@
         </p:blipFill>
         <p:spPr>
           <a:xfrm>
-            <a:off x="1129284" y="5106924"/>
+            <a:off x="6547104" y="3858768"/>
             <a:ext cx="210312" cy="210312"/>
           </a:xfrm>
           <a:prstGeom prst="rect">
@@ -4559,30 +4365,30 @@
       </p:pic>
       <p:sp>
         <p:nvSpPr>
-          <p:cNvPr id="26" name="Text 19"/>
-          <p:cNvSpPr/>
-          <p:nvPr/>
-        </p:nvSpPr>
-        <p:spPr>
-          <a:xfrm>
-            <a:off x="1691640" y="5010912"/>
-            <a:ext cx="2286000" cy="365760"/>
-          </a:xfrm>
-          <a:prstGeom prst="rect">
-            <a:avLst/>
-          </a:prstGeom>
-          <a:noFill/>
-          <a:ln/>
-        </p:spPr>
-        <p:txBody>
-          <a:bodyPr wrap="square" lIns="0" tIns="0" rIns="0" bIns="0" rtlCol="0" anchor="ctr"/>
-          <a:lstStyle/>
-          <a:p>
-            <a:pPr indent="0" marL="0">
-              <a:buNone/>
-            </a:pPr>
-            <a:r>
-              <a:rPr lang="en-US" sz="1550" b="1" dirty="0">
+          <p:cNvPr id="30" name="Text 23"/>
+          <p:cNvSpPr/>
+          <p:nvPr/>
+        </p:nvSpPr>
+        <p:spPr>
+          <a:xfrm>
+            <a:off x="7027164" y="3694176"/>
+            <a:ext cx="2578608" cy="315468"/>
+          </a:xfrm>
+          <a:prstGeom prst="rect">
+            <a:avLst/>
+          </a:prstGeom>
+          <a:noFill/>
+          <a:ln/>
+        </p:spPr>
+        <p:txBody>
+          <a:bodyPr wrap="square" lIns="0" tIns="0" rIns="0" bIns="0" rtlCol="0" anchor="t"/>
+          <a:lstStyle/>
+          <a:p>
+            <a:pPr indent="0" marL="0">
+              <a:buNone/>
+            </a:pPr>
+            <a:r>
+              <a:rPr lang="en-US" sz="1350" b="1" dirty="0">
                 <a:solidFill>
                   <a:srgbClr val="1A1A1A"/>
                 </a:solidFill>
@@ -4590,38 +4396,41 @@
                 <a:ea typeface="Arial" pitchFamily="34" charset="-122"/>
                 <a:cs typeface="Arial" pitchFamily="34" charset="-120"/>
               </a:rPr>
-              <a:t>Change my mind</a:t>
-            </a:r>
-            <a:endParaRPr lang="en-US" sz="1550" dirty="0"/>
-          </a:p>
-        </p:txBody>
-      </p:sp>
-      <p:sp>
-        <p:nvSpPr>
-          <p:cNvPr id="27" name="Text 20"/>
-          <p:cNvSpPr/>
-          <p:nvPr/>
-        </p:nvSpPr>
-        <p:spPr>
-          <a:xfrm>
-            <a:off x="4114800" y="5029200"/>
-            <a:ext cx="7498080" cy="457200"/>
-          </a:xfrm>
-          <a:prstGeom prst="rect">
-            <a:avLst/>
-          </a:prstGeom>
-          <a:noFill/>
-          <a:ln/>
-        </p:spPr>
-        <p:txBody>
-          <a:bodyPr wrap="square" lIns="0" tIns="0" rIns="0" bIns="0" rtlCol="0" anchor="ctr"/>
-          <a:lstStyle/>
-          <a:p>
-            <a:pPr indent="0" marL="0">
-              <a:buNone/>
-            </a:pPr>
-            <a:r>
-              <a:rPr lang="en-US" sz="1350" dirty="0">
+              <a:t>④b Background extraction</a:t>
+            </a:r>
+            <a:endParaRPr lang="en-US" sz="1350" dirty="0"/>
+          </a:p>
+        </p:txBody>
+      </p:sp>
+      <p:sp>
+        <p:nvSpPr>
+          <p:cNvPr id="31" name="Text 24"/>
+          <p:cNvSpPr/>
+          <p:nvPr/>
+        </p:nvSpPr>
+        <p:spPr>
+          <a:xfrm>
+            <a:off x="7027164" y="3982212"/>
+            <a:ext cx="2578608" cy="342900"/>
+          </a:xfrm>
+          <a:prstGeom prst="rect">
+            <a:avLst/>
+          </a:prstGeom>
+          <a:noFill/>
+          <a:ln/>
+        </p:spPr>
+        <p:txBody>
+          <a:bodyPr wrap="square" lIns="0" tIns="0" rIns="0" bIns="0" rtlCol="0" anchor="t"/>
+          <a:lstStyle/>
+          <a:p>
+            <a:pPr indent="0" marL="0">
+              <a:lnSpc>
+                <a:spcPct val="105000"/>
+              </a:lnSpc>
+              <a:buNone/>
+            </a:pPr>
+            <a:r>
+              <a:rPr lang="en-US" sz="1050" dirty="0">
                 <a:solidFill>
                   <a:srgbClr val="5F5F5F"/>
                 </a:solidFill>
@@ -4629,7 +4438,152 @@
                 <a:ea typeface="Arial" pitchFamily="34" charset="-122"/>
                 <a:cs typeface="Arial" pitchFamily="34" charset="-120"/>
               </a:rPr>
-              <a:t>“Five bullets now, not three.” Old fact retired, replacement wins.</a:t>
+              <a:t>Post-turn, fire-and-forget</a:t>
+            </a:r>
+            <a:endParaRPr lang="en-US" sz="1050" dirty="0"/>
+          </a:p>
+        </p:txBody>
+      </p:sp>
+      <p:sp>
+        <p:nvSpPr>
+          <p:cNvPr id="32" name="Shape 25"/>
+          <p:cNvSpPr/>
+          <p:nvPr/>
+        </p:nvSpPr>
+        <p:spPr>
+          <a:xfrm>
+            <a:off x="4027932" y="4306824"/>
+            <a:ext cx="292608" cy="201168"/>
+          </a:xfrm>
+          <a:prstGeom prst="downArrow">
+            <a:avLst/>
+          </a:prstGeom>
+          <a:solidFill>
+            <a:srgbClr val="EC0016"/>
+          </a:solidFill>
+          <a:ln/>
+        </p:spPr>
+      </p:sp>
+      <p:sp>
+        <p:nvSpPr>
+          <p:cNvPr id="33" name="Shape 26"/>
+          <p:cNvSpPr/>
+          <p:nvPr/>
+        </p:nvSpPr>
+        <p:spPr>
+          <a:xfrm>
+            <a:off x="7868412" y="4306824"/>
+            <a:ext cx="292608" cy="201168"/>
+          </a:xfrm>
+          <a:prstGeom prst="downArrow">
+            <a:avLst/>
+          </a:prstGeom>
+          <a:solidFill>
+            <a:srgbClr val="EC0016"/>
+          </a:solidFill>
+          <a:ln/>
+        </p:spPr>
+      </p:sp>
+      <p:sp>
+        <p:nvSpPr>
+          <p:cNvPr id="34" name="Shape 27"/>
+          <p:cNvSpPr/>
+          <p:nvPr/>
+        </p:nvSpPr>
+        <p:spPr>
+          <a:xfrm>
+            <a:off x="2436876" y="4507992"/>
+            <a:ext cx="7315200" cy="594360"/>
+          </a:xfrm>
+          <a:prstGeom prst="roundRect">
+            <a:avLst>
+              <a:gd name="adj" fmla="val 12308"/>
+            </a:avLst>
+          </a:prstGeom>
+          <a:solidFill>
+            <a:srgbClr val="0F0F0F"/>
+          </a:solidFill>
+          <a:ln/>
+        </p:spPr>
+      </p:sp>
+      <p:sp>
+        <p:nvSpPr>
+          <p:cNvPr id="35" name="Shape 28"/>
+          <p:cNvSpPr/>
+          <p:nvPr/>
+        </p:nvSpPr>
+        <p:spPr>
+          <a:xfrm>
+            <a:off x="2583180" y="4581144"/>
+            <a:ext cx="448056" cy="448056"/>
+          </a:xfrm>
+          <a:prstGeom prst="ellipse">
+            <a:avLst/>
+          </a:prstGeom>
+          <a:solidFill>
+            <a:srgbClr val="1E1E1E"/>
+          </a:solidFill>
+          <a:ln/>
+        </p:spPr>
+      </p:sp>
+      <p:pic>
+        <p:nvPicPr>
+          <p:cNvPr id="36" name="Image 5" descr="preencoded.png">    </p:cNvPr>
+          <p:cNvPicPr>
+            <a:picLocks noChangeAspect="1"/>
+          </p:cNvPicPr>
+          <p:nvPr/>
+        </p:nvPicPr>
+        <p:blipFill>
+          <a:blip r:embed="rId6"/>
+          <a:stretch>
+            <a:fillRect/>
+          </a:stretch>
+        </p:blipFill>
+        <p:spPr>
+          <a:xfrm>
+            <a:off x="2704155" y="4702119"/>
+            <a:ext cx="206106" cy="206106"/>
+          </a:xfrm>
+          <a:prstGeom prst="rect">
+            <a:avLst/>
+          </a:prstGeom>
+        </p:spPr>
+      </p:pic>
+      <p:sp>
+        <p:nvSpPr>
+          <p:cNvPr id="37" name="Text 29"/>
+          <p:cNvSpPr/>
+          <p:nvPr/>
+        </p:nvSpPr>
+        <p:spPr>
+          <a:xfrm>
+            <a:off x="3177540" y="4581144"/>
+            <a:ext cx="6428232" cy="273406"/>
+          </a:xfrm>
+          <a:prstGeom prst="rect">
+            <a:avLst/>
+          </a:prstGeom>
+          <a:noFill/>
+          <a:ln/>
+        </p:spPr>
+        <p:txBody>
+          <a:bodyPr wrap="square" lIns="0" tIns="0" rIns="0" bIns="0" rtlCol="0" anchor="t"/>
+          <a:lstStyle/>
+          <a:p>
+            <a:pPr indent="0" marL="0">
+              <a:buNone/>
+            </a:pPr>
+            <a:r>
+              <a:rPr lang="en-US" sz="1350" b="1" dirty="0">
+                <a:solidFill>
+                  <a:srgbClr val="FFFFFF"/>
+                </a:solidFill>
+                <a:latin typeface="Arial" pitchFamily="34" charset="0"/>
+                <a:ea typeface="Arial" pitchFamily="34" charset="-122"/>
+                <a:cs typeface="Arial" pitchFamily="34" charset="-120"/>
+              </a:rPr>
+              <a:t>⑤ The write gate</a:t>
             </a:r>
             <a:endParaRPr lang="en-US" sz="1350" dirty="0"/>
           </a:p>
@@ -4637,14 +4591,223 @@
       </p:sp>
       <p:sp>
         <p:nvSpPr>
-          <p:cNvPr id="28" name="Text 21"/>
-          <p:cNvSpPr/>
-          <p:nvPr/>
-        </p:nvSpPr>
-        <p:spPr>
-          <a:xfrm>
-            <a:off x="548640" y="6035040"/>
-            <a:ext cx="10972800" cy="365760"/>
+          <p:cNvPr id="38" name="Text 30"/>
+          <p:cNvSpPr/>
+          <p:nvPr/>
+        </p:nvSpPr>
+        <p:spPr>
+          <a:xfrm>
+            <a:off x="3177540" y="4830775"/>
+            <a:ext cx="6428232" cy="297180"/>
+          </a:xfrm>
+          <a:prstGeom prst="rect">
+            <a:avLst/>
+          </a:prstGeom>
+          <a:noFill/>
+          <a:ln/>
+        </p:spPr>
+        <p:txBody>
+          <a:bodyPr wrap="square" lIns="0" tIns="0" rIns="0" bIns="0" rtlCol="0" anchor="t"/>
+          <a:lstStyle/>
+          <a:p>
+            <a:pPr indent="0" marL="0">
+              <a:lnSpc>
+                <a:spcPct val="105000"/>
+              </a:lnSpc>
+              <a:buNone/>
+            </a:pPr>
+            <a:r>
+              <a:rPr lang="en-US" sz="1050" dirty="0">
+                <a:solidFill>
+                  <a:srgbClr val="D9D9D9"/>
+                </a:solidFill>
+                <a:latin typeface="Arial" pitchFamily="34" charset="0"/>
+                <a:ea typeface="Arial" pitchFamily="34" charset="-122"/>
+                <a:cs typeface="Arial" pitchFamily="34" charset="-120"/>
+              </a:rPr>
+              <a:t>Dedup → similarity tiers → small-model decide</a:t>
+            </a:r>
+            <a:endParaRPr lang="en-US" sz="1050" dirty="0"/>
+          </a:p>
+        </p:txBody>
+      </p:sp>
+      <p:sp>
+        <p:nvSpPr>
+          <p:cNvPr id="39" name="Shape 31"/>
+          <p:cNvSpPr/>
+          <p:nvPr/>
+        </p:nvSpPr>
+        <p:spPr>
+          <a:xfrm>
+            <a:off x="5948172" y="5102352"/>
+            <a:ext cx="292608" cy="201168"/>
+          </a:xfrm>
+          <a:prstGeom prst="downArrow">
+            <a:avLst/>
+          </a:prstGeom>
+          <a:solidFill>
+            <a:srgbClr val="EC0016"/>
+          </a:solidFill>
+          <a:ln/>
+        </p:spPr>
+      </p:sp>
+      <p:sp>
+        <p:nvSpPr>
+          <p:cNvPr id="40" name="Shape 32"/>
+          <p:cNvSpPr/>
+          <p:nvPr/>
+        </p:nvSpPr>
+        <p:spPr>
+          <a:xfrm>
+            <a:off x="2436876" y="5303520"/>
+            <a:ext cx="7315200" cy="502920"/>
+          </a:xfrm>
+          <a:prstGeom prst="roundRect">
+            <a:avLst>
+              <a:gd name="adj" fmla="val 14545"/>
+            </a:avLst>
+          </a:prstGeom>
+          <a:solidFill>
+            <a:srgbClr val="0F0F0F"/>
+          </a:solidFill>
+          <a:ln/>
+        </p:spPr>
+      </p:sp>
+      <p:sp>
+        <p:nvSpPr>
+          <p:cNvPr id="41" name="Shape 33"/>
+          <p:cNvSpPr/>
+          <p:nvPr/>
+        </p:nvSpPr>
+        <p:spPr>
+          <a:xfrm>
+            <a:off x="2583180" y="5376672"/>
+            <a:ext cx="356616" cy="356616"/>
+          </a:xfrm>
+          <a:prstGeom prst="ellipse">
+            <a:avLst/>
+          </a:prstGeom>
+          <a:solidFill>
+            <a:srgbClr val="1E1E1E"/>
+          </a:solidFill>
+          <a:ln/>
+        </p:spPr>
+      </p:sp>
+      <p:pic>
+        <p:nvPicPr>
+          <p:cNvPr id="42" name="Image 6" descr="preencoded.png">    </p:cNvPr>
+          <p:cNvPicPr>
+            <a:picLocks noChangeAspect="1"/>
+          </p:cNvPicPr>
+          <p:nvPr/>
+        </p:nvPicPr>
+        <p:blipFill>
+          <a:blip r:embed="rId7"/>
+          <a:stretch>
+            <a:fillRect/>
+          </a:stretch>
+        </p:blipFill>
+        <p:spPr>
+          <a:xfrm>
+            <a:off x="2679466" y="5472958"/>
+            <a:ext cx="164043" cy="164043"/>
+          </a:xfrm>
+          <a:prstGeom prst="rect">
+            <a:avLst/>
+          </a:prstGeom>
+        </p:spPr>
+      </p:pic>
+      <p:sp>
+        <p:nvSpPr>
+          <p:cNvPr id="43" name="Text 34"/>
+          <p:cNvSpPr/>
+          <p:nvPr/>
+        </p:nvSpPr>
+        <p:spPr>
+          <a:xfrm>
+            <a:off x="3086100" y="5376672"/>
+            <a:ext cx="6519672" cy="231343"/>
+          </a:xfrm>
+          <a:prstGeom prst="rect">
+            <a:avLst/>
+          </a:prstGeom>
+          <a:noFill/>
+          <a:ln/>
+        </p:spPr>
+        <p:txBody>
+          <a:bodyPr wrap="square" lIns="0" tIns="0" rIns="0" bIns="0" rtlCol="0" anchor="t"/>
+          <a:lstStyle/>
+          <a:p>
+            <a:pPr indent="0" marL="0">
+              <a:buNone/>
+            </a:pPr>
+            <a:r>
+              <a:rPr lang="en-US" sz="1350" b="1" dirty="0">
+                <a:solidFill>
+                  <a:srgbClr val="FFFFFF"/>
+                </a:solidFill>
+                <a:latin typeface="Arial" pitchFamily="34" charset="0"/>
+                <a:ea typeface="Arial" pitchFamily="34" charset="-122"/>
+                <a:cs typeface="Arial" pitchFamily="34" charset="-120"/>
+              </a:rPr>
+              <a:t>⑥ Postgres</a:t>
+            </a:r>
+            <a:endParaRPr lang="en-US" sz="1350" dirty="0"/>
+          </a:p>
+        </p:txBody>
+      </p:sp>
+      <p:sp>
+        <p:nvSpPr>
+          <p:cNvPr id="44" name="Text 35"/>
+          <p:cNvSpPr/>
+          <p:nvPr/>
+        </p:nvSpPr>
+        <p:spPr>
+          <a:xfrm>
+            <a:off x="3086100" y="5587898"/>
+            <a:ext cx="6519672" cy="251460"/>
+          </a:xfrm>
+          <a:prstGeom prst="rect">
+            <a:avLst/>
+          </a:prstGeom>
+          <a:noFill/>
+          <a:ln/>
+        </p:spPr>
+        <p:txBody>
+          <a:bodyPr wrap="square" lIns="0" tIns="0" rIns="0" bIns="0" rtlCol="0" anchor="t"/>
+          <a:lstStyle/>
+          <a:p>
+            <a:pPr indent="0" marL="0">
+              <a:lnSpc>
+                <a:spcPct val="105000"/>
+              </a:lnSpc>
+              <a:buNone/>
+            </a:pPr>
+            <a:r>
+              <a:rPr lang="en-US" sz="1050" dirty="0">
+                <a:solidFill>
+                  <a:srgbClr val="D9D9D9"/>
+                </a:solidFill>
+                <a:latin typeface="Arial" pitchFamily="34" charset="0"/>
+                <a:ea typeface="Arial" pitchFamily="34" charset="-122"/>
+                <a:cs typeface="Arial" pitchFamily="34" charset="-120"/>
+              </a:rPr>
+              <a:t>Add the new fact, or supersede the old one</a:t>
+            </a:r>
+            <a:endParaRPr lang="en-US" sz="1050" dirty="0"/>
+          </a:p>
+        </p:txBody>
+      </p:sp>
+      <p:sp>
+        <p:nvSpPr>
+          <p:cNvPr id="45" name="Text 36"/>
+          <p:cNvSpPr/>
+          <p:nvPr/>
+        </p:nvSpPr>
+        <p:spPr>
+          <a:xfrm>
+            <a:off x="548640" y="5943600"/>
+            <a:ext cx="11064240" cy="365760"/>
           </a:xfrm>
           <a:prstGeom prst="rect">
             <a:avLst/>
@@ -4668,7 +4831,7 @@
                 <a:ea typeface="Arial" pitchFamily="34" charset="-122"/>
                 <a:cs typeface="Arial" pitchFamily="34" charset="-120"/>
               </a:rPr>
-              <a:t>Everything is the real system on the dev pod — live database, no mocks.</a:t>
+              <a:t>Append-only + supersede chain: nothing is ever silently overwritten, and “forget this user” is one call.</a:t>
             </a:r>
             <a:endParaRPr lang="en-US" sz="1250" dirty="0"/>
           </a:p>
@@ -4715,7 +4878,7 @@
         <p:spPr>
           <a:xfrm>
             <a:off x="548640" y="457200"/>
-            <a:ext cx="11064240" cy="640080"/>
+            <a:ext cx="11064240" cy="548640"/>
           </a:xfrm>
           <a:prstGeom prst="rect">
             <a:avLst/>
@@ -4739,7 +4902,7 @@
                 <a:ea typeface="Arial" pitchFamily="34" charset="-122"/>
                 <a:cs typeface="Arial" pitchFamily="34" charset="-120"/>
               </a:rPr>
-              <a:t>Where it stands</a:t>
+              <a:t>The data model — and why it's safe</a:t>
             </a:r>
             <a:endParaRPr lang="en-US" sz="3000" dirty="0"/>
           </a:p>
@@ -4753,8 +4916,8 @@
         </p:nvSpPr>
         <p:spPr>
           <a:xfrm>
-            <a:off x="548640" y="1325880"/>
-            <a:ext cx="5486400" cy="320040"/>
+            <a:off x="548640" y="1234440"/>
+            <a:ext cx="3657600" cy="274320"/>
           </a:xfrm>
           <a:prstGeom prst="rect">
             <a:avLst/>
@@ -4770,7 +4933,7 @@
               <a:buNone/>
             </a:pPr>
             <a:r>
-              <a:rPr lang="en-US" sz="1200" b="1" spc="200" kern="0" dirty="0">
+              <a:rPr lang="en-US" sz="1200" b="1" spc="300" kern="0" dirty="0">
                 <a:solidFill>
                   <a:srgbClr val="EC0016"/>
                 </a:solidFill>
@@ -4778,7 +4941,7 @@
                 <a:ea typeface="Arial" pitchFamily="34" charset="-122"/>
                 <a:cs typeface="Arial" pitchFamily="34" charset="-120"/>
               </a:rPr>
-              <a:t>REVIEW FEEDBACK → IMPLEMENTED</a:t>
+              <a:t>THE DATA MODEL</a:t>
             </a:r>
             <a:endParaRPr lang="en-US" sz="1200" dirty="0"/>
           </a:p>
@@ -4792,8 +4955,529 @@
         </p:nvSpPr>
         <p:spPr>
           <a:xfrm>
-            <a:off x="548640" y="1783080"/>
-            <a:ext cx="384048" cy="384048"/>
+            <a:off x="548640" y="1554480"/>
+            <a:ext cx="5394960" cy="1783080"/>
+          </a:xfrm>
+          <a:prstGeom prst="roundRect">
+            <a:avLst>
+              <a:gd name="adj" fmla="val 4103"/>
+            </a:avLst>
+          </a:prstGeom>
+          <a:solidFill>
+            <a:srgbClr val="F4F4F4"/>
+          </a:solidFill>
+          <a:ln/>
+        </p:spPr>
+      </p:sp>
+      <p:sp>
+        <p:nvSpPr>
+          <p:cNvPr id="5" name="Text 3"/>
+          <p:cNvSpPr/>
+          <p:nvPr/>
+        </p:nvSpPr>
+        <p:spPr>
+          <a:xfrm>
+            <a:off x="777240" y="1691640"/>
+            <a:ext cx="4937760" cy="320040"/>
+          </a:xfrm>
+          <a:prstGeom prst="rect">
+            <a:avLst/>
+          </a:prstGeom>
+          <a:noFill/>
+          <a:ln/>
+        </p:spPr>
+        <p:txBody>
+          <a:bodyPr wrap="square" lIns="0" tIns="0" rIns="0" bIns="0" rtlCol="0" anchor="ctr"/>
+          <a:lstStyle/>
+          <a:p>
+            <a:pPr indent="0" marL="0">
+              <a:buNone/>
+            </a:pPr>
+            <a:r>
+              <a:rPr lang="en-US" sz="1500" b="1" dirty="0">
+                <a:solidFill>
+                  <a:srgbClr val="1A1A1A"/>
+                </a:solidFill>
+                <a:latin typeface="Arial" pitchFamily="34" charset="0"/>
+                <a:ea typeface="Arial" pitchFamily="34" charset="-122"/>
+                <a:cs typeface="Arial" pitchFamily="34" charset="-120"/>
+              </a:rPr>
+              <a:t>agent_memory_entries</a:t>
+            </a:r>
+            <a:endParaRPr lang="en-US" sz="1500" dirty="0"/>
+          </a:p>
+        </p:txBody>
+      </p:sp>
+      <p:sp>
+        <p:nvSpPr>
+          <p:cNvPr id="6" name="Text 4"/>
+          <p:cNvSpPr/>
+          <p:nvPr/>
+        </p:nvSpPr>
+        <p:spPr>
+          <a:xfrm>
+            <a:off x="868680" y="2084832"/>
+            <a:ext cx="4846320" cy="274320"/>
+          </a:xfrm>
+          <a:prstGeom prst="rect">
+            <a:avLst/>
+          </a:prstGeom>
+          <a:noFill/>
+          <a:ln/>
+        </p:spPr>
+        <p:txBody>
+          <a:bodyPr wrap="square" lIns="0" tIns="0" rIns="0" bIns="0" rtlCol="0" anchor="ctr"/>
+          <a:lstStyle/>
+          <a:p>
+            <a:pPr indent="0" marL="0">
+              <a:buNone/>
+            </a:pPr>
+            <a:r>
+              <a:rPr lang="en-US" sz="1100" dirty="0">
+                <a:solidFill>
+                  <a:srgbClr val="5F5F5F"/>
+                </a:solidFill>
+                <a:latin typeface="Arial" pitchFamily="34" charset="0"/>
+                <a:ea typeface="Arial" pitchFamily="34" charset="-122"/>
+                <a:cs typeface="Arial" pitchFamily="34" charset="-120"/>
+              </a:rPr>
+              <a:t>Scope — profile_id · user_id · tenant_id</a:t>
+            </a:r>
+            <a:endParaRPr lang="en-US" sz="1100" dirty="0"/>
+          </a:p>
+        </p:txBody>
+      </p:sp>
+      <p:sp>
+        <p:nvSpPr>
+          <p:cNvPr id="7" name="Text 5"/>
+          <p:cNvSpPr/>
+          <p:nvPr/>
+        </p:nvSpPr>
+        <p:spPr>
+          <a:xfrm>
+            <a:off x="868680" y="2377440"/>
+            <a:ext cx="4846320" cy="274320"/>
+          </a:xfrm>
+          <a:prstGeom prst="rect">
+            <a:avLst/>
+          </a:prstGeom>
+          <a:noFill/>
+          <a:ln/>
+        </p:spPr>
+        <p:txBody>
+          <a:bodyPr wrap="square" lIns="0" tIns="0" rIns="0" bIns="0" rtlCol="0" anchor="ctr"/>
+          <a:lstStyle/>
+          <a:p>
+            <a:pPr indent="0" marL="0">
+              <a:buNone/>
+            </a:pPr>
+            <a:r>
+              <a:rPr lang="en-US" sz="1100" dirty="0">
+                <a:solidFill>
+                  <a:srgbClr val="5F5F5F"/>
+                </a:solidFill>
+                <a:latin typeface="Arial" pitchFamily="34" charset="0"/>
+                <a:ea typeface="Arial" pitchFamily="34" charset="-122"/>
+                <a:cs typeface="Arial" pitchFamily="34" charset="-120"/>
+              </a:rPr>
+              <a:t>Content — content · category · source</a:t>
+            </a:r>
+            <a:endParaRPr lang="en-US" sz="1100" dirty="0"/>
+          </a:p>
+        </p:txBody>
+      </p:sp>
+      <p:sp>
+        <p:nvSpPr>
+          <p:cNvPr id="8" name="Text 6"/>
+          <p:cNvSpPr/>
+          <p:nvPr/>
+        </p:nvSpPr>
+        <p:spPr>
+          <a:xfrm>
+            <a:off x="868680" y="2670048"/>
+            <a:ext cx="4846320" cy="274320"/>
+          </a:xfrm>
+          <a:prstGeom prst="rect">
+            <a:avLst/>
+          </a:prstGeom>
+          <a:noFill/>
+          <a:ln/>
+        </p:spPr>
+        <p:txBody>
+          <a:bodyPr wrap="square" lIns="0" tIns="0" rIns="0" bIns="0" rtlCol="0" anchor="ctr"/>
+          <a:lstStyle/>
+          <a:p>
+            <a:pPr indent="0" marL="0">
+              <a:buNone/>
+            </a:pPr>
+            <a:r>
+              <a:rPr lang="en-US" sz="1100" dirty="0">
+                <a:solidFill>
+                  <a:srgbClr val="5F5F5F"/>
+                </a:solidFill>
+                <a:latin typeface="Arial" pitchFamily="34" charset="0"/>
+                <a:ea typeface="Arial" pitchFamily="34" charset="-122"/>
+                <a:cs typeface="Arial" pitchFamily="34" charset="-120"/>
+              </a:rPr>
+              <a:t>Semantic — embedding: vector(1536), pgvector</a:t>
+            </a:r>
+            <a:endParaRPr lang="en-US" sz="1100" dirty="0"/>
+          </a:p>
+        </p:txBody>
+      </p:sp>
+      <p:sp>
+        <p:nvSpPr>
+          <p:cNvPr id="9" name="Text 7"/>
+          <p:cNvSpPr/>
+          <p:nvPr/>
+        </p:nvSpPr>
+        <p:spPr>
+          <a:xfrm>
+            <a:off x="868680" y="2962656"/>
+            <a:ext cx="4846320" cy="274320"/>
+          </a:xfrm>
+          <a:prstGeom prst="rect">
+            <a:avLst/>
+          </a:prstGeom>
+          <a:noFill/>
+          <a:ln/>
+        </p:spPr>
+        <p:txBody>
+          <a:bodyPr wrap="square" lIns="0" tIns="0" rIns="0" bIns="0" rtlCol="0" anchor="ctr"/>
+          <a:lstStyle/>
+          <a:p>
+            <a:pPr indent="0" marL="0">
+              <a:buNone/>
+            </a:pPr>
+            <a:r>
+              <a:rPr lang="en-US" sz="1100" dirty="0">
+                <a:solidFill>
+                  <a:srgbClr val="5F5F5F"/>
+                </a:solidFill>
+                <a:latin typeface="Arial" pitchFamily="34" charset="0"/>
+                <a:ea typeface="Arial" pitchFamily="34" charset="-122"/>
+                <a:cs typeface="Arial" pitchFamily="34" charset="-120"/>
+              </a:rPr>
+              <a:t>Lifecycle — superseded_by · observed_at · discarded_at</a:t>
+            </a:r>
+            <a:endParaRPr lang="en-US" sz="1100" dirty="0"/>
+          </a:p>
+        </p:txBody>
+      </p:sp>
+      <p:sp>
+        <p:nvSpPr>
+          <p:cNvPr id="10" name="Shape 8"/>
+          <p:cNvSpPr/>
+          <p:nvPr/>
+        </p:nvSpPr>
+        <p:spPr>
+          <a:xfrm>
+            <a:off x="548640" y="3566160"/>
+            <a:ext cx="1554480" cy="502920"/>
+          </a:xfrm>
+          <a:prstGeom prst="roundRect">
+            <a:avLst>
+              <a:gd name="adj" fmla="val 14545"/>
+            </a:avLst>
+          </a:prstGeom>
+          <a:solidFill>
+            <a:srgbClr val="E5E5E5"/>
+          </a:solidFill>
+          <a:ln/>
+        </p:spPr>
+      </p:sp>
+      <p:sp>
+        <p:nvSpPr>
+          <p:cNvPr id="11" name="Text 9"/>
+          <p:cNvSpPr/>
+          <p:nvPr/>
+        </p:nvSpPr>
+        <p:spPr>
+          <a:xfrm>
+            <a:off x="621792" y="3621024"/>
+            <a:ext cx="1408176" cy="393192"/>
+          </a:xfrm>
+          <a:prstGeom prst="rect">
+            <a:avLst/>
+          </a:prstGeom>
+          <a:noFill/>
+          <a:ln/>
+        </p:spPr>
+        <p:txBody>
+          <a:bodyPr wrap="square" lIns="0" tIns="0" rIns="0" bIns="0" rtlCol="0" anchor="ctr"/>
+          <a:lstStyle/>
+          <a:p>
+            <a:pPr algn="ctr" indent="0" marL="0">
+              <a:buNone/>
+            </a:pPr>
+            <a:r>
+              <a:rPr lang="en-US" sz="1250" b="1" dirty="0">
+                <a:solidFill>
+                  <a:srgbClr val="5F5F5F"/>
+                </a:solidFill>
+                <a:latin typeface="Arial" pitchFamily="34" charset="0"/>
+                <a:ea typeface="Arial" pitchFamily="34" charset="-122"/>
+                <a:cs typeface="Arial" pitchFamily="34" charset="-120"/>
+              </a:rPr>
+              <a:t>v1 (retired)</a:t>
+            </a:r>
+            <a:endParaRPr lang="en-US" sz="1250" dirty="0"/>
+          </a:p>
+        </p:txBody>
+      </p:sp>
+      <p:sp>
+        <p:nvSpPr>
+          <p:cNvPr id="12" name="Shape 10"/>
+          <p:cNvSpPr/>
+          <p:nvPr/>
+        </p:nvSpPr>
+        <p:spPr>
+          <a:xfrm>
+            <a:off x="2130552" y="3735324"/>
+            <a:ext cx="265176" cy="164592"/>
+          </a:xfrm>
+          <a:prstGeom prst="rightArrow">
+            <a:avLst/>
+          </a:prstGeom>
+          <a:solidFill>
+            <a:srgbClr val="EC0016"/>
+          </a:solidFill>
+          <a:ln/>
+        </p:spPr>
+      </p:sp>
+      <p:sp>
+        <p:nvSpPr>
+          <p:cNvPr id="13" name="Shape 11"/>
+          <p:cNvSpPr/>
+          <p:nvPr/>
+        </p:nvSpPr>
+        <p:spPr>
+          <a:xfrm>
+            <a:off x="2423160" y="3566160"/>
+            <a:ext cx="1554480" cy="502920"/>
+          </a:xfrm>
+          <a:prstGeom prst="roundRect">
+            <a:avLst>
+              <a:gd name="adj" fmla="val 14545"/>
+            </a:avLst>
+          </a:prstGeom>
+          <a:solidFill>
+            <a:srgbClr val="E5E5E5"/>
+          </a:solidFill>
+          <a:ln/>
+        </p:spPr>
+      </p:sp>
+      <p:sp>
+        <p:nvSpPr>
+          <p:cNvPr id="14" name="Text 12"/>
+          <p:cNvSpPr/>
+          <p:nvPr/>
+        </p:nvSpPr>
+        <p:spPr>
+          <a:xfrm>
+            <a:off x="2496312" y="3621024"/>
+            <a:ext cx="1408176" cy="393192"/>
+          </a:xfrm>
+          <a:prstGeom prst="rect">
+            <a:avLst/>
+          </a:prstGeom>
+          <a:noFill/>
+          <a:ln/>
+        </p:spPr>
+        <p:txBody>
+          <a:bodyPr wrap="square" lIns="0" tIns="0" rIns="0" bIns="0" rtlCol="0" anchor="ctr"/>
+          <a:lstStyle/>
+          <a:p>
+            <a:pPr algn="ctr" indent="0" marL="0">
+              <a:buNone/>
+            </a:pPr>
+            <a:r>
+              <a:rPr lang="en-US" sz="1250" b="1" dirty="0">
+                <a:solidFill>
+                  <a:srgbClr val="5F5F5F"/>
+                </a:solidFill>
+                <a:latin typeface="Arial" pitchFamily="34" charset="0"/>
+                <a:ea typeface="Arial" pitchFamily="34" charset="-122"/>
+                <a:cs typeface="Arial" pitchFamily="34" charset="-120"/>
+              </a:rPr>
+              <a:t>v2 (retired)</a:t>
+            </a:r>
+            <a:endParaRPr lang="en-US" sz="1250" dirty="0"/>
+          </a:p>
+        </p:txBody>
+      </p:sp>
+      <p:sp>
+        <p:nvSpPr>
+          <p:cNvPr id="15" name="Shape 13"/>
+          <p:cNvSpPr/>
+          <p:nvPr/>
+        </p:nvSpPr>
+        <p:spPr>
+          <a:xfrm>
+            <a:off x="4005072" y="3735324"/>
+            <a:ext cx="265176" cy="164592"/>
+          </a:xfrm>
+          <a:prstGeom prst="rightArrow">
+            <a:avLst/>
+          </a:prstGeom>
+          <a:solidFill>
+            <a:srgbClr val="EC0016"/>
+          </a:solidFill>
+          <a:ln/>
+        </p:spPr>
+      </p:sp>
+      <p:sp>
+        <p:nvSpPr>
+          <p:cNvPr id="16" name="Shape 14"/>
+          <p:cNvSpPr/>
+          <p:nvPr/>
+        </p:nvSpPr>
+        <p:spPr>
+          <a:xfrm>
+            <a:off x="4297680" y="3566160"/>
+            <a:ext cx="1554480" cy="502920"/>
+          </a:xfrm>
+          <a:prstGeom prst="roundRect">
+            <a:avLst>
+              <a:gd name="adj" fmla="val 14545"/>
+            </a:avLst>
+          </a:prstGeom>
+          <a:solidFill>
+            <a:srgbClr val="EC0016"/>
+          </a:solidFill>
+          <a:ln/>
+        </p:spPr>
+      </p:sp>
+      <p:sp>
+        <p:nvSpPr>
+          <p:cNvPr id="17" name="Text 15"/>
+          <p:cNvSpPr/>
+          <p:nvPr/>
+        </p:nvSpPr>
+        <p:spPr>
+          <a:xfrm>
+            <a:off x="4370832" y="3621024"/>
+            <a:ext cx="1408176" cy="393192"/>
+          </a:xfrm>
+          <a:prstGeom prst="rect">
+            <a:avLst/>
+          </a:prstGeom>
+          <a:noFill/>
+          <a:ln/>
+        </p:spPr>
+        <p:txBody>
+          <a:bodyPr wrap="square" lIns="0" tIns="0" rIns="0" bIns="0" rtlCol="0" anchor="ctr"/>
+          <a:lstStyle/>
+          <a:p>
+            <a:pPr algn="ctr" indent="0" marL="0">
+              <a:buNone/>
+            </a:pPr>
+            <a:r>
+              <a:rPr lang="en-US" sz="1250" b="1" dirty="0">
+                <a:solidFill>
+                  <a:srgbClr val="FFFFFF"/>
+                </a:solidFill>
+                <a:latin typeface="Arial" pitchFamily="34" charset="0"/>
+                <a:ea typeface="Arial" pitchFamily="34" charset="-122"/>
+                <a:cs typeface="Arial" pitchFamily="34" charset="-120"/>
+              </a:rPr>
+              <a:t>v3 (current)</a:t>
+            </a:r>
+            <a:endParaRPr lang="en-US" sz="1250" dirty="0"/>
+          </a:p>
+        </p:txBody>
+      </p:sp>
+      <p:sp>
+        <p:nvSpPr>
+          <p:cNvPr id="18" name="Text 16"/>
+          <p:cNvSpPr/>
+          <p:nvPr/>
+        </p:nvSpPr>
+        <p:spPr>
+          <a:xfrm>
+            <a:off x="548640" y="4233672"/>
+            <a:ext cx="5394960" cy="457200"/>
+          </a:xfrm>
+          <a:prstGeom prst="rect">
+            <a:avLst/>
+          </a:prstGeom>
+          <a:noFill/>
+          <a:ln/>
+        </p:spPr>
+        <p:txBody>
+          <a:bodyPr wrap="square" lIns="0" tIns="0" rIns="0" bIns="0" rtlCol="0" anchor="ctr"/>
+          <a:lstStyle/>
+          <a:p>
+            <a:pPr indent="0" marL="0">
+              <a:lnSpc>
+                <a:spcPct val="110000"/>
+              </a:lnSpc>
+              <a:buNone/>
+            </a:pPr>
+            <a:r>
+              <a:rPr lang="en-US" sz="1100" i="1" dirty="0">
+                <a:solidFill>
+                  <a:srgbClr val="5F5F5F"/>
+                </a:solidFill>
+                <a:latin typeface="Arial" pitchFamily="34" charset="0"/>
+                <a:ea typeface="Arial" pitchFamily="34" charset="-122"/>
+                <a:cs typeface="Arial" pitchFamily="34" charset="-120"/>
+              </a:rPr>
+              <a:t>Contradiction retires the old row; the chain is the audit trail — nothing is deleted.</a:t>
+            </a:r>
+            <a:endParaRPr lang="en-US" sz="1100" dirty="0"/>
+          </a:p>
+        </p:txBody>
+      </p:sp>
+      <p:sp>
+        <p:nvSpPr>
+          <p:cNvPr id="19" name="Text 17"/>
+          <p:cNvSpPr/>
+          <p:nvPr/>
+        </p:nvSpPr>
+        <p:spPr>
+          <a:xfrm>
+            <a:off x="6309360" y="1234440"/>
+            <a:ext cx="4572000" cy="274320"/>
+          </a:xfrm>
+          <a:prstGeom prst="rect">
+            <a:avLst/>
+          </a:prstGeom>
+          <a:noFill/>
+          <a:ln/>
+        </p:spPr>
+        <p:txBody>
+          <a:bodyPr wrap="square" rtlCol="0" anchor="ctr"/>
+          <a:lstStyle/>
+          <a:p>
+            <a:pPr indent="0" marL="0">
+              <a:buNone/>
+            </a:pPr>
+            <a:r>
+              <a:rPr lang="en-US" sz="1200" b="1" spc="300" kern="0" dirty="0">
+                <a:solidFill>
+                  <a:srgbClr val="EC0016"/>
+                </a:solidFill>
+                <a:latin typeface="Arial" pitchFamily="34" charset="0"/>
+                <a:ea typeface="Arial" pitchFamily="34" charset="-122"/>
+                <a:cs typeface="Arial" pitchFamily="34" charset="-120"/>
+              </a:rPr>
+              <a:t>SAFETY GUARANTEES</a:t>
+            </a:r>
+            <a:endParaRPr lang="en-US" sz="1200" dirty="0"/>
+          </a:p>
+        </p:txBody>
+      </p:sp>
+      <p:sp>
+        <p:nvSpPr>
+          <p:cNvPr id="20" name="Shape 18"/>
+          <p:cNvSpPr/>
+          <p:nvPr/>
+        </p:nvSpPr>
+        <p:spPr>
+          <a:xfrm>
+            <a:off x="6309360" y="1600200"/>
+            <a:ext cx="420624" cy="420624"/>
           </a:xfrm>
           <a:prstGeom prst="ellipse">
             <a:avLst/>
@@ -4806,7 +5490,7 @@
       </p:sp>
       <p:pic>
         <p:nvPicPr>
-          <p:cNvPr id="5" name="Image 0" descr="preencoded.png">    </p:cNvPr>
+          <p:cNvPr id="21" name="Image 0" descr="preencoded.png">    </p:cNvPr>
           <p:cNvPicPr>
             <a:picLocks noChangeAspect="1"/>
           </p:cNvPicPr>
@@ -4820,8 +5504,8 @@
         </p:blipFill>
         <p:spPr>
           <a:xfrm>
-            <a:off x="652333" y="1886773"/>
-            <a:ext cx="176662" cy="176662"/>
+            <a:off x="6422928" y="1713768"/>
+            <a:ext cx="193487" cy="193487"/>
           </a:xfrm>
           <a:prstGeom prst="rect">
             <a:avLst/>
@@ -4830,14 +5514,53 @@
       </p:pic>
       <p:sp>
         <p:nvSpPr>
-          <p:cNvPr id="6" name="Text 3"/>
-          <p:cNvSpPr/>
-          <p:nvPr/>
-        </p:nvSpPr>
-        <p:spPr>
-          <a:xfrm>
-            <a:off x="1115568" y="1792224"/>
-            <a:ext cx="5120640" cy="594360"/>
+          <p:cNvPr id="22" name="Text 19"/>
+          <p:cNvSpPr/>
+          <p:nvPr/>
+        </p:nvSpPr>
+        <p:spPr>
+          <a:xfrm>
+            <a:off x="6894576" y="1600200"/>
+            <a:ext cx="4572000" cy="320040"/>
+          </a:xfrm>
+          <a:prstGeom prst="rect">
+            <a:avLst/>
+          </a:prstGeom>
+          <a:noFill/>
+          <a:ln/>
+        </p:spPr>
+        <p:txBody>
+          <a:bodyPr wrap="square" lIns="0" tIns="0" rIns="0" bIns="0" rtlCol="0" anchor="ctr"/>
+          <a:lstStyle/>
+          <a:p>
+            <a:pPr indent="0" marL="0">
+              <a:buNone/>
+            </a:pPr>
+            <a:r>
+              <a:rPr lang="en-US" sz="1350" b="1" dirty="0">
+                <a:solidFill>
+                  <a:srgbClr val="1A1A1A"/>
+                </a:solidFill>
+                <a:latin typeface="Arial" pitchFamily="34" charset="0"/>
+                <a:ea typeface="Arial" pitchFamily="34" charset="-122"/>
+                <a:cs typeface="Arial" pitchFamily="34" charset="-120"/>
+              </a:rPr>
+              <a:t>Off by default</a:t>
+            </a:r>
+            <a:endParaRPr lang="en-US" sz="1350" dirty="0"/>
+          </a:p>
+        </p:txBody>
+      </p:sp>
+      <p:sp>
+        <p:nvSpPr>
+          <p:cNvPr id="23" name="Text 20"/>
+          <p:cNvSpPr/>
+          <p:nvPr/>
+        </p:nvSpPr>
+        <p:spPr>
+          <a:xfrm>
+            <a:off x="6894576" y="1929384"/>
+            <a:ext cx="4572000" cy="411480"/>
           </a:xfrm>
           <a:prstGeom prst="rect">
             <a:avLst/>
@@ -4856,30 +5579,30 @@
               <a:buNone/>
             </a:pPr>
             <a:r>
-              <a:rPr lang="en-US" sz="1350" dirty="0">
-                <a:solidFill>
-                  <a:srgbClr val="1A1A1A"/>
-                </a:solidFill>
-                <a:latin typeface="Arial" pitchFamily="34" charset="0"/>
-                <a:ea typeface="Arial" pitchFamily="34" charset="-122"/>
-                <a:cs typeface="Arial" pitchFamily="34" charset="-120"/>
-              </a:rPr>
-              <a:t>Re-based onto current dev in a fresh branch</a:t>
-            </a:r>
-            <a:endParaRPr lang="en-US" sz="1350" dirty="0"/>
-          </a:p>
-        </p:txBody>
-      </p:sp>
-      <p:sp>
-        <p:nvSpPr>
-          <p:cNvPr id="7" name="Shape 4"/>
-          <p:cNvSpPr/>
-          <p:nvPr/>
-        </p:nvSpPr>
-        <p:spPr>
-          <a:xfrm>
-            <a:off x="548640" y="2587752"/>
-            <a:ext cx="384048" cy="384048"/>
+              <a:rPr lang="en-US" sz="1050" dirty="0">
+                <a:solidFill>
+                  <a:srgbClr val="5F5F5F"/>
+                </a:solidFill>
+                <a:latin typeface="Arial" pitchFamily="34" charset="0"/>
+                <a:ea typeface="Arial" pitchFamily="34" charset="-122"/>
+                <a:cs typeface="Arial" pitchFamily="34" charset="-120"/>
+              </a:rPr>
+              <a:t>A test fails the build if any real profile enables it</a:t>
+            </a:r>
+            <a:endParaRPr lang="en-US" sz="1050" dirty="0"/>
+          </a:p>
+        </p:txBody>
+      </p:sp>
+      <p:sp>
+        <p:nvSpPr>
+          <p:cNvPr id="24" name="Shape 21"/>
+          <p:cNvSpPr/>
+          <p:nvPr/>
+        </p:nvSpPr>
+        <p:spPr>
+          <a:xfrm>
+            <a:off x="6309360" y="2350008"/>
+            <a:ext cx="420624" cy="420624"/>
           </a:xfrm>
           <a:prstGeom prst="ellipse">
             <a:avLst/>
@@ -4892,7 +5615,7 @@
       </p:sp>
       <p:pic>
         <p:nvPicPr>
-          <p:cNvPr id="8" name="Image 1" descr="preencoded.png">    </p:cNvPr>
+          <p:cNvPr id="25" name="Image 1" descr="preencoded.png">    </p:cNvPr>
           <p:cNvPicPr>
             <a:picLocks noChangeAspect="1"/>
           </p:cNvPicPr>
@@ -4906,8 +5629,8 @@
         </p:blipFill>
         <p:spPr>
           <a:xfrm>
-            <a:off x="652333" y="2691445"/>
-            <a:ext cx="176662" cy="176662"/>
+            <a:off x="6422928" y="2463576"/>
+            <a:ext cx="193487" cy="193487"/>
           </a:xfrm>
           <a:prstGeom prst="rect">
             <a:avLst/>
@@ -4916,14 +5639,53 @@
       </p:pic>
       <p:sp>
         <p:nvSpPr>
-          <p:cNvPr id="9" name="Text 5"/>
-          <p:cNvSpPr/>
-          <p:nvPr/>
-        </p:nvSpPr>
-        <p:spPr>
-          <a:xfrm>
-            <a:off x="1115568" y="2596896"/>
-            <a:ext cx="5120640" cy="594360"/>
+          <p:cNvPr id="26" name="Text 22"/>
+          <p:cNvSpPr/>
+          <p:nvPr/>
+        </p:nvSpPr>
+        <p:spPr>
+          <a:xfrm>
+            <a:off x="6894576" y="2350008"/>
+            <a:ext cx="4572000" cy="320040"/>
+          </a:xfrm>
+          <a:prstGeom prst="rect">
+            <a:avLst/>
+          </a:prstGeom>
+          <a:noFill/>
+          <a:ln/>
+        </p:spPr>
+        <p:txBody>
+          <a:bodyPr wrap="square" lIns="0" tIns="0" rIns="0" bIns="0" rtlCol="0" anchor="ctr"/>
+          <a:lstStyle/>
+          <a:p>
+            <a:pPr indent="0" marL="0">
+              <a:buNone/>
+            </a:pPr>
+            <a:r>
+              <a:rPr lang="en-US" sz="1350" b="1" dirty="0">
+                <a:solidFill>
+                  <a:srgbClr val="1A1A1A"/>
+                </a:solidFill>
+                <a:latin typeface="Arial" pitchFamily="34" charset="0"/>
+                <a:ea typeface="Arial" pitchFamily="34" charset="-122"/>
+                <a:cs typeface="Arial" pitchFamily="34" charset="-120"/>
+              </a:rPr>
+              <a:t>Identity or nothing</a:t>
+            </a:r>
+            <a:endParaRPr lang="en-US" sz="1350" dirty="0"/>
+          </a:p>
+        </p:txBody>
+      </p:sp>
+      <p:sp>
+        <p:nvSpPr>
+          <p:cNvPr id="27" name="Text 23"/>
+          <p:cNvSpPr/>
+          <p:nvPr/>
+        </p:nvSpPr>
+        <p:spPr>
+          <a:xfrm>
+            <a:off x="6894576" y="2679192"/>
+            <a:ext cx="4572000" cy="411480"/>
           </a:xfrm>
           <a:prstGeom prst="rect">
             <a:avLst/>
@@ -4942,30 +5704,30 @@
               <a:buNone/>
             </a:pPr>
             <a:r>
-              <a:rPr lang="en-US" sz="1350" dirty="0">
-                <a:solidFill>
-                  <a:srgbClr val="1A1A1A"/>
-                </a:solidFill>
-                <a:latin typeface="Arial" pitchFamily="34" charset="0"/>
-                <a:ea typeface="Arial" pitchFamily="34" charset="-122"/>
-                <a:cs typeface="Arial" pitchFamily="34" charset="-120"/>
-              </a:rPr>
-              <a:t>Alembic migrations — reviewed baseline, dev DB verified drift-free</a:t>
-            </a:r>
-            <a:endParaRPr lang="en-US" sz="1350" dirty="0"/>
-          </a:p>
-        </p:txBody>
-      </p:sp>
-      <p:sp>
-        <p:nvSpPr>
-          <p:cNvPr id="10" name="Shape 6"/>
-          <p:cNvSpPr/>
-          <p:nvPr/>
-        </p:nvSpPr>
-        <p:spPr>
-          <a:xfrm>
-            <a:off x="548640" y="3392424"/>
-            <a:ext cx="384048" cy="384048"/>
+              <a:rPr lang="en-US" sz="1050" dirty="0">
+                <a:solidFill>
+                  <a:srgbClr val="5F5F5F"/>
+                </a:solidFill>
+                <a:latin typeface="Arial" pitchFamily="34" charset="0"/>
+                <a:ea typeface="Arial" pitchFamily="34" charset="-122"/>
+                <a:cs typeface="Arial" pitchFamily="34" charset="-120"/>
+              </a:rPr>
+              <a:t>No validated user + tenant → memory silently disabled</a:t>
+            </a:r>
+            <a:endParaRPr lang="en-US" sz="1050" dirty="0"/>
+          </a:p>
+        </p:txBody>
+      </p:sp>
+      <p:sp>
+        <p:nvSpPr>
+          <p:cNvPr id="28" name="Shape 24"/>
+          <p:cNvSpPr/>
+          <p:nvPr/>
+        </p:nvSpPr>
+        <p:spPr>
+          <a:xfrm>
+            <a:off x="6309360" y="3099816"/>
+            <a:ext cx="420624" cy="420624"/>
           </a:xfrm>
           <a:prstGeom prst="ellipse">
             <a:avLst/>
@@ -4978,7 +5740,7 @@
       </p:sp>
       <p:pic>
         <p:nvPicPr>
-          <p:cNvPr id="11" name="Image 2" descr="preencoded.png">    </p:cNvPr>
+          <p:cNvPr id="29" name="Image 2" descr="preencoded.png">    </p:cNvPr>
           <p:cNvPicPr>
             <a:picLocks noChangeAspect="1"/>
           </p:cNvPicPr>
@@ -4992,8 +5754,8 @@
         </p:blipFill>
         <p:spPr>
           <a:xfrm>
-            <a:off x="652333" y="3496117"/>
-            <a:ext cx="176662" cy="176662"/>
+            <a:off x="6422928" y="3213384"/>
+            <a:ext cx="193487" cy="193487"/>
           </a:xfrm>
           <a:prstGeom prst="rect">
             <a:avLst/>
@@ -5002,14 +5764,53 @@
       </p:pic>
       <p:sp>
         <p:nvSpPr>
-          <p:cNvPr id="12" name="Text 7"/>
-          <p:cNvSpPr/>
-          <p:nvPr/>
-        </p:nvSpPr>
-        <p:spPr>
-          <a:xfrm>
-            <a:off x="1115568" y="3401568"/>
-            <a:ext cx="5120640" cy="594360"/>
+          <p:cNvPr id="30" name="Text 25"/>
+          <p:cNvSpPr/>
+          <p:nvPr/>
+        </p:nvSpPr>
+        <p:spPr>
+          <a:xfrm>
+            <a:off x="6894576" y="3099816"/>
+            <a:ext cx="4572000" cy="320040"/>
+          </a:xfrm>
+          <a:prstGeom prst="rect">
+            <a:avLst/>
+          </a:prstGeom>
+          <a:noFill/>
+          <a:ln/>
+        </p:spPr>
+        <p:txBody>
+          <a:bodyPr wrap="square" lIns="0" tIns="0" rIns="0" bIns="0" rtlCol="0" anchor="ctr"/>
+          <a:lstStyle/>
+          <a:p>
+            <a:pPr indent="0" marL="0">
+              <a:buNone/>
+            </a:pPr>
+            <a:r>
+              <a:rPr lang="en-US" sz="1350" b="1" dirty="0">
+                <a:solidFill>
+                  <a:srgbClr val="1A1A1A"/>
+                </a:solidFill>
+                <a:latin typeface="Arial" pitchFamily="34" charset="0"/>
+                <a:ea typeface="Arial" pitchFamily="34" charset="-122"/>
+                <a:cs typeface="Arial" pitchFamily="34" charset="-120"/>
+              </a:rPr>
+              <a:t>Denylist at write time</a:t>
+            </a:r>
+            <a:endParaRPr lang="en-US" sz="1350" dirty="0"/>
+          </a:p>
+        </p:txBody>
+      </p:sp>
+      <p:sp>
+        <p:nvSpPr>
+          <p:cNvPr id="31" name="Text 26"/>
+          <p:cNvSpPr/>
+          <p:nvPr/>
+        </p:nvSpPr>
+        <p:spPr>
+          <a:xfrm>
+            <a:off x="6894576" y="3429000"/>
+            <a:ext cx="4572000" cy="411480"/>
           </a:xfrm>
           <a:prstGeom prst="rect">
             <a:avLst/>
@@ -5028,30 +5829,30 @@
               <a:buNone/>
             </a:pPr>
             <a:r>
-              <a:rPr lang="en-US" sz="1350" dirty="0">
-                <a:solidFill>
-                  <a:srgbClr val="1A1A1A"/>
-                </a:solidFill>
-                <a:latin typeface="Arial" pitchFamily="34" charset="0"/>
-                <a:ea typeface="Arial" pitchFamily="34" charset="-122"/>
-                <a:cs typeface="Arial" pitchFamily="34" charset="-120"/>
-              </a:rPr>
-              <a:t>Harness-managed DB lifecycle — no private engine</a:t>
-            </a:r>
-            <a:endParaRPr lang="en-US" sz="1350" dirty="0"/>
-          </a:p>
-        </p:txBody>
-      </p:sp>
-      <p:sp>
-        <p:nvSpPr>
-          <p:cNvPr id="13" name="Shape 8"/>
-          <p:cNvSpPr/>
-          <p:nvPr/>
-        </p:nvSpPr>
-        <p:spPr>
-          <a:xfrm>
-            <a:off x="548640" y="4197096"/>
-            <a:ext cx="384048" cy="384048"/>
+              <a:rPr lang="en-US" sz="1050" dirty="0">
+                <a:solidFill>
+                  <a:srgbClr val="5F5F5F"/>
+                </a:solidFill>
+                <a:latin typeface="Arial" pitchFamily="34" charset="0"/>
+                <a:ea typeface="Arial" pitchFamily="34" charset="-122"/>
+                <a:cs typeface="Arial" pitchFamily="34" charset="-120"/>
+              </a:rPr>
+              <a:t>Credential, card, and IBAN shapes are never stored</a:t>
+            </a:r>
+            <a:endParaRPr lang="en-US" sz="1050" dirty="0"/>
+          </a:p>
+        </p:txBody>
+      </p:sp>
+      <p:sp>
+        <p:nvSpPr>
+          <p:cNvPr id="32" name="Shape 27"/>
+          <p:cNvSpPr/>
+          <p:nvPr/>
+        </p:nvSpPr>
+        <p:spPr>
+          <a:xfrm>
+            <a:off x="6309360" y="3849624"/>
+            <a:ext cx="420624" cy="420624"/>
           </a:xfrm>
           <a:prstGeom prst="ellipse">
             <a:avLst/>
@@ -5064,7 +5865,7 @@
       </p:sp>
       <p:pic>
         <p:nvPicPr>
-          <p:cNvPr id="14" name="Image 3" descr="preencoded.png">    </p:cNvPr>
+          <p:cNvPr id="33" name="Image 3" descr="preencoded.png">    </p:cNvPr>
           <p:cNvPicPr>
             <a:picLocks noChangeAspect="1"/>
           </p:cNvPicPr>
@@ -5078,8 +5879,8 @@
         </p:blipFill>
         <p:spPr>
           <a:xfrm>
-            <a:off x="652333" y="4300789"/>
-            <a:ext cx="176662" cy="176662"/>
+            <a:off x="6422928" y="3963192"/>
+            <a:ext cx="193487" cy="193487"/>
           </a:xfrm>
           <a:prstGeom prst="rect">
             <a:avLst/>
@@ -5088,14 +5889,53 @@
       </p:pic>
       <p:sp>
         <p:nvSpPr>
-          <p:cNvPr id="15" name="Text 9"/>
-          <p:cNvSpPr/>
-          <p:nvPr/>
-        </p:nvSpPr>
-        <p:spPr>
-          <a:xfrm>
-            <a:off x="1115568" y="4206240"/>
-            <a:ext cx="5120640" cy="594360"/>
+          <p:cNvPr id="34" name="Text 28"/>
+          <p:cNvSpPr/>
+          <p:nvPr/>
+        </p:nvSpPr>
+        <p:spPr>
+          <a:xfrm>
+            <a:off x="6894576" y="3849624"/>
+            <a:ext cx="4572000" cy="320040"/>
+          </a:xfrm>
+          <a:prstGeom prst="rect">
+            <a:avLst/>
+          </a:prstGeom>
+          <a:noFill/>
+          <a:ln/>
+        </p:spPr>
+        <p:txBody>
+          <a:bodyPr wrap="square" lIns="0" tIns="0" rIns="0" bIns="0" rtlCol="0" anchor="ctr"/>
+          <a:lstStyle/>
+          <a:p>
+            <a:pPr indent="0" marL="0">
+              <a:buNone/>
+            </a:pPr>
+            <a:r>
+              <a:rPr lang="en-US" sz="1350" b="1" dirty="0">
+                <a:solidFill>
+                  <a:srgbClr val="1A1A1A"/>
+                </a:solidFill>
+                <a:latin typeface="Arial" pitchFamily="34" charset="0"/>
+                <a:ea typeface="Arial" pitchFamily="34" charset="-122"/>
+                <a:cs typeface="Arial" pitchFamily="34" charset="-120"/>
+              </a:rPr>
+              <a:t>Content-free logs</a:t>
+            </a:r>
+            <a:endParaRPr lang="en-US" sz="1350" dirty="0"/>
+          </a:p>
+        </p:txBody>
+      </p:sp>
+      <p:sp>
+        <p:nvSpPr>
+          <p:cNvPr id="35" name="Text 29"/>
+          <p:cNvSpPr/>
+          <p:nvPr/>
+        </p:nvSpPr>
+        <p:spPr>
+          <a:xfrm>
+            <a:off x="6894576" y="4178808"/>
+            <a:ext cx="4572000" cy="411480"/>
           </a:xfrm>
           <a:prstGeom prst="rect">
             <a:avLst/>
@@ -5114,30 +5954,30 @@
               <a:buNone/>
             </a:pPr>
             <a:r>
-              <a:rPr lang="en-US" sz="1350" dirty="0">
-                <a:solidFill>
-                  <a:srgbClr val="1A1A1A"/>
-                </a:solidFill>
-                <a:latin typeface="Arial" pitchFamily="34" charset="0"/>
-                <a:ea typeface="Arial" pitchFamily="34" charset="-122"/>
-                <a:cs typeface="Arial" pitchFamily="34" charset="-120"/>
-              </a:rPr>
-              <a:t>Validated user + tenant required everywhere memory operates</a:t>
-            </a:r>
-            <a:endParaRPr lang="en-US" sz="1350" dirty="0"/>
-          </a:p>
-        </p:txBody>
-      </p:sp>
-      <p:sp>
-        <p:nvSpPr>
-          <p:cNvPr id="16" name="Shape 10"/>
-          <p:cNvSpPr/>
-          <p:nvPr/>
-        </p:nvSpPr>
-        <p:spPr>
-          <a:xfrm>
-            <a:off x="548640" y="5001768"/>
-            <a:ext cx="384048" cy="384048"/>
+              <a:rPr lang="en-US" sz="1050" dirty="0">
+                <a:solidFill>
+                  <a:srgbClr val="5F5F5F"/>
+                </a:solidFill>
+                <a:latin typeface="Arial" pitchFamily="34" charset="0"/>
+                <a:ea typeface="Arial" pitchFamily="34" charset="-122"/>
+                <a:cs typeface="Arial" pitchFamily="34" charset="-120"/>
+              </a:rPr>
+              <a:t>Telemetry carries ids and counts — never the memory text</a:t>
+            </a:r>
+            <a:endParaRPr lang="en-US" sz="1050" dirty="0"/>
+          </a:p>
+        </p:txBody>
+      </p:sp>
+      <p:sp>
+        <p:nvSpPr>
+          <p:cNvPr id="36" name="Shape 30"/>
+          <p:cNvSpPr/>
+          <p:nvPr/>
+        </p:nvSpPr>
+        <p:spPr>
+          <a:xfrm>
+            <a:off x="6309360" y="4599432"/>
+            <a:ext cx="420624" cy="420624"/>
           </a:xfrm>
           <a:prstGeom prst="ellipse">
             <a:avLst/>
@@ -5150,7 +5990,7 @@
       </p:sp>
       <p:pic>
         <p:nvPicPr>
-          <p:cNvPr id="17" name="Image 4" descr="preencoded.png">    </p:cNvPr>
+          <p:cNvPr id="37" name="Image 4" descr="preencoded.png">    </p:cNvPr>
           <p:cNvPicPr>
             <a:picLocks noChangeAspect="1"/>
           </p:cNvPicPr>
@@ -5164,8 +6004,8 @@
         </p:blipFill>
         <p:spPr>
           <a:xfrm>
-            <a:off x="652333" y="5105461"/>
-            <a:ext cx="176662" cy="176662"/>
+            <a:off x="6422928" y="4713000"/>
+            <a:ext cx="193487" cy="193487"/>
           </a:xfrm>
           <a:prstGeom prst="rect">
             <a:avLst/>
@@ -5174,14 +6014,53 @@
       </p:pic>
       <p:sp>
         <p:nvSpPr>
-          <p:cNvPr id="18" name="Text 11"/>
-          <p:cNvSpPr/>
-          <p:nvPr/>
-        </p:nvSpPr>
-        <p:spPr>
-          <a:xfrm>
-            <a:off x="1115568" y="5010912"/>
-            <a:ext cx="5120640" cy="594360"/>
+          <p:cNvPr id="38" name="Text 31"/>
+          <p:cNvSpPr/>
+          <p:nvPr/>
+        </p:nvSpPr>
+        <p:spPr>
+          <a:xfrm>
+            <a:off x="6894576" y="4599432"/>
+            <a:ext cx="4572000" cy="320040"/>
+          </a:xfrm>
+          <a:prstGeom prst="rect">
+            <a:avLst/>
+          </a:prstGeom>
+          <a:noFill/>
+          <a:ln/>
+        </p:spPr>
+        <p:txBody>
+          <a:bodyPr wrap="square" lIns="0" tIns="0" rIns="0" bIns="0" rtlCol="0" anchor="ctr"/>
+          <a:lstStyle/>
+          <a:p>
+            <a:pPr indent="0" marL="0">
+              <a:buNone/>
+            </a:pPr>
+            <a:r>
+              <a:rPr lang="en-US" sz="1350" b="1" dirty="0">
+                <a:solidFill>
+                  <a:srgbClr val="1A1A1A"/>
+                </a:solidFill>
+                <a:latin typeface="Arial" pitchFamily="34" charset="0"/>
+                <a:ea typeface="Arial" pitchFamily="34" charset="-122"/>
+                <a:cs typeface="Arial" pitchFamily="34" charset="-120"/>
+              </a:rPr>
+              <a:t>Deletable &amp; audited</a:t>
+            </a:r>
+            <a:endParaRPr lang="en-US" sz="1350" dirty="0"/>
+          </a:p>
+        </p:txBody>
+      </p:sp>
+      <p:sp>
+        <p:nvSpPr>
+          <p:cNvPr id="39" name="Text 32"/>
+          <p:cNvSpPr/>
+          <p:nvPr/>
+        </p:nvSpPr>
+        <p:spPr>
+          <a:xfrm>
+            <a:off x="6894576" y="4928616"/>
+            <a:ext cx="4572000" cy="411480"/>
           </a:xfrm>
           <a:prstGeom prst="rect">
             <a:avLst/>
@@ -5200,315 +6079,17 @@
               <a:buNone/>
             </a:pPr>
             <a:r>
-              <a:rPr lang="en-US" sz="1350" dirty="0">
-                <a:solidFill>
-                  <a:srgbClr val="1A1A1A"/>
-                </a:solidFill>
-                <a:latin typeface="Arial" pitchFamily="34" charset="0"/>
-                <a:ea typeface="Arial" pitchFamily="34" charset="-122"/>
-                <a:cs typeface="Arial" pitchFamily="34" charset="-120"/>
-              </a:rPr>
-              <a:t>Ten new tests, including the off-by-default guard</a:t>
-            </a:r>
-            <a:endParaRPr lang="en-US" sz="1350" dirty="0"/>
-          </a:p>
-        </p:txBody>
-      </p:sp>
-      <p:sp>
-        <p:nvSpPr>
-          <p:cNvPr id="19" name="Shape 12"/>
-          <p:cNvSpPr/>
-          <p:nvPr/>
-        </p:nvSpPr>
-        <p:spPr>
-          <a:xfrm>
-            <a:off x="6400800" y="1325880"/>
-            <a:ext cx="5239512" cy="4572000"/>
-          </a:xfrm>
-          <a:prstGeom prst="roundRect">
-            <a:avLst>
-              <a:gd name="adj" fmla="val 2000"/>
-            </a:avLst>
-          </a:prstGeom>
-          <a:solidFill>
-            <a:srgbClr val="0F0F0F"/>
-          </a:solidFill>
-          <a:ln/>
-        </p:spPr>
-      </p:sp>
-      <p:sp>
-        <p:nvSpPr>
-          <p:cNvPr id="20" name="Text 13"/>
-          <p:cNvSpPr/>
-          <p:nvPr/>
-        </p:nvSpPr>
-        <p:spPr>
-          <a:xfrm>
-            <a:off x="6766560" y="1645920"/>
-            <a:ext cx="3657600" cy="320040"/>
-          </a:xfrm>
-          <a:prstGeom prst="rect">
-            <a:avLst/>
-          </a:prstGeom>
-          <a:noFill/>
-          <a:ln/>
-        </p:spPr>
-        <p:txBody>
-          <a:bodyPr wrap="square" lIns="0" tIns="0" rIns="0" bIns="0" rtlCol="0" anchor="ctr"/>
-          <a:lstStyle/>
-          <a:p>
-            <a:pPr indent="0" marL="0">
-              <a:buNone/>
-            </a:pPr>
-            <a:r>
-              <a:rPr lang="en-US" sz="1200" b="1" spc="300" kern="0" dirty="0">
-                <a:solidFill>
-                  <a:srgbClr val="EC0016"/>
-                </a:solidFill>
-                <a:latin typeface="Arial" pitchFamily="34" charset="0"/>
-                <a:ea typeface="Arial" pitchFamily="34" charset="-122"/>
-                <a:cs typeface="Arial" pitchFamily="34" charset="-120"/>
-              </a:rPr>
-              <a:t>STATUS</a:t>
-            </a:r>
-            <a:endParaRPr lang="en-US" sz="1200" dirty="0"/>
-          </a:p>
-        </p:txBody>
-      </p:sp>
-      <p:sp>
-        <p:nvSpPr>
-          <p:cNvPr id="21" name="Text 14"/>
-          <p:cNvSpPr/>
-          <p:nvPr/>
-        </p:nvSpPr>
-        <p:spPr>
-          <a:xfrm>
-            <a:off x="6766560" y="2057400"/>
-            <a:ext cx="4526280" cy="777240"/>
-          </a:xfrm>
-          <a:prstGeom prst="rect">
-            <a:avLst/>
-          </a:prstGeom>
-          <a:noFill/>
-          <a:ln/>
-        </p:spPr>
-        <p:txBody>
-          <a:bodyPr wrap="square" lIns="0" tIns="0" rIns="0" bIns="0" rtlCol="0" anchor="ctr"/>
-          <a:lstStyle/>
-          <a:p>
-            <a:pPr indent="0" marL="0">
-              <a:lnSpc>
-                <a:spcPct val="110000"/>
-              </a:lnSpc>
-              <a:buNone/>
-            </a:pPr>
-            <a:r>
-              <a:rPr lang="en-US" sz="1800" b="1" dirty="0">
-                <a:solidFill>
-                  <a:srgbClr val="FFFFFF"/>
-                </a:solidFill>
-                <a:latin typeface="Arial" pitchFamily="34" charset="0"/>
-                <a:ea typeface="Arial" pitchFamily="34" charset="-122"/>
-                <a:cs typeface="Arial" pitchFamily="34" charset="-120"/>
-              </a:rPr>
-              <a:t>The foundation merge request is in review now.</a:t>
-            </a:r>
-            <a:endParaRPr lang="en-US" sz="1800" dirty="0"/>
-          </a:p>
-        </p:txBody>
-      </p:sp>
-      <p:sp>
-        <p:nvSpPr>
-          <p:cNvPr id="22" name="Text 15"/>
-          <p:cNvSpPr/>
-          <p:nvPr/>
-        </p:nvSpPr>
-        <p:spPr>
-          <a:xfrm>
-            <a:off x="6766560" y="3063240"/>
-            <a:ext cx="3657600" cy="320040"/>
-          </a:xfrm>
-          <a:prstGeom prst="rect">
-            <a:avLst/>
-          </a:prstGeom>
-          <a:noFill/>
-          <a:ln/>
-        </p:spPr>
-        <p:txBody>
-          <a:bodyPr wrap="square" lIns="0" tIns="0" rIns="0" bIns="0" rtlCol="0" anchor="ctr"/>
-          <a:lstStyle/>
-          <a:p>
-            <a:pPr indent="0" marL="0">
-              <a:buNone/>
-            </a:pPr>
-            <a:r>
-              <a:rPr lang="en-US" sz="1200" b="1" spc="200" kern="0" dirty="0">
-                <a:solidFill>
-                  <a:srgbClr val="EC0016"/>
-                </a:solidFill>
-                <a:latin typeface="Arial" pitchFamily="34" charset="0"/>
-                <a:ea typeface="Arial" pitchFamily="34" charset="-122"/>
-                <a:cs typeface="Arial" pitchFamily="34" charset="-120"/>
-              </a:rPr>
-              <a:t>NEXT WAVE — DESIGNED</a:t>
-            </a:r>
-            <a:endParaRPr lang="en-US" sz="1200" dirty="0"/>
-          </a:p>
-        </p:txBody>
-      </p:sp>
-      <p:sp>
-        <p:nvSpPr>
-          <p:cNvPr id="23" name="Text 16"/>
-          <p:cNvSpPr/>
-          <p:nvPr/>
-        </p:nvSpPr>
-        <p:spPr>
-          <a:xfrm>
-            <a:off x="6766560" y="3474720"/>
-            <a:ext cx="4572000" cy="411480"/>
-          </a:xfrm>
-          <a:prstGeom prst="rect">
-            <a:avLst/>
-          </a:prstGeom>
-          <a:noFill/>
-          <a:ln/>
-        </p:spPr>
-        <p:txBody>
-          <a:bodyPr wrap="square" lIns="0" tIns="0" rIns="0" bIns="0" rtlCol="0" anchor="ctr"/>
-          <a:lstStyle/>
-          <a:p>
-            <a:pPr indent="0" marL="0">
-              <a:buNone/>
-            </a:pPr>
-            <a:r>
-              <a:rPr lang="en-US" sz="1350" dirty="0">
-                <a:solidFill>
-                  <a:srgbClr val="E6E6E6"/>
-                </a:solidFill>
-                <a:latin typeface="Arial" pitchFamily="34" charset="0"/>
-                <a:ea typeface="Arial" pitchFamily="34" charset="-122"/>
-                <a:cs typeface="Arial" pitchFamily="34" charset="-120"/>
-              </a:rPr>
-              <a:t>—  Memory out of the instruction channel</a:t>
-            </a:r>
-            <a:endParaRPr lang="en-US" sz="1350" dirty="0"/>
-          </a:p>
-        </p:txBody>
-      </p:sp>
-      <p:sp>
-        <p:nvSpPr>
-          <p:cNvPr id="24" name="Text 17"/>
-          <p:cNvSpPr/>
-          <p:nvPr/>
-        </p:nvSpPr>
-        <p:spPr>
-          <a:xfrm>
-            <a:off x="6766560" y="3977640"/>
-            <a:ext cx="4572000" cy="411480"/>
-          </a:xfrm>
-          <a:prstGeom prst="rect">
-            <a:avLst/>
-          </a:prstGeom>
-          <a:noFill/>
-          <a:ln/>
-        </p:spPr>
-        <p:txBody>
-          <a:bodyPr wrap="square" lIns="0" tIns="0" rIns="0" bIns="0" rtlCol="0" anchor="ctr"/>
-          <a:lstStyle/>
-          <a:p>
-            <a:pPr indent="0" marL="0">
-              <a:buNone/>
-            </a:pPr>
-            <a:r>
-              <a:rPr lang="en-US" sz="1350" dirty="0">
-                <a:solidFill>
-                  <a:srgbClr val="E6E6E6"/>
-                </a:solidFill>
-                <a:latin typeface="Arial" pitchFamily="34" charset="0"/>
-                <a:ea typeface="Arial" pitchFamily="34" charset="-122"/>
-                <a:cs typeface="Arial" pitchFamily="34" charset="-120"/>
-              </a:rPr>
-              <a:t>—  Durable extraction (outbox + retries)</a:t>
-            </a:r>
-            <a:endParaRPr lang="en-US" sz="1350" dirty="0"/>
-          </a:p>
-        </p:txBody>
-      </p:sp>
-      <p:sp>
-        <p:nvSpPr>
-          <p:cNvPr id="25" name="Text 18"/>
-          <p:cNvSpPr/>
-          <p:nvPr/>
-        </p:nvSpPr>
-        <p:spPr>
-          <a:xfrm>
-            <a:off x="6766560" y="4480560"/>
-            <a:ext cx="4572000" cy="411480"/>
-          </a:xfrm>
-          <a:prstGeom prst="rect">
-            <a:avLst/>
-          </a:prstGeom>
-          <a:noFill/>
-          <a:ln/>
-        </p:spPr>
-        <p:txBody>
-          <a:bodyPr wrap="square" lIns="0" tIns="0" rIns="0" bIns="0" rtlCol="0" anchor="ctr"/>
-          <a:lstStyle/>
-          <a:p>
-            <a:pPr indent="0" marL="0">
-              <a:buNone/>
-            </a:pPr>
-            <a:r>
-              <a:rPr lang="en-US" sz="1350" dirty="0">
-                <a:solidFill>
-                  <a:srgbClr val="E6E6E6"/>
-                </a:solidFill>
-                <a:latin typeface="Arial" pitchFamily="34" charset="0"/>
-                <a:ea typeface="Arial" pitchFamily="34" charset="-122"/>
-                <a:cs typeface="Arial" pitchFamily="34" charset="-120"/>
-              </a:rPr>
-              <a:t>—  View / delete / retention APIs + audit events</a:t>
-            </a:r>
-            <a:endParaRPr lang="en-US" sz="1350" dirty="0"/>
-          </a:p>
-        </p:txBody>
-      </p:sp>
-      <p:sp>
-        <p:nvSpPr>
-          <p:cNvPr id="26" name="Text 19"/>
-          <p:cNvSpPr/>
-          <p:nvPr/>
-        </p:nvSpPr>
-        <p:spPr>
-          <a:xfrm>
-            <a:off x="6766560" y="4983480"/>
-            <a:ext cx="4572000" cy="411480"/>
-          </a:xfrm>
-          <a:prstGeom prst="rect">
-            <a:avLst/>
-          </a:prstGeom>
-          <a:noFill/>
-          <a:ln/>
-        </p:spPr>
-        <p:txBody>
-          <a:bodyPr wrap="square" lIns="0" tIns="0" rIns="0" bIns="0" rtlCol="0" anchor="ctr"/>
-          <a:lstStyle/>
-          <a:p>
-            <a:pPr indent="0" marL="0">
-              <a:buNone/>
-            </a:pPr>
-            <a:r>
-              <a:rPr lang="en-US" sz="1350" dirty="0">
-                <a:solidFill>
-                  <a:srgbClr val="E6E6E6"/>
-                </a:solidFill>
-                <a:latin typeface="Arial" pitchFamily="34" charset="0"/>
-                <a:ea typeface="Arial" pitchFamily="34" charset="-122"/>
-                <a:cs typeface="Arial" pitchFamily="34" charset="-120"/>
-              </a:rPr>
-              <a:t>—  Tenant plumbing in the console</a:t>
-            </a:r>
-            <a:endParaRPr lang="en-US" sz="1350" dirty="0"/>
+              <a:rPr lang="en-US" sz="1050" dirty="0">
+                <a:solidFill>
+                  <a:srgbClr val="5F5F5F"/>
+                </a:solidFill>
+                <a:latin typeface="Arial" pitchFamily="34" charset="0"/>
+                <a:ea typeface="Arial" pitchFamily="34" charset="-122"/>
+                <a:cs typeface="Arial" pitchFamily="34" charset="-120"/>
+              </a:rPr>
+              <a:t>Soft-delete, one-call forget, and a full supersede history</a:t>
+            </a:r>
+            <a:endParaRPr lang="en-US" sz="1050" dirty="0"/>
           </a:p>
         </p:txBody>
       </p:sp>
@@ -5523,6 +6104,1759 @@
 <file path=ppt/slides/slide6.xml><?xml version="1.0" encoding="utf-8"?>
 <p:sld xmlns:a="http://schemas.openxmlformats.org/drawingml/2006/main" xmlns:r="http://schemas.openxmlformats.org/officeDocument/2006/relationships" xmlns:p="http://schemas.openxmlformats.org/presentationml/2006/main">
   <p:cSld name="Slide 6">
+    <p:bg>
+      <p:bgPr>
+        <a:solidFill>
+          <a:srgbClr val="FFFFFF"/>
+        </a:solidFill>
+      </p:bgPr>
+    </p:bg>
+    <p:spTree>
+      <p:nvGrpSpPr>
+        <p:cNvPr id="1" name=""/>
+        <p:cNvGrpSpPr/>
+        <p:nvPr/>
+      </p:nvGrpSpPr>
+      <p:grpSpPr>
+        <a:xfrm>
+          <a:off x="0" y="0"/>
+          <a:ext cx="0" cy="0"/>
+          <a:chOff x="0" y="0"/>
+          <a:chExt cx="0" cy="0"/>
+        </a:xfrm>
+      </p:grpSpPr>
+      <p:sp>
+        <p:nvSpPr>
+          <p:cNvPr id="2" name="Text 0"/>
+          <p:cNvSpPr/>
+          <p:nvPr/>
+        </p:nvSpPr>
+        <p:spPr>
+          <a:xfrm>
+            <a:off x="548640" y="457200"/>
+            <a:ext cx="11064240" cy="640080"/>
+          </a:xfrm>
+          <a:prstGeom prst="rect">
+            <a:avLst/>
+          </a:prstGeom>
+          <a:noFill/>
+          <a:ln/>
+        </p:spPr>
+        <p:txBody>
+          <a:bodyPr wrap="square" rtlCol="0" anchor="ctr"/>
+          <a:lstStyle/>
+          <a:p>
+            <a:pPr indent="0" marL="0">
+              <a:buNone/>
+            </a:pPr>
+            <a:r>
+              <a:rPr lang="en-US" sz="3000" b="1" dirty="0">
+                <a:solidFill>
+                  <a:srgbClr val="1A1A1A"/>
+                </a:solidFill>
+                <a:latin typeface="Arial" pitchFamily="34" charset="0"/>
+                <a:ea typeface="Arial" pitchFamily="34" charset="-122"/>
+                <a:cs typeface="Arial" pitchFamily="34" charset="-120"/>
+              </a:rPr>
+              <a:t>Live demo — five things to watch</a:t>
+            </a:r>
+            <a:endParaRPr lang="en-US" sz="3000" dirty="0"/>
+          </a:p>
+        </p:txBody>
+      </p:sp>
+      <p:sp>
+        <p:nvSpPr>
+          <p:cNvPr id="3" name="Text 1"/>
+          <p:cNvSpPr/>
+          <p:nvPr/>
+        </p:nvSpPr>
+        <p:spPr>
+          <a:xfrm>
+            <a:off x="548640" y="1527048"/>
+            <a:ext cx="411480" cy="457200"/>
+          </a:xfrm>
+          <a:prstGeom prst="rect">
+            <a:avLst/>
+          </a:prstGeom>
+          <a:noFill/>
+          <a:ln/>
+        </p:spPr>
+        <p:txBody>
+          <a:bodyPr wrap="square" lIns="0" tIns="0" rIns="0" bIns="0" rtlCol="0" anchor="ctr"/>
+          <a:lstStyle/>
+          <a:p>
+            <a:pPr indent="0" marL="0">
+              <a:buNone/>
+            </a:pPr>
+            <a:r>
+              <a:rPr lang="en-US" sz="2200" b="1" dirty="0">
+                <a:solidFill>
+                  <a:srgbClr val="EC0016"/>
+                </a:solidFill>
+                <a:latin typeface="Arial" pitchFamily="34" charset="0"/>
+                <a:ea typeface="Arial" pitchFamily="34" charset="-122"/>
+                <a:cs typeface="Arial" pitchFamily="34" charset="-120"/>
+              </a:rPr>
+              <a:t>1</a:t>
+            </a:r>
+            <a:endParaRPr lang="en-US" sz="2200" dirty="0"/>
+          </a:p>
+        </p:txBody>
+      </p:sp>
+      <p:sp>
+        <p:nvSpPr>
+          <p:cNvPr id="4" name="Shape 2"/>
+          <p:cNvSpPr/>
+          <p:nvPr/>
+        </p:nvSpPr>
+        <p:spPr>
+          <a:xfrm>
+            <a:off x="1005840" y="1508760"/>
+            <a:ext cx="457200" cy="457200"/>
+          </a:xfrm>
+          <a:prstGeom prst="ellipse">
+            <a:avLst/>
+          </a:prstGeom>
+          <a:solidFill>
+            <a:srgbClr val="F4F4F4"/>
+          </a:solidFill>
+          <a:ln/>
+        </p:spPr>
+      </p:sp>
+      <p:pic>
+        <p:nvPicPr>
+          <p:cNvPr id="5" name="Image 0" descr="preencoded.png">    </p:cNvPr>
+          <p:cNvPicPr>
+            <a:picLocks noChangeAspect="1"/>
+          </p:cNvPicPr>
+          <p:nvPr/>
+        </p:nvPicPr>
+        <p:blipFill>
+          <a:blip r:embed="rId1"/>
+          <a:stretch>
+            <a:fillRect/>
+          </a:stretch>
+        </p:blipFill>
+        <p:spPr>
+          <a:xfrm>
+            <a:off x="1129284" y="1632204"/>
+            <a:ext cx="210312" cy="210312"/>
+          </a:xfrm>
+          <a:prstGeom prst="rect">
+            <a:avLst/>
+          </a:prstGeom>
+        </p:spPr>
+      </p:pic>
+      <p:sp>
+        <p:nvSpPr>
+          <p:cNvPr id="6" name="Text 3"/>
+          <p:cNvSpPr/>
+          <p:nvPr/>
+        </p:nvSpPr>
+        <p:spPr>
+          <a:xfrm>
+            <a:off x="1691640" y="1536192"/>
+            <a:ext cx="2286000" cy="365760"/>
+          </a:xfrm>
+          <a:prstGeom prst="rect">
+            <a:avLst/>
+          </a:prstGeom>
+          <a:noFill/>
+          <a:ln/>
+        </p:spPr>
+        <p:txBody>
+          <a:bodyPr wrap="square" lIns="0" tIns="0" rIns="0" bIns="0" rtlCol="0" anchor="ctr"/>
+          <a:lstStyle/>
+          <a:p>
+            <a:pPr indent="0" marL="0">
+              <a:buNone/>
+            </a:pPr>
+            <a:r>
+              <a:rPr lang="en-US" sz="1550" b="1" dirty="0">
+                <a:solidFill>
+                  <a:srgbClr val="1A1A1A"/>
+                </a:solidFill>
+                <a:latin typeface="Arial" pitchFamily="34" charset="0"/>
+                <a:ea typeface="Arial" pitchFamily="34" charset="-122"/>
+                <a:cs typeface="Arial" pitchFamily="34" charset="-120"/>
+              </a:rPr>
+              <a:t>Teach it</a:t>
+            </a:r>
+            <a:endParaRPr lang="en-US" sz="1550" dirty="0"/>
+          </a:p>
+        </p:txBody>
+      </p:sp>
+      <p:sp>
+        <p:nvSpPr>
+          <p:cNvPr id="7" name="Text 4"/>
+          <p:cNvSpPr/>
+          <p:nvPr/>
+        </p:nvSpPr>
+        <p:spPr>
+          <a:xfrm>
+            <a:off x="4114800" y="1554480"/>
+            <a:ext cx="7498080" cy="457200"/>
+          </a:xfrm>
+          <a:prstGeom prst="rect">
+            <a:avLst/>
+          </a:prstGeom>
+          <a:noFill/>
+          <a:ln/>
+        </p:spPr>
+        <p:txBody>
+          <a:bodyPr wrap="square" lIns="0" tIns="0" rIns="0" bIns="0" rtlCol="0" anchor="ctr"/>
+          <a:lstStyle/>
+          <a:p>
+            <a:pPr indent="0" marL="0">
+              <a:buNone/>
+            </a:pPr>
+            <a:r>
+              <a:rPr lang="en-US" sz="1350" dirty="0">
+                <a:solidFill>
+                  <a:srgbClr val="5F5F5F"/>
+                </a:solidFill>
+                <a:latin typeface="Arial" pitchFamily="34" charset="0"/>
+                <a:ea typeface="Arial" pitchFamily="34" charset="-122"/>
+                <a:cs typeface="Arial" pitchFamily="34" charset="-120"/>
+              </a:rPr>
+              <a:t>I state durable facts — watch the save_memory tool call render.</a:t>
+            </a:r>
+            <a:endParaRPr lang="en-US" sz="1350" dirty="0"/>
+          </a:p>
+        </p:txBody>
+      </p:sp>
+      <p:sp>
+        <p:nvSpPr>
+          <p:cNvPr id="8" name="Text 5"/>
+          <p:cNvSpPr/>
+          <p:nvPr/>
+        </p:nvSpPr>
+        <p:spPr>
+          <a:xfrm>
+            <a:off x="548640" y="2395728"/>
+            <a:ext cx="411480" cy="457200"/>
+          </a:xfrm>
+          <a:prstGeom prst="rect">
+            <a:avLst/>
+          </a:prstGeom>
+          <a:noFill/>
+          <a:ln/>
+        </p:spPr>
+        <p:txBody>
+          <a:bodyPr wrap="square" lIns="0" tIns="0" rIns="0" bIns="0" rtlCol="0" anchor="ctr"/>
+          <a:lstStyle/>
+          <a:p>
+            <a:pPr indent="0" marL="0">
+              <a:buNone/>
+            </a:pPr>
+            <a:r>
+              <a:rPr lang="en-US" sz="2200" b="1" dirty="0">
+                <a:solidFill>
+                  <a:srgbClr val="EC0016"/>
+                </a:solidFill>
+                <a:latin typeface="Arial" pitchFamily="34" charset="0"/>
+                <a:ea typeface="Arial" pitchFamily="34" charset="-122"/>
+                <a:cs typeface="Arial" pitchFamily="34" charset="-120"/>
+              </a:rPr>
+              <a:t>2</a:t>
+            </a:r>
+            <a:endParaRPr lang="en-US" sz="2200" dirty="0"/>
+          </a:p>
+        </p:txBody>
+      </p:sp>
+      <p:sp>
+        <p:nvSpPr>
+          <p:cNvPr id="9" name="Shape 6"/>
+          <p:cNvSpPr/>
+          <p:nvPr/>
+        </p:nvSpPr>
+        <p:spPr>
+          <a:xfrm>
+            <a:off x="1005840" y="2377440"/>
+            <a:ext cx="457200" cy="457200"/>
+          </a:xfrm>
+          <a:prstGeom prst="ellipse">
+            <a:avLst/>
+          </a:prstGeom>
+          <a:solidFill>
+            <a:srgbClr val="F4F4F4"/>
+          </a:solidFill>
+          <a:ln/>
+        </p:spPr>
+      </p:sp>
+      <p:pic>
+        <p:nvPicPr>
+          <p:cNvPr id="10" name="Image 1" descr="preencoded.png">    </p:cNvPr>
+          <p:cNvPicPr>
+            <a:picLocks noChangeAspect="1"/>
+          </p:cNvPicPr>
+          <p:nvPr/>
+        </p:nvPicPr>
+        <p:blipFill>
+          <a:blip r:embed="rId2"/>
+          <a:stretch>
+            <a:fillRect/>
+          </a:stretch>
+        </p:blipFill>
+        <p:spPr>
+          <a:xfrm>
+            <a:off x="1129284" y="2500884"/>
+            <a:ext cx="210312" cy="210312"/>
+          </a:xfrm>
+          <a:prstGeom prst="rect">
+            <a:avLst/>
+          </a:prstGeom>
+        </p:spPr>
+      </p:pic>
+      <p:sp>
+        <p:nvSpPr>
+          <p:cNvPr id="11" name="Text 7"/>
+          <p:cNvSpPr/>
+          <p:nvPr/>
+        </p:nvSpPr>
+        <p:spPr>
+          <a:xfrm>
+            <a:off x="1691640" y="2404872"/>
+            <a:ext cx="2286000" cy="365760"/>
+          </a:xfrm>
+          <a:prstGeom prst="rect">
+            <a:avLst/>
+          </a:prstGeom>
+          <a:noFill/>
+          <a:ln/>
+        </p:spPr>
+        <p:txBody>
+          <a:bodyPr wrap="square" lIns="0" tIns="0" rIns="0" bIns="0" rtlCol="0" anchor="ctr"/>
+          <a:lstStyle/>
+          <a:p>
+            <a:pPr indent="0" marL="0">
+              <a:buNone/>
+            </a:pPr>
+            <a:r>
+              <a:rPr lang="en-US" sz="1550" b="1" dirty="0">
+                <a:solidFill>
+                  <a:srgbClr val="1A1A1A"/>
+                </a:solidFill>
+                <a:latin typeface="Arial" pitchFamily="34" charset="0"/>
+                <a:ea typeface="Arial" pitchFamily="34" charset="-122"/>
+                <a:cs typeface="Arial" pitchFamily="34" charset="-120"/>
+              </a:rPr>
+              <a:t>New thread</a:t>
+            </a:r>
+            <a:endParaRPr lang="en-US" sz="1550" dirty="0"/>
+          </a:p>
+        </p:txBody>
+      </p:sp>
+      <p:sp>
+        <p:nvSpPr>
+          <p:cNvPr id="12" name="Text 8"/>
+          <p:cNvSpPr/>
+          <p:nvPr/>
+        </p:nvSpPr>
+        <p:spPr>
+          <a:xfrm>
+            <a:off x="4114800" y="2423160"/>
+            <a:ext cx="7498080" cy="457200"/>
+          </a:xfrm>
+          <a:prstGeom prst="rect">
+            <a:avLst/>
+          </a:prstGeom>
+          <a:noFill/>
+          <a:ln/>
+        </p:spPr>
+        <p:txBody>
+          <a:bodyPr wrap="square" lIns="0" tIns="0" rIns="0" bIns="0" rtlCol="0" anchor="ctr"/>
+          <a:lstStyle/>
+          <a:p>
+            <a:pPr indent="0" marL="0">
+              <a:buNone/>
+            </a:pPr>
+            <a:r>
+              <a:rPr lang="en-US" sz="1350" dirty="0">
+                <a:solidFill>
+                  <a:srgbClr val="5F5F5F"/>
+                </a:solidFill>
+                <a:latin typeface="Arial" pitchFamily="34" charset="0"/>
+                <a:ea typeface="Arial" pitchFamily="34" charset="-122"/>
+                <a:cs typeface="Arial" pitchFamily="34" charset="-120"/>
+              </a:rPr>
+              <a:t>“What do you remember about me?” — 🧠 receipt + recital from an empty transcript.</a:t>
+            </a:r>
+            <a:endParaRPr lang="en-US" sz="1350" dirty="0"/>
+          </a:p>
+        </p:txBody>
+      </p:sp>
+      <p:sp>
+        <p:nvSpPr>
+          <p:cNvPr id="13" name="Text 9"/>
+          <p:cNvSpPr/>
+          <p:nvPr/>
+        </p:nvSpPr>
+        <p:spPr>
+          <a:xfrm>
+            <a:off x="548640" y="3264408"/>
+            <a:ext cx="411480" cy="457200"/>
+          </a:xfrm>
+          <a:prstGeom prst="rect">
+            <a:avLst/>
+          </a:prstGeom>
+          <a:noFill/>
+          <a:ln/>
+        </p:spPr>
+        <p:txBody>
+          <a:bodyPr wrap="square" lIns="0" tIns="0" rIns="0" bIns="0" rtlCol="0" anchor="ctr"/>
+          <a:lstStyle/>
+          <a:p>
+            <a:pPr indent="0" marL="0">
+              <a:buNone/>
+            </a:pPr>
+            <a:r>
+              <a:rPr lang="en-US" sz="2200" b="1" dirty="0">
+                <a:solidFill>
+                  <a:srgbClr val="EC0016"/>
+                </a:solidFill>
+                <a:latin typeface="Arial" pitchFamily="34" charset="0"/>
+                <a:ea typeface="Arial" pitchFamily="34" charset="-122"/>
+                <a:cs typeface="Arial" pitchFamily="34" charset="-120"/>
+              </a:rPr>
+              <a:t>3</a:t>
+            </a:r>
+            <a:endParaRPr lang="en-US" sz="2200" dirty="0"/>
+          </a:p>
+        </p:txBody>
+      </p:sp>
+      <p:sp>
+        <p:nvSpPr>
+          <p:cNvPr id="14" name="Shape 10"/>
+          <p:cNvSpPr/>
+          <p:nvPr/>
+        </p:nvSpPr>
+        <p:spPr>
+          <a:xfrm>
+            <a:off x="1005840" y="3246120"/>
+            <a:ext cx="457200" cy="457200"/>
+          </a:xfrm>
+          <a:prstGeom prst="ellipse">
+            <a:avLst/>
+          </a:prstGeom>
+          <a:solidFill>
+            <a:srgbClr val="F4F4F4"/>
+          </a:solidFill>
+          <a:ln/>
+        </p:spPr>
+      </p:sp>
+      <p:pic>
+        <p:nvPicPr>
+          <p:cNvPr id="15" name="Image 2" descr="preencoded.png">    </p:cNvPr>
+          <p:cNvPicPr>
+            <a:picLocks noChangeAspect="1"/>
+          </p:cNvPicPr>
+          <p:nvPr/>
+        </p:nvPicPr>
+        <p:blipFill>
+          <a:blip r:embed="rId3"/>
+          <a:stretch>
+            <a:fillRect/>
+          </a:stretch>
+        </p:blipFill>
+        <p:spPr>
+          <a:xfrm>
+            <a:off x="1129284" y="3369564"/>
+            <a:ext cx="210312" cy="210312"/>
+          </a:xfrm>
+          <a:prstGeom prst="rect">
+            <a:avLst/>
+          </a:prstGeom>
+        </p:spPr>
+      </p:pic>
+      <p:sp>
+        <p:nvSpPr>
+          <p:cNvPr id="16" name="Text 11"/>
+          <p:cNvSpPr/>
+          <p:nvPr/>
+        </p:nvSpPr>
+        <p:spPr>
+          <a:xfrm>
+            <a:off x="1691640" y="3273552"/>
+            <a:ext cx="2286000" cy="365760"/>
+          </a:xfrm>
+          <a:prstGeom prst="rect">
+            <a:avLst/>
+          </a:prstGeom>
+          <a:noFill/>
+          <a:ln/>
+        </p:spPr>
+        <p:txBody>
+          <a:bodyPr wrap="square" lIns="0" tIns="0" rIns="0" bIns="0" rtlCol="0" anchor="ctr"/>
+          <a:lstStyle/>
+          <a:p>
+            <a:pPr indent="0" marL="0">
+              <a:buNone/>
+            </a:pPr>
+            <a:r>
+              <a:rPr lang="en-US" sz="1550" b="1" dirty="0">
+                <a:solidFill>
+                  <a:srgbClr val="1A1A1A"/>
+                </a:solidFill>
+                <a:latin typeface="Arial" pitchFamily="34" charset="0"/>
+                <a:ea typeface="Arial" pitchFamily="34" charset="-122"/>
+                <a:cs typeface="Arial" pitchFamily="34" charset="-120"/>
+              </a:rPr>
+              <a:t>Kill the backend</a:t>
+            </a:r>
+            <a:endParaRPr lang="en-US" sz="1550" dirty="0"/>
+          </a:p>
+        </p:txBody>
+      </p:sp>
+      <p:sp>
+        <p:nvSpPr>
+          <p:cNvPr id="17" name="Text 12"/>
+          <p:cNvSpPr/>
+          <p:nvPr/>
+        </p:nvSpPr>
+        <p:spPr>
+          <a:xfrm>
+            <a:off x="4114800" y="3291840"/>
+            <a:ext cx="7498080" cy="457200"/>
+          </a:xfrm>
+          <a:prstGeom prst="rect">
+            <a:avLst/>
+          </a:prstGeom>
+          <a:noFill/>
+          <a:ln/>
+        </p:spPr>
+        <p:txBody>
+          <a:bodyPr wrap="square" lIns="0" tIns="0" rIns="0" bIns="0" rtlCol="0" anchor="ctr"/>
+          <a:lstStyle/>
+          <a:p>
+            <a:pPr indent="0" marL="0">
+              <a:buNone/>
+            </a:pPr>
+            <a:r>
+              <a:rPr lang="en-US" sz="1350" dirty="0">
+                <a:solidFill>
+                  <a:srgbClr val="5F5F5F"/>
+                </a:solidFill>
+                <a:latin typeface="Arial" pitchFamily="34" charset="0"/>
+                <a:ea typeface="Arial" pitchFamily="34" charset="-122"/>
+                <a:cs typeface="Arial" pitchFamily="34" charset="-120"/>
+              </a:rPr>
+              <a:t>Restart, ask again. Postgres rows, not process state.</a:t>
+            </a:r>
+            <a:endParaRPr lang="en-US" sz="1350" dirty="0"/>
+          </a:p>
+        </p:txBody>
+      </p:sp>
+      <p:sp>
+        <p:nvSpPr>
+          <p:cNvPr id="18" name="Text 13"/>
+          <p:cNvSpPr/>
+          <p:nvPr/>
+        </p:nvSpPr>
+        <p:spPr>
+          <a:xfrm>
+            <a:off x="548640" y="4133088"/>
+            <a:ext cx="411480" cy="457200"/>
+          </a:xfrm>
+          <a:prstGeom prst="rect">
+            <a:avLst/>
+          </a:prstGeom>
+          <a:noFill/>
+          <a:ln/>
+        </p:spPr>
+        <p:txBody>
+          <a:bodyPr wrap="square" lIns="0" tIns="0" rIns="0" bIns="0" rtlCol="0" anchor="ctr"/>
+          <a:lstStyle/>
+          <a:p>
+            <a:pPr indent="0" marL="0">
+              <a:buNone/>
+            </a:pPr>
+            <a:r>
+              <a:rPr lang="en-US" sz="2200" b="1" dirty="0">
+                <a:solidFill>
+                  <a:srgbClr val="EC0016"/>
+                </a:solidFill>
+                <a:latin typeface="Arial" pitchFamily="34" charset="0"/>
+                <a:ea typeface="Arial" pitchFamily="34" charset="-122"/>
+                <a:cs typeface="Arial" pitchFamily="34" charset="-120"/>
+              </a:rPr>
+              <a:t>4</a:t>
+            </a:r>
+            <a:endParaRPr lang="en-US" sz="2200" dirty="0"/>
+          </a:p>
+        </p:txBody>
+      </p:sp>
+      <p:sp>
+        <p:nvSpPr>
+          <p:cNvPr id="19" name="Shape 14"/>
+          <p:cNvSpPr/>
+          <p:nvPr/>
+        </p:nvSpPr>
+        <p:spPr>
+          <a:xfrm>
+            <a:off x="1005840" y="4114800"/>
+            <a:ext cx="457200" cy="457200"/>
+          </a:xfrm>
+          <a:prstGeom prst="ellipse">
+            <a:avLst/>
+          </a:prstGeom>
+          <a:solidFill>
+            <a:srgbClr val="F4F4F4"/>
+          </a:solidFill>
+          <a:ln/>
+        </p:spPr>
+      </p:sp>
+      <p:pic>
+        <p:nvPicPr>
+          <p:cNvPr id="20" name="Image 3" descr="preencoded.png">    </p:cNvPr>
+          <p:cNvPicPr>
+            <a:picLocks noChangeAspect="1"/>
+          </p:cNvPicPr>
+          <p:nvPr/>
+        </p:nvPicPr>
+        <p:blipFill>
+          <a:blip r:embed="rId4"/>
+          <a:stretch>
+            <a:fillRect/>
+          </a:stretch>
+        </p:blipFill>
+        <p:spPr>
+          <a:xfrm>
+            <a:off x="1129284" y="4238244"/>
+            <a:ext cx="210312" cy="210312"/>
+          </a:xfrm>
+          <a:prstGeom prst="rect">
+            <a:avLst/>
+          </a:prstGeom>
+        </p:spPr>
+      </p:pic>
+      <p:sp>
+        <p:nvSpPr>
+          <p:cNvPr id="21" name="Text 15"/>
+          <p:cNvSpPr/>
+          <p:nvPr/>
+        </p:nvSpPr>
+        <p:spPr>
+          <a:xfrm>
+            <a:off x="1691640" y="4142232"/>
+            <a:ext cx="2286000" cy="365760"/>
+          </a:xfrm>
+          <a:prstGeom prst="rect">
+            <a:avLst/>
+          </a:prstGeom>
+          <a:noFill/>
+          <a:ln/>
+        </p:spPr>
+        <p:txBody>
+          <a:bodyPr wrap="square" lIns="0" tIns="0" rIns="0" bIns="0" rtlCol="0" anchor="ctr"/>
+          <a:lstStyle/>
+          <a:p>
+            <a:pPr indent="0" marL="0">
+              <a:buNone/>
+            </a:pPr>
+            <a:r>
+              <a:rPr lang="en-US" sz="1550" b="1" dirty="0">
+                <a:solidFill>
+                  <a:srgbClr val="1A1A1A"/>
+                </a:solidFill>
+                <a:latin typeface="Arial" pitchFamily="34" charset="0"/>
+                <a:ea typeface="Arial" pitchFamily="34" charset="-122"/>
+                <a:cs typeface="Arial" pitchFamily="34" charset="-120"/>
+              </a:rPr>
+              <a:t>Switch user</a:t>
+            </a:r>
+            <a:endParaRPr lang="en-US" sz="1550" dirty="0"/>
+          </a:p>
+        </p:txBody>
+      </p:sp>
+      <p:sp>
+        <p:nvSpPr>
+          <p:cNvPr id="22" name="Text 16"/>
+          <p:cNvSpPr/>
+          <p:nvPr/>
+        </p:nvSpPr>
+        <p:spPr>
+          <a:xfrm>
+            <a:off x="4114800" y="4160520"/>
+            <a:ext cx="7498080" cy="457200"/>
+          </a:xfrm>
+          <a:prstGeom prst="rect">
+            <a:avLst/>
+          </a:prstGeom>
+          <a:noFill/>
+          <a:ln/>
+        </p:spPr>
+        <p:txBody>
+          <a:bodyPr wrap="square" lIns="0" tIns="0" rIns="0" bIns="0" rtlCol="0" anchor="ctr"/>
+          <a:lstStyle/>
+          <a:p>
+            <a:pPr indent="0" marL="0">
+              <a:buNone/>
+            </a:pPr>
+            <a:r>
+              <a:rPr lang="en-US" sz="1350" dirty="0">
+                <a:solidFill>
+                  <a:srgbClr val="5F5F5F"/>
+                </a:solidFill>
+                <a:latin typeface="Arial" pitchFamily="34" charset="0"/>
+                <a:ea typeface="Arial" pitchFamily="34" charset="-122"/>
+                <a:cs typeface="Arial" pitchFamily="34" charset="-120"/>
+              </a:rPr>
+              <a:t>Same agent, different user — finds nothing. Isolation at the database.</a:t>
+            </a:r>
+            <a:endParaRPr lang="en-US" sz="1350" dirty="0"/>
+          </a:p>
+        </p:txBody>
+      </p:sp>
+      <p:sp>
+        <p:nvSpPr>
+          <p:cNvPr id="23" name="Text 17"/>
+          <p:cNvSpPr/>
+          <p:nvPr/>
+        </p:nvSpPr>
+        <p:spPr>
+          <a:xfrm>
+            <a:off x="548640" y="5001768"/>
+            <a:ext cx="411480" cy="457200"/>
+          </a:xfrm>
+          <a:prstGeom prst="rect">
+            <a:avLst/>
+          </a:prstGeom>
+          <a:noFill/>
+          <a:ln/>
+        </p:spPr>
+        <p:txBody>
+          <a:bodyPr wrap="square" lIns="0" tIns="0" rIns="0" bIns="0" rtlCol="0" anchor="ctr"/>
+          <a:lstStyle/>
+          <a:p>
+            <a:pPr indent="0" marL="0">
+              <a:buNone/>
+            </a:pPr>
+            <a:r>
+              <a:rPr lang="en-US" sz="2200" b="1" dirty="0">
+                <a:solidFill>
+                  <a:srgbClr val="EC0016"/>
+                </a:solidFill>
+                <a:latin typeface="Arial" pitchFamily="34" charset="0"/>
+                <a:ea typeface="Arial" pitchFamily="34" charset="-122"/>
+                <a:cs typeface="Arial" pitchFamily="34" charset="-120"/>
+              </a:rPr>
+              <a:t>5</a:t>
+            </a:r>
+            <a:endParaRPr lang="en-US" sz="2200" dirty="0"/>
+          </a:p>
+        </p:txBody>
+      </p:sp>
+      <p:sp>
+        <p:nvSpPr>
+          <p:cNvPr id="24" name="Shape 18"/>
+          <p:cNvSpPr/>
+          <p:nvPr/>
+        </p:nvSpPr>
+        <p:spPr>
+          <a:xfrm>
+            <a:off x="1005840" y="4983480"/>
+            <a:ext cx="457200" cy="457200"/>
+          </a:xfrm>
+          <a:prstGeom prst="ellipse">
+            <a:avLst/>
+          </a:prstGeom>
+          <a:solidFill>
+            <a:srgbClr val="F4F4F4"/>
+          </a:solidFill>
+          <a:ln/>
+        </p:spPr>
+      </p:sp>
+      <p:pic>
+        <p:nvPicPr>
+          <p:cNvPr id="25" name="Image 4" descr="preencoded.png">    </p:cNvPr>
+          <p:cNvPicPr>
+            <a:picLocks noChangeAspect="1"/>
+          </p:cNvPicPr>
+          <p:nvPr/>
+        </p:nvPicPr>
+        <p:blipFill>
+          <a:blip r:embed="rId5"/>
+          <a:stretch>
+            <a:fillRect/>
+          </a:stretch>
+        </p:blipFill>
+        <p:spPr>
+          <a:xfrm>
+            <a:off x="1129284" y="5106924"/>
+            <a:ext cx="210312" cy="210312"/>
+          </a:xfrm>
+          <a:prstGeom prst="rect">
+            <a:avLst/>
+          </a:prstGeom>
+        </p:spPr>
+      </p:pic>
+      <p:sp>
+        <p:nvSpPr>
+          <p:cNvPr id="26" name="Text 19"/>
+          <p:cNvSpPr/>
+          <p:nvPr/>
+        </p:nvSpPr>
+        <p:spPr>
+          <a:xfrm>
+            <a:off x="1691640" y="5010912"/>
+            <a:ext cx="2286000" cy="365760"/>
+          </a:xfrm>
+          <a:prstGeom prst="rect">
+            <a:avLst/>
+          </a:prstGeom>
+          <a:noFill/>
+          <a:ln/>
+        </p:spPr>
+        <p:txBody>
+          <a:bodyPr wrap="square" lIns="0" tIns="0" rIns="0" bIns="0" rtlCol="0" anchor="ctr"/>
+          <a:lstStyle/>
+          <a:p>
+            <a:pPr indent="0" marL="0">
+              <a:buNone/>
+            </a:pPr>
+            <a:r>
+              <a:rPr lang="en-US" sz="1550" b="1" dirty="0">
+                <a:solidFill>
+                  <a:srgbClr val="1A1A1A"/>
+                </a:solidFill>
+                <a:latin typeface="Arial" pitchFamily="34" charset="0"/>
+                <a:ea typeface="Arial" pitchFamily="34" charset="-122"/>
+                <a:cs typeface="Arial" pitchFamily="34" charset="-120"/>
+              </a:rPr>
+              <a:t>Change my mind</a:t>
+            </a:r>
+            <a:endParaRPr lang="en-US" sz="1550" dirty="0"/>
+          </a:p>
+        </p:txBody>
+      </p:sp>
+      <p:sp>
+        <p:nvSpPr>
+          <p:cNvPr id="27" name="Text 20"/>
+          <p:cNvSpPr/>
+          <p:nvPr/>
+        </p:nvSpPr>
+        <p:spPr>
+          <a:xfrm>
+            <a:off x="4114800" y="5029200"/>
+            <a:ext cx="7498080" cy="457200"/>
+          </a:xfrm>
+          <a:prstGeom prst="rect">
+            <a:avLst/>
+          </a:prstGeom>
+          <a:noFill/>
+          <a:ln/>
+        </p:spPr>
+        <p:txBody>
+          <a:bodyPr wrap="square" lIns="0" tIns="0" rIns="0" bIns="0" rtlCol="0" anchor="ctr"/>
+          <a:lstStyle/>
+          <a:p>
+            <a:pPr indent="0" marL="0">
+              <a:buNone/>
+            </a:pPr>
+            <a:r>
+              <a:rPr lang="en-US" sz="1350" dirty="0">
+                <a:solidFill>
+                  <a:srgbClr val="5F5F5F"/>
+                </a:solidFill>
+                <a:latin typeface="Arial" pitchFamily="34" charset="0"/>
+                <a:ea typeface="Arial" pitchFamily="34" charset="-122"/>
+                <a:cs typeface="Arial" pitchFamily="34" charset="-120"/>
+              </a:rPr>
+              <a:t>“Five bullets now, not three.” Old fact retired, replacement wins.</a:t>
+            </a:r>
+            <a:endParaRPr lang="en-US" sz="1350" dirty="0"/>
+          </a:p>
+        </p:txBody>
+      </p:sp>
+      <p:sp>
+        <p:nvSpPr>
+          <p:cNvPr id="28" name="Text 21"/>
+          <p:cNvSpPr/>
+          <p:nvPr/>
+        </p:nvSpPr>
+        <p:spPr>
+          <a:xfrm>
+            <a:off x="548640" y="6035040"/>
+            <a:ext cx="10972800" cy="365760"/>
+          </a:xfrm>
+          <a:prstGeom prst="rect">
+            <a:avLst/>
+          </a:prstGeom>
+          <a:noFill/>
+          <a:ln/>
+        </p:spPr>
+        <p:txBody>
+          <a:bodyPr wrap="square" rtlCol="0" anchor="ctr"/>
+          <a:lstStyle/>
+          <a:p>
+            <a:pPr indent="0" marL="0">
+              <a:buNone/>
+            </a:pPr>
+            <a:r>
+              <a:rPr lang="en-US" sz="1250" i="1" dirty="0">
+                <a:solidFill>
+                  <a:srgbClr val="5F5F5F"/>
+                </a:solidFill>
+                <a:latin typeface="Arial" pitchFamily="34" charset="0"/>
+                <a:ea typeface="Arial" pitchFamily="34" charset="-122"/>
+                <a:cs typeface="Arial" pitchFamily="34" charset="-120"/>
+              </a:rPr>
+              <a:t>Everything is the real system on the dev pod — live database, no mocks.</a:t>
+            </a:r>
+            <a:endParaRPr lang="en-US" sz="1250" dirty="0"/>
+          </a:p>
+        </p:txBody>
+      </p:sp>
+    </p:spTree>
+  </p:cSld>
+  <p:clrMapOvr>
+    <a:masterClrMapping/>
+  </p:clrMapOvr>
+</p:sld>
+</file>
+
+<file path=ppt/slides/slide7.xml><?xml version="1.0" encoding="utf-8"?>
+<p:sld xmlns:a="http://schemas.openxmlformats.org/drawingml/2006/main" xmlns:r="http://schemas.openxmlformats.org/officeDocument/2006/relationships" xmlns:p="http://schemas.openxmlformats.org/presentationml/2006/main">
+  <p:cSld name="Slide 7">
+    <p:bg>
+      <p:bgPr>
+        <a:solidFill>
+          <a:srgbClr val="FFFFFF"/>
+        </a:solidFill>
+      </p:bgPr>
+    </p:bg>
+    <p:spTree>
+      <p:nvGrpSpPr>
+        <p:cNvPr id="1" name=""/>
+        <p:cNvGrpSpPr/>
+        <p:nvPr/>
+      </p:nvGrpSpPr>
+      <p:grpSpPr>
+        <a:xfrm>
+          <a:off x="0" y="0"/>
+          <a:ext cx="0" cy="0"/>
+          <a:chOff x="0" y="0"/>
+          <a:chExt cx="0" cy="0"/>
+        </a:xfrm>
+      </p:grpSpPr>
+      <p:sp>
+        <p:nvSpPr>
+          <p:cNvPr id="2" name="Text 0"/>
+          <p:cNvSpPr/>
+          <p:nvPr/>
+        </p:nvSpPr>
+        <p:spPr>
+          <a:xfrm>
+            <a:off x="548640" y="457200"/>
+            <a:ext cx="11064240" cy="640080"/>
+          </a:xfrm>
+          <a:prstGeom prst="rect">
+            <a:avLst/>
+          </a:prstGeom>
+          <a:noFill/>
+          <a:ln/>
+        </p:spPr>
+        <p:txBody>
+          <a:bodyPr wrap="square" rtlCol="0" anchor="ctr"/>
+          <a:lstStyle/>
+          <a:p>
+            <a:pPr indent="0" marL="0">
+              <a:buNone/>
+            </a:pPr>
+            <a:r>
+              <a:rPr lang="en-US" sz="3000" b="1" dirty="0">
+                <a:solidFill>
+                  <a:srgbClr val="1A1A1A"/>
+                </a:solidFill>
+                <a:latin typeface="Arial" pitchFamily="34" charset="0"/>
+                <a:ea typeface="Arial" pitchFamily="34" charset="-122"/>
+                <a:cs typeface="Arial" pitchFamily="34" charset="-120"/>
+              </a:rPr>
+              <a:t>Where it stands</a:t>
+            </a:r>
+            <a:endParaRPr lang="en-US" sz="3000" dirty="0"/>
+          </a:p>
+        </p:txBody>
+      </p:sp>
+      <p:sp>
+        <p:nvSpPr>
+          <p:cNvPr id="3" name="Text 1"/>
+          <p:cNvSpPr/>
+          <p:nvPr/>
+        </p:nvSpPr>
+        <p:spPr>
+          <a:xfrm>
+            <a:off x="548640" y="1325880"/>
+            <a:ext cx="5486400" cy="320040"/>
+          </a:xfrm>
+          <a:prstGeom prst="rect">
+            <a:avLst/>
+          </a:prstGeom>
+          <a:noFill/>
+          <a:ln/>
+        </p:spPr>
+        <p:txBody>
+          <a:bodyPr wrap="square" rtlCol="0" anchor="ctr"/>
+          <a:lstStyle/>
+          <a:p>
+            <a:pPr indent="0" marL="0">
+              <a:buNone/>
+            </a:pPr>
+            <a:r>
+              <a:rPr lang="en-US" sz="1200" b="1" spc="200" kern="0" dirty="0">
+                <a:solidFill>
+                  <a:srgbClr val="EC0016"/>
+                </a:solidFill>
+                <a:latin typeface="Arial" pitchFamily="34" charset="0"/>
+                <a:ea typeface="Arial" pitchFamily="34" charset="-122"/>
+                <a:cs typeface="Arial" pitchFamily="34" charset="-120"/>
+              </a:rPr>
+              <a:t>REVIEW FEEDBACK → IMPLEMENTED</a:t>
+            </a:r>
+            <a:endParaRPr lang="en-US" sz="1200" dirty="0"/>
+          </a:p>
+        </p:txBody>
+      </p:sp>
+      <p:sp>
+        <p:nvSpPr>
+          <p:cNvPr id="4" name="Shape 2"/>
+          <p:cNvSpPr/>
+          <p:nvPr/>
+        </p:nvSpPr>
+        <p:spPr>
+          <a:xfrm>
+            <a:off x="548640" y="1783080"/>
+            <a:ext cx="384048" cy="384048"/>
+          </a:xfrm>
+          <a:prstGeom prst="ellipse">
+            <a:avLst/>
+          </a:prstGeom>
+          <a:solidFill>
+            <a:srgbClr val="F4F4F4"/>
+          </a:solidFill>
+          <a:ln/>
+        </p:spPr>
+      </p:sp>
+      <p:pic>
+        <p:nvPicPr>
+          <p:cNvPr id="5" name="Image 0" descr="preencoded.png">    </p:cNvPr>
+          <p:cNvPicPr>
+            <a:picLocks noChangeAspect="1"/>
+          </p:cNvPicPr>
+          <p:nvPr/>
+        </p:nvPicPr>
+        <p:blipFill>
+          <a:blip r:embed="rId1"/>
+          <a:stretch>
+            <a:fillRect/>
+          </a:stretch>
+        </p:blipFill>
+        <p:spPr>
+          <a:xfrm>
+            <a:off x="652333" y="1886773"/>
+            <a:ext cx="176662" cy="176662"/>
+          </a:xfrm>
+          <a:prstGeom prst="rect">
+            <a:avLst/>
+          </a:prstGeom>
+        </p:spPr>
+      </p:pic>
+      <p:sp>
+        <p:nvSpPr>
+          <p:cNvPr id="6" name="Text 3"/>
+          <p:cNvSpPr/>
+          <p:nvPr/>
+        </p:nvSpPr>
+        <p:spPr>
+          <a:xfrm>
+            <a:off x="1115568" y="1792224"/>
+            <a:ext cx="5120640" cy="594360"/>
+          </a:xfrm>
+          <a:prstGeom prst="rect">
+            <a:avLst/>
+          </a:prstGeom>
+          <a:noFill/>
+          <a:ln/>
+        </p:spPr>
+        <p:txBody>
+          <a:bodyPr wrap="square" lIns="0" tIns="0" rIns="0" bIns="0" rtlCol="0" anchor="ctr"/>
+          <a:lstStyle/>
+          <a:p>
+            <a:pPr indent="0" marL="0">
+              <a:lnSpc>
+                <a:spcPct val="105000"/>
+              </a:lnSpc>
+              <a:buNone/>
+            </a:pPr>
+            <a:r>
+              <a:rPr lang="en-US" sz="1350" dirty="0">
+                <a:solidFill>
+                  <a:srgbClr val="1A1A1A"/>
+                </a:solidFill>
+                <a:latin typeface="Arial" pitchFamily="34" charset="0"/>
+                <a:ea typeface="Arial" pitchFamily="34" charset="-122"/>
+                <a:cs typeface="Arial" pitchFamily="34" charset="-120"/>
+              </a:rPr>
+              <a:t>Re-based onto current dev in a fresh branch</a:t>
+            </a:r>
+            <a:endParaRPr lang="en-US" sz="1350" dirty="0"/>
+          </a:p>
+        </p:txBody>
+      </p:sp>
+      <p:sp>
+        <p:nvSpPr>
+          <p:cNvPr id="7" name="Shape 4"/>
+          <p:cNvSpPr/>
+          <p:nvPr/>
+        </p:nvSpPr>
+        <p:spPr>
+          <a:xfrm>
+            <a:off x="548640" y="2587752"/>
+            <a:ext cx="384048" cy="384048"/>
+          </a:xfrm>
+          <a:prstGeom prst="ellipse">
+            <a:avLst/>
+          </a:prstGeom>
+          <a:solidFill>
+            <a:srgbClr val="F4F4F4"/>
+          </a:solidFill>
+          <a:ln/>
+        </p:spPr>
+      </p:sp>
+      <p:pic>
+        <p:nvPicPr>
+          <p:cNvPr id="8" name="Image 1" descr="preencoded.png">    </p:cNvPr>
+          <p:cNvPicPr>
+            <a:picLocks noChangeAspect="1"/>
+          </p:cNvPicPr>
+          <p:nvPr/>
+        </p:nvPicPr>
+        <p:blipFill>
+          <a:blip r:embed="rId2"/>
+          <a:stretch>
+            <a:fillRect/>
+          </a:stretch>
+        </p:blipFill>
+        <p:spPr>
+          <a:xfrm>
+            <a:off x="652333" y="2691445"/>
+            <a:ext cx="176662" cy="176662"/>
+          </a:xfrm>
+          <a:prstGeom prst="rect">
+            <a:avLst/>
+          </a:prstGeom>
+        </p:spPr>
+      </p:pic>
+      <p:sp>
+        <p:nvSpPr>
+          <p:cNvPr id="9" name="Text 5"/>
+          <p:cNvSpPr/>
+          <p:nvPr/>
+        </p:nvSpPr>
+        <p:spPr>
+          <a:xfrm>
+            <a:off x="1115568" y="2596896"/>
+            <a:ext cx="5120640" cy="594360"/>
+          </a:xfrm>
+          <a:prstGeom prst="rect">
+            <a:avLst/>
+          </a:prstGeom>
+          <a:noFill/>
+          <a:ln/>
+        </p:spPr>
+        <p:txBody>
+          <a:bodyPr wrap="square" lIns="0" tIns="0" rIns="0" bIns="0" rtlCol="0" anchor="ctr"/>
+          <a:lstStyle/>
+          <a:p>
+            <a:pPr indent="0" marL="0">
+              <a:lnSpc>
+                <a:spcPct val="105000"/>
+              </a:lnSpc>
+              <a:buNone/>
+            </a:pPr>
+            <a:r>
+              <a:rPr lang="en-US" sz="1350" dirty="0">
+                <a:solidFill>
+                  <a:srgbClr val="1A1A1A"/>
+                </a:solidFill>
+                <a:latin typeface="Arial" pitchFamily="34" charset="0"/>
+                <a:ea typeface="Arial" pitchFamily="34" charset="-122"/>
+                <a:cs typeface="Arial" pitchFamily="34" charset="-120"/>
+              </a:rPr>
+              <a:t>Alembic migrations — reviewed baseline, dev DB verified drift-free</a:t>
+            </a:r>
+            <a:endParaRPr lang="en-US" sz="1350" dirty="0"/>
+          </a:p>
+        </p:txBody>
+      </p:sp>
+      <p:sp>
+        <p:nvSpPr>
+          <p:cNvPr id="10" name="Shape 6"/>
+          <p:cNvSpPr/>
+          <p:nvPr/>
+        </p:nvSpPr>
+        <p:spPr>
+          <a:xfrm>
+            <a:off x="548640" y="3392424"/>
+            <a:ext cx="384048" cy="384048"/>
+          </a:xfrm>
+          <a:prstGeom prst="ellipse">
+            <a:avLst/>
+          </a:prstGeom>
+          <a:solidFill>
+            <a:srgbClr val="F4F4F4"/>
+          </a:solidFill>
+          <a:ln/>
+        </p:spPr>
+      </p:sp>
+      <p:pic>
+        <p:nvPicPr>
+          <p:cNvPr id="11" name="Image 2" descr="preencoded.png">    </p:cNvPr>
+          <p:cNvPicPr>
+            <a:picLocks noChangeAspect="1"/>
+          </p:cNvPicPr>
+          <p:nvPr/>
+        </p:nvPicPr>
+        <p:blipFill>
+          <a:blip r:embed="rId3"/>
+          <a:stretch>
+            <a:fillRect/>
+          </a:stretch>
+        </p:blipFill>
+        <p:spPr>
+          <a:xfrm>
+            <a:off x="652333" y="3496117"/>
+            <a:ext cx="176662" cy="176662"/>
+          </a:xfrm>
+          <a:prstGeom prst="rect">
+            <a:avLst/>
+          </a:prstGeom>
+        </p:spPr>
+      </p:pic>
+      <p:sp>
+        <p:nvSpPr>
+          <p:cNvPr id="12" name="Text 7"/>
+          <p:cNvSpPr/>
+          <p:nvPr/>
+        </p:nvSpPr>
+        <p:spPr>
+          <a:xfrm>
+            <a:off x="1115568" y="3401568"/>
+            <a:ext cx="5120640" cy="594360"/>
+          </a:xfrm>
+          <a:prstGeom prst="rect">
+            <a:avLst/>
+          </a:prstGeom>
+          <a:noFill/>
+          <a:ln/>
+        </p:spPr>
+        <p:txBody>
+          <a:bodyPr wrap="square" lIns="0" tIns="0" rIns="0" bIns="0" rtlCol="0" anchor="ctr"/>
+          <a:lstStyle/>
+          <a:p>
+            <a:pPr indent="0" marL="0">
+              <a:lnSpc>
+                <a:spcPct val="105000"/>
+              </a:lnSpc>
+              <a:buNone/>
+            </a:pPr>
+            <a:r>
+              <a:rPr lang="en-US" sz="1350" dirty="0">
+                <a:solidFill>
+                  <a:srgbClr val="1A1A1A"/>
+                </a:solidFill>
+                <a:latin typeface="Arial" pitchFamily="34" charset="0"/>
+                <a:ea typeface="Arial" pitchFamily="34" charset="-122"/>
+                <a:cs typeface="Arial" pitchFamily="34" charset="-120"/>
+              </a:rPr>
+              <a:t>Harness-managed DB lifecycle — no private engine</a:t>
+            </a:r>
+            <a:endParaRPr lang="en-US" sz="1350" dirty="0"/>
+          </a:p>
+        </p:txBody>
+      </p:sp>
+      <p:sp>
+        <p:nvSpPr>
+          <p:cNvPr id="13" name="Shape 8"/>
+          <p:cNvSpPr/>
+          <p:nvPr/>
+        </p:nvSpPr>
+        <p:spPr>
+          <a:xfrm>
+            <a:off x="548640" y="4197096"/>
+            <a:ext cx="384048" cy="384048"/>
+          </a:xfrm>
+          <a:prstGeom prst="ellipse">
+            <a:avLst/>
+          </a:prstGeom>
+          <a:solidFill>
+            <a:srgbClr val="F4F4F4"/>
+          </a:solidFill>
+          <a:ln/>
+        </p:spPr>
+      </p:sp>
+      <p:pic>
+        <p:nvPicPr>
+          <p:cNvPr id="14" name="Image 3" descr="preencoded.png">    </p:cNvPr>
+          <p:cNvPicPr>
+            <a:picLocks noChangeAspect="1"/>
+          </p:cNvPicPr>
+          <p:nvPr/>
+        </p:nvPicPr>
+        <p:blipFill>
+          <a:blip r:embed="rId4"/>
+          <a:stretch>
+            <a:fillRect/>
+          </a:stretch>
+        </p:blipFill>
+        <p:spPr>
+          <a:xfrm>
+            <a:off x="652333" y="4300789"/>
+            <a:ext cx="176662" cy="176662"/>
+          </a:xfrm>
+          <a:prstGeom prst="rect">
+            <a:avLst/>
+          </a:prstGeom>
+        </p:spPr>
+      </p:pic>
+      <p:sp>
+        <p:nvSpPr>
+          <p:cNvPr id="15" name="Text 9"/>
+          <p:cNvSpPr/>
+          <p:nvPr/>
+        </p:nvSpPr>
+        <p:spPr>
+          <a:xfrm>
+            <a:off x="1115568" y="4206240"/>
+            <a:ext cx="5120640" cy="594360"/>
+          </a:xfrm>
+          <a:prstGeom prst="rect">
+            <a:avLst/>
+          </a:prstGeom>
+          <a:noFill/>
+          <a:ln/>
+        </p:spPr>
+        <p:txBody>
+          <a:bodyPr wrap="square" lIns="0" tIns="0" rIns="0" bIns="0" rtlCol="0" anchor="ctr"/>
+          <a:lstStyle/>
+          <a:p>
+            <a:pPr indent="0" marL="0">
+              <a:lnSpc>
+                <a:spcPct val="105000"/>
+              </a:lnSpc>
+              <a:buNone/>
+            </a:pPr>
+            <a:r>
+              <a:rPr lang="en-US" sz="1350" dirty="0">
+                <a:solidFill>
+                  <a:srgbClr val="1A1A1A"/>
+                </a:solidFill>
+                <a:latin typeface="Arial" pitchFamily="34" charset="0"/>
+                <a:ea typeface="Arial" pitchFamily="34" charset="-122"/>
+                <a:cs typeface="Arial" pitchFamily="34" charset="-120"/>
+              </a:rPr>
+              <a:t>Validated user + tenant required everywhere memory operates</a:t>
+            </a:r>
+            <a:endParaRPr lang="en-US" sz="1350" dirty="0"/>
+          </a:p>
+        </p:txBody>
+      </p:sp>
+      <p:sp>
+        <p:nvSpPr>
+          <p:cNvPr id="16" name="Shape 10"/>
+          <p:cNvSpPr/>
+          <p:nvPr/>
+        </p:nvSpPr>
+        <p:spPr>
+          <a:xfrm>
+            <a:off x="548640" y="5001768"/>
+            <a:ext cx="384048" cy="384048"/>
+          </a:xfrm>
+          <a:prstGeom prst="ellipse">
+            <a:avLst/>
+          </a:prstGeom>
+          <a:solidFill>
+            <a:srgbClr val="F4F4F4"/>
+          </a:solidFill>
+          <a:ln/>
+        </p:spPr>
+      </p:sp>
+      <p:pic>
+        <p:nvPicPr>
+          <p:cNvPr id="17" name="Image 4" descr="preencoded.png">    </p:cNvPr>
+          <p:cNvPicPr>
+            <a:picLocks noChangeAspect="1"/>
+          </p:cNvPicPr>
+          <p:nvPr/>
+        </p:nvPicPr>
+        <p:blipFill>
+          <a:blip r:embed="rId5"/>
+          <a:stretch>
+            <a:fillRect/>
+          </a:stretch>
+        </p:blipFill>
+        <p:spPr>
+          <a:xfrm>
+            <a:off x="652333" y="5105461"/>
+            <a:ext cx="176662" cy="176662"/>
+          </a:xfrm>
+          <a:prstGeom prst="rect">
+            <a:avLst/>
+          </a:prstGeom>
+        </p:spPr>
+      </p:pic>
+      <p:sp>
+        <p:nvSpPr>
+          <p:cNvPr id="18" name="Text 11"/>
+          <p:cNvSpPr/>
+          <p:nvPr/>
+        </p:nvSpPr>
+        <p:spPr>
+          <a:xfrm>
+            <a:off x="1115568" y="5010912"/>
+            <a:ext cx="5120640" cy="594360"/>
+          </a:xfrm>
+          <a:prstGeom prst="rect">
+            <a:avLst/>
+          </a:prstGeom>
+          <a:noFill/>
+          <a:ln/>
+        </p:spPr>
+        <p:txBody>
+          <a:bodyPr wrap="square" lIns="0" tIns="0" rIns="0" bIns="0" rtlCol="0" anchor="ctr"/>
+          <a:lstStyle/>
+          <a:p>
+            <a:pPr indent="0" marL="0">
+              <a:lnSpc>
+                <a:spcPct val="105000"/>
+              </a:lnSpc>
+              <a:buNone/>
+            </a:pPr>
+            <a:r>
+              <a:rPr lang="en-US" sz="1350" dirty="0">
+                <a:solidFill>
+                  <a:srgbClr val="1A1A1A"/>
+                </a:solidFill>
+                <a:latin typeface="Arial" pitchFamily="34" charset="0"/>
+                <a:ea typeface="Arial" pitchFamily="34" charset="-122"/>
+                <a:cs typeface="Arial" pitchFamily="34" charset="-120"/>
+              </a:rPr>
+              <a:t>Ten new tests, including the off-by-default guard</a:t>
+            </a:r>
+            <a:endParaRPr lang="en-US" sz="1350" dirty="0"/>
+          </a:p>
+        </p:txBody>
+      </p:sp>
+      <p:sp>
+        <p:nvSpPr>
+          <p:cNvPr id="19" name="Shape 12"/>
+          <p:cNvSpPr/>
+          <p:nvPr/>
+        </p:nvSpPr>
+        <p:spPr>
+          <a:xfrm>
+            <a:off x="6400800" y="1325880"/>
+            <a:ext cx="5239512" cy="4572000"/>
+          </a:xfrm>
+          <a:prstGeom prst="roundRect">
+            <a:avLst>
+              <a:gd name="adj" fmla="val 2000"/>
+            </a:avLst>
+          </a:prstGeom>
+          <a:solidFill>
+            <a:srgbClr val="0F0F0F"/>
+          </a:solidFill>
+          <a:ln/>
+        </p:spPr>
+      </p:sp>
+      <p:sp>
+        <p:nvSpPr>
+          <p:cNvPr id="20" name="Text 13"/>
+          <p:cNvSpPr/>
+          <p:nvPr/>
+        </p:nvSpPr>
+        <p:spPr>
+          <a:xfrm>
+            <a:off x="6766560" y="1645920"/>
+            <a:ext cx="3657600" cy="320040"/>
+          </a:xfrm>
+          <a:prstGeom prst="rect">
+            <a:avLst/>
+          </a:prstGeom>
+          <a:noFill/>
+          <a:ln/>
+        </p:spPr>
+        <p:txBody>
+          <a:bodyPr wrap="square" lIns="0" tIns="0" rIns="0" bIns="0" rtlCol="0" anchor="ctr"/>
+          <a:lstStyle/>
+          <a:p>
+            <a:pPr indent="0" marL="0">
+              <a:buNone/>
+            </a:pPr>
+            <a:r>
+              <a:rPr lang="en-US" sz="1200" b="1" spc="300" kern="0" dirty="0">
+                <a:solidFill>
+                  <a:srgbClr val="EC0016"/>
+                </a:solidFill>
+                <a:latin typeface="Arial" pitchFamily="34" charset="0"/>
+                <a:ea typeface="Arial" pitchFamily="34" charset="-122"/>
+                <a:cs typeface="Arial" pitchFamily="34" charset="-120"/>
+              </a:rPr>
+              <a:t>STATUS</a:t>
+            </a:r>
+            <a:endParaRPr lang="en-US" sz="1200" dirty="0"/>
+          </a:p>
+        </p:txBody>
+      </p:sp>
+      <p:sp>
+        <p:nvSpPr>
+          <p:cNvPr id="21" name="Text 14"/>
+          <p:cNvSpPr/>
+          <p:nvPr/>
+        </p:nvSpPr>
+        <p:spPr>
+          <a:xfrm>
+            <a:off x="6766560" y="2057400"/>
+            <a:ext cx="4526280" cy="777240"/>
+          </a:xfrm>
+          <a:prstGeom prst="rect">
+            <a:avLst/>
+          </a:prstGeom>
+          <a:noFill/>
+          <a:ln/>
+        </p:spPr>
+        <p:txBody>
+          <a:bodyPr wrap="square" lIns="0" tIns="0" rIns="0" bIns="0" rtlCol="0" anchor="ctr"/>
+          <a:lstStyle/>
+          <a:p>
+            <a:pPr indent="0" marL="0">
+              <a:lnSpc>
+                <a:spcPct val="110000"/>
+              </a:lnSpc>
+              <a:buNone/>
+            </a:pPr>
+            <a:r>
+              <a:rPr lang="en-US" sz="1800" b="1" dirty="0">
+                <a:solidFill>
+                  <a:srgbClr val="FFFFFF"/>
+                </a:solidFill>
+                <a:latin typeface="Arial" pitchFamily="34" charset="0"/>
+                <a:ea typeface="Arial" pitchFamily="34" charset="-122"/>
+                <a:cs typeface="Arial" pitchFamily="34" charset="-120"/>
+              </a:rPr>
+              <a:t>The foundation merge request is in review now.</a:t>
+            </a:r>
+            <a:endParaRPr lang="en-US" sz="1800" dirty="0"/>
+          </a:p>
+        </p:txBody>
+      </p:sp>
+      <p:sp>
+        <p:nvSpPr>
+          <p:cNvPr id="22" name="Text 15"/>
+          <p:cNvSpPr/>
+          <p:nvPr/>
+        </p:nvSpPr>
+        <p:spPr>
+          <a:xfrm>
+            <a:off x="6766560" y="3063240"/>
+            <a:ext cx="3657600" cy="320040"/>
+          </a:xfrm>
+          <a:prstGeom prst="rect">
+            <a:avLst/>
+          </a:prstGeom>
+          <a:noFill/>
+          <a:ln/>
+        </p:spPr>
+        <p:txBody>
+          <a:bodyPr wrap="square" lIns="0" tIns="0" rIns="0" bIns="0" rtlCol="0" anchor="ctr"/>
+          <a:lstStyle/>
+          <a:p>
+            <a:pPr indent="0" marL="0">
+              <a:buNone/>
+            </a:pPr>
+            <a:r>
+              <a:rPr lang="en-US" sz="1200" b="1" spc="200" kern="0" dirty="0">
+                <a:solidFill>
+                  <a:srgbClr val="EC0016"/>
+                </a:solidFill>
+                <a:latin typeface="Arial" pitchFamily="34" charset="0"/>
+                <a:ea typeface="Arial" pitchFamily="34" charset="-122"/>
+                <a:cs typeface="Arial" pitchFamily="34" charset="-120"/>
+              </a:rPr>
+              <a:t>NEXT WAVE — DESIGNED</a:t>
+            </a:r>
+            <a:endParaRPr lang="en-US" sz="1200" dirty="0"/>
+          </a:p>
+        </p:txBody>
+      </p:sp>
+      <p:sp>
+        <p:nvSpPr>
+          <p:cNvPr id="23" name="Text 16"/>
+          <p:cNvSpPr/>
+          <p:nvPr/>
+        </p:nvSpPr>
+        <p:spPr>
+          <a:xfrm>
+            <a:off x="6766560" y="3474720"/>
+            <a:ext cx="4572000" cy="411480"/>
+          </a:xfrm>
+          <a:prstGeom prst="rect">
+            <a:avLst/>
+          </a:prstGeom>
+          <a:noFill/>
+          <a:ln/>
+        </p:spPr>
+        <p:txBody>
+          <a:bodyPr wrap="square" lIns="0" tIns="0" rIns="0" bIns="0" rtlCol="0" anchor="ctr"/>
+          <a:lstStyle/>
+          <a:p>
+            <a:pPr indent="0" marL="0">
+              <a:buNone/>
+            </a:pPr>
+            <a:r>
+              <a:rPr lang="en-US" sz="1350" dirty="0">
+                <a:solidFill>
+                  <a:srgbClr val="E6E6E6"/>
+                </a:solidFill>
+                <a:latin typeface="Arial" pitchFamily="34" charset="0"/>
+                <a:ea typeface="Arial" pitchFamily="34" charset="-122"/>
+                <a:cs typeface="Arial" pitchFamily="34" charset="-120"/>
+              </a:rPr>
+              <a:t>—  Memory out of the instruction channel</a:t>
+            </a:r>
+            <a:endParaRPr lang="en-US" sz="1350" dirty="0"/>
+          </a:p>
+        </p:txBody>
+      </p:sp>
+      <p:sp>
+        <p:nvSpPr>
+          <p:cNvPr id="24" name="Text 17"/>
+          <p:cNvSpPr/>
+          <p:nvPr/>
+        </p:nvSpPr>
+        <p:spPr>
+          <a:xfrm>
+            <a:off x="6766560" y="3977640"/>
+            <a:ext cx="4572000" cy="411480"/>
+          </a:xfrm>
+          <a:prstGeom prst="rect">
+            <a:avLst/>
+          </a:prstGeom>
+          <a:noFill/>
+          <a:ln/>
+        </p:spPr>
+        <p:txBody>
+          <a:bodyPr wrap="square" lIns="0" tIns="0" rIns="0" bIns="0" rtlCol="0" anchor="ctr"/>
+          <a:lstStyle/>
+          <a:p>
+            <a:pPr indent="0" marL="0">
+              <a:buNone/>
+            </a:pPr>
+            <a:r>
+              <a:rPr lang="en-US" sz="1350" dirty="0">
+                <a:solidFill>
+                  <a:srgbClr val="E6E6E6"/>
+                </a:solidFill>
+                <a:latin typeface="Arial" pitchFamily="34" charset="0"/>
+                <a:ea typeface="Arial" pitchFamily="34" charset="-122"/>
+                <a:cs typeface="Arial" pitchFamily="34" charset="-120"/>
+              </a:rPr>
+              <a:t>—  Durable extraction (outbox + retries)</a:t>
+            </a:r>
+            <a:endParaRPr lang="en-US" sz="1350" dirty="0"/>
+          </a:p>
+        </p:txBody>
+      </p:sp>
+      <p:sp>
+        <p:nvSpPr>
+          <p:cNvPr id="25" name="Text 18"/>
+          <p:cNvSpPr/>
+          <p:nvPr/>
+        </p:nvSpPr>
+        <p:spPr>
+          <a:xfrm>
+            <a:off x="6766560" y="4480560"/>
+            <a:ext cx="4572000" cy="411480"/>
+          </a:xfrm>
+          <a:prstGeom prst="rect">
+            <a:avLst/>
+          </a:prstGeom>
+          <a:noFill/>
+          <a:ln/>
+        </p:spPr>
+        <p:txBody>
+          <a:bodyPr wrap="square" lIns="0" tIns="0" rIns="0" bIns="0" rtlCol="0" anchor="ctr"/>
+          <a:lstStyle/>
+          <a:p>
+            <a:pPr indent="0" marL="0">
+              <a:buNone/>
+            </a:pPr>
+            <a:r>
+              <a:rPr lang="en-US" sz="1350" dirty="0">
+                <a:solidFill>
+                  <a:srgbClr val="E6E6E6"/>
+                </a:solidFill>
+                <a:latin typeface="Arial" pitchFamily="34" charset="0"/>
+                <a:ea typeface="Arial" pitchFamily="34" charset="-122"/>
+                <a:cs typeface="Arial" pitchFamily="34" charset="-120"/>
+              </a:rPr>
+              <a:t>—  View / delete / retention APIs + audit events</a:t>
+            </a:r>
+            <a:endParaRPr lang="en-US" sz="1350" dirty="0"/>
+          </a:p>
+        </p:txBody>
+      </p:sp>
+      <p:sp>
+        <p:nvSpPr>
+          <p:cNvPr id="26" name="Text 19"/>
+          <p:cNvSpPr/>
+          <p:nvPr/>
+        </p:nvSpPr>
+        <p:spPr>
+          <a:xfrm>
+            <a:off x="6766560" y="4983480"/>
+            <a:ext cx="4572000" cy="411480"/>
+          </a:xfrm>
+          <a:prstGeom prst="rect">
+            <a:avLst/>
+          </a:prstGeom>
+          <a:noFill/>
+          <a:ln/>
+        </p:spPr>
+        <p:txBody>
+          <a:bodyPr wrap="square" lIns="0" tIns="0" rIns="0" bIns="0" rtlCol="0" anchor="ctr"/>
+          <a:lstStyle/>
+          <a:p>
+            <a:pPr indent="0" marL="0">
+              <a:buNone/>
+            </a:pPr>
+            <a:r>
+              <a:rPr lang="en-US" sz="1350" dirty="0">
+                <a:solidFill>
+                  <a:srgbClr val="E6E6E6"/>
+                </a:solidFill>
+                <a:latin typeface="Arial" pitchFamily="34" charset="0"/>
+                <a:ea typeface="Arial" pitchFamily="34" charset="-122"/>
+                <a:cs typeface="Arial" pitchFamily="34" charset="-120"/>
+              </a:rPr>
+              <a:t>—  Tenant plumbing in the console</a:t>
+            </a:r>
+            <a:endParaRPr lang="en-US" sz="1350" dirty="0"/>
+          </a:p>
+        </p:txBody>
+      </p:sp>
+    </p:spTree>
+  </p:cSld>
+  <p:clrMapOvr>
+    <a:masterClrMapping/>
+  </p:clrMapOvr>
+</p:sld>
+</file>
+
+<file path=ppt/slides/slide8.xml><?xml version="1.0" encoding="utf-8"?>
+<p:sld xmlns:a="http://schemas.openxmlformats.org/drawingml/2006/main" xmlns:r="http://schemas.openxmlformats.org/officeDocument/2006/relationships" xmlns:p="http://schemas.openxmlformats.org/presentationml/2006/main">
+  <p:cSld name="Slide 8">
     <p:bg>
       <p:bgPr>
         <a:solidFill>
